--- a/ppts/CHAPTER 6 Agent Architecture.pptx
+++ b/ppts/CHAPTER 6 Agent Architecture.pptx
@@ -270,7 +270,7 @@
                 <a:latin typeface="맑은 고딕" panose="020B0503020000020004" pitchFamily="50" charset="-127"/>
                 <a:ea typeface="맑은 고딕" panose="020B0503020000020004" pitchFamily="50" charset="-127"/>
               </a:rPr>
-              <a:t>2026-07-20</a:t>
+              <a:t>2026-08-20</a:t>
             </a:fld>
             <a:endParaRPr lang="ko-KR" altLang="en-US">
               <a:latin typeface="맑은 고딕" panose="020B0503020000020004" pitchFamily="50" charset="-127"/>
@@ -456,7 +456,7 @@
           <a:p>
             <a:fld id="{43E1C3DD-4A19-441D-907C-380838DB51C4}" type="datetime1">
               <a:rPr lang="ko-KR" altLang="en-US" noProof="0" smtClean="0"/>
-              <a:t>2026-07-20</a:t>
+              <a:t>2026-08-20</a:t>
             </a:fld>
             <a:endParaRPr lang="ko-KR" altLang="en-US" noProof="0"/>
           </a:p>
@@ -1304,7 +1304,7 @@
           <a:p>
             <a:fld id="{990475B5-67CA-4281-BDCA-DA943C3C8EB3}" type="datetime1">
               <a:rPr lang="ko-KR" altLang="en-US" noProof="0" smtClean="0"/>
-              <a:t>2026-07-20</a:t>
+              <a:t>2026-08-20</a:t>
             </a:fld>
             <a:endParaRPr lang="ko-KR" altLang="en-US" noProof="0"/>
           </a:p>
@@ -1958,7 +1958,7 @@
           <a:p>
             <a:fld id="{48A87A34-81AB-432B-8DAE-1953F412C126}" type="datetimeFigureOut">
               <a:rPr lang="en-US" smtClean="0"/>
-              <a:t>7/20/2026</a:t>
+              <a:t>8/20/2026</a:t>
             </a:fld>
             <a:endParaRPr lang="en-US" dirty="0"/>
           </a:p>
@@ -2254,7 +2254,7 @@
           <a:p>
             <a:fld id="{C655C81E-72E7-4D05-94B5-F45B321A525D}" type="datetime1">
               <a:rPr lang="ko-KR" altLang="en-US" noProof="0" smtClean="0"/>
-              <a:t>2026-07-20</a:t>
+              <a:t>2026-08-20</a:t>
             </a:fld>
             <a:endParaRPr lang="ko-KR" altLang="en-US" noProof="0" dirty="0">
               <a:latin typeface="맑은 고딕" panose="020B0503020000020004" pitchFamily="50" charset="-127"/>
@@ -8265,7 +8265,7 @@
         </p:nvSpPr>
         <p:spPr>
           <a:xfrm>
-            <a:off x="580103" y="1364872"/>
+            <a:off x="580103" y="1202947"/>
             <a:ext cx="10964802" cy="423834"/>
           </a:xfrm>
           <a:prstGeom prst="rect">
@@ -8364,7 +8364,7 @@
           <p:nvPr>
             <p:extLst>
               <p:ext uri="{D42A27DB-BD31-4B8C-83A1-F6EECF244321}">
-                <p14:modId xmlns:p14="http://schemas.microsoft.com/office/powerpoint/2010/main" val="242480419"/>
+                <p14:modId xmlns:p14="http://schemas.microsoft.com/office/powerpoint/2010/main" val="3921491272"/>
               </p:ext>
             </p:extLst>
           </p:nvPr>
@@ -8410,7 +8410,7 @@
                         <a:buNone/>
                       </a:pPr>
                       <a:r>
-                        <a:rPr lang="ko-KR" altLang="en-US" sz="1600" dirty="0">
+                        <a:rPr lang="ko-KR" altLang="en-US" sz="1400" dirty="0">
                           <a:effectLst/>
                           <a:latin typeface="D2Coding" panose="020B0609020101020101" pitchFamily="49" charset="-127"/>
                           <a:ea typeface="D2Coding" panose="020B0609020101020101" pitchFamily="49" charset="-127"/>
@@ -8473,7 +8473,7 @@
                         <a:buNone/>
                       </a:pPr>
                       <a:r>
-                        <a:rPr lang="ko-KR" altLang="en-US" sz="1600" dirty="0">
+                        <a:rPr lang="ko-KR" altLang="en-US" sz="1400" dirty="0">
                           <a:effectLst/>
                           <a:latin typeface="D2Coding" panose="020B0609020101020101" pitchFamily="49" charset="-127"/>
                           <a:ea typeface="D2Coding" panose="020B0609020101020101" pitchFamily="49" charset="-127"/>
@@ -8536,7 +8536,7 @@
                         <a:buNone/>
                       </a:pPr>
                       <a:r>
-                        <a:rPr lang="en-US" altLang="ko-KR" sz="1600" dirty="0">
+                        <a:rPr lang="en-US" altLang="ko-KR" sz="1400" dirty="0">
                           <a:effectLst/>
                           <a:latin typeface="D2Coding" panose="020B0609020101020101" pitchFamily="49" charset="-127"/>
                           <a:ea typeface="D2Coding" panose="020B0609020101020101" pitchFamily="49" charset="-127"/>
@@ -8544,7 +8544,7 @@
                         <a:t>LLM</a:t>
                       </a:r>
                       <a:r>
-                        <a:rPr lang="ko-KR" altLang="en-US" sz="1600" dirty="0">
+                        <a:rPr lang="ko-KR" altLang="en-US" sz="1400" dirty="0">
                           <a:effectLst/>
                           <a:latin typeface="D2Coding" panose="020B0609020101020101" pitchFamily="49" charset="-127"/>
                           <a:ea typeface="D2Coding" panose="020B0609020101020101" pitchFamily="49" charset="-127"/>
@@ -8614,7 +8614,7 @@
                         <a:buNone/>
                       </a:pPr>
                       <a:r>
-                        <a:rPr lang="en-US" altLang="ko-KR" sz="1600" dirty="0">
+                        <a:rPr lang="en-US" altLang="ko-KR" sz="1400" dirty="0">
                           <a:effectLst/>
                           <a:latin typeface="D2Coding" panose="020B0609020101020101" pitchFamily="49" charset="-127"/>
                           <a:ea typeface="D2Coding" panose="020B0609020101020101" pitchFamily="49" charset="-127"/>
@@ -8622,7 +8622,7 @@
                         <a:t>1. </a:t>
                       </a:r>
                       <a:r>
-                        <a:rPr lang="ko-KR" altLang="en-US" sz="1600" dirty="0">
+                        <a:rPr lang="ko-KR" altLang="en-US" sz="1400" dirty="0">
                           <a:effectLst/>
                           <a:latin typeface="D2Coding" panose="020B0609020101020101" pitchFamily="49" charset="-127"/>
                           <a:ea typeface="D2Coding" panose="020B0609020101020101" pitchFamily="49" charset="-127"/>
@@ -8680,7 +8680,7 @@
                         <a:buNone/>
                       </a:pPr>
                       <a:r>
-                        <a:rPr lang="ko-KR" altLang="en-US" sz="1600" dirty="0">
+                        <a:rPr lang="ko-KR" altLang="en-US" sz="1400" dirty="0">
                           <a:effectLst/>
                           <a:latin typeface="D2Coding" panose="020B0609020101020101" pitchFamily="49" charset="-127"/>
                           <a:ea typeface="D2Coding" panose="020B0609020101020101" pitchFamily="49" charset="-127"/>
@@ -8738,7 +8738,7 @@
                         <a:buNone/>
                       </a:pPr>
                       <a:r>
-                        <a:rPr lang="en-US" altLang="ko-KR" sz="1600" dirty="0">
+                        <a:rPr lang="en-US" altLang="ko-KR" sz="1400" dirty="0">
                           <a:effectLst/>
                           <a:latin typeface="D2Coding" panose="020B0609020101020101" pitchFamily="49" charset="-127"/>
                           <a:ea typeface="D2Coding" panose="020B0609020101020101" pitchFamily="49" charset="-127"/>
@@ -8746,7 +8746,7 @@
                         <a:t>LLM</a:t>
                       </a:r>
                       <a:r>
-                        <a:rPr lang="ko-KR" altLang="en-US" sz="1600" dirty="0">
+                        <a:rPr lang="ko-KR" altLang="en-US" sz="1400" dirty="0">
                           <a:effectLst/>
                           <a:latin typeface="D2Coding" panose="020B0609020101020101" pitchFamily="49" charset="-127"/>
                           <a:ea typeface="D2Coding" panose="020B0609020101020101" pitchFamily="49" charset="-127"/>
@@ -8754,7 +8754,7 @@
                         <a:t>의 추론 및 판단 능력 </a:t>
                       </a:r>
                       <a:r>
-                        <a:rPr lang="en-US" altLang="ko-KR" sz="1600" dirty="0">
+                        <a:rPr lang="en-US" altLang="ko-KR" sz="1400" dirty="0">
                           <a:effectLst/>
                           <a:latin typeface="D2Coding" panose="020B0609020101020101" pitchFamily="49" charset="-127"/>
                           <a:ea typeface="D2Coding" panose="020B0609020101020101" pitchFamily="49" charset="-127"/>
@@ -8819,7 +8819,7 @@
                         <a:buNone/>
                       </a:pPr>
                       <a:r>
-                        <a:rPr lang="en-US" altLang="ko-KR" sz="1600">
+                        <a:rPr lang="en-US" altLang="ko-KR" sz="1400" dirty="0">
                           <a:effectLst/>
                           <a:latin typeface="D2Coding" panose="020B0609020101020101" pitchFamily="49" charset="-127"/>
                           <a:ea typeface="D2Coding" panose="020B0609020101020101" pitchFamily="49" charset="-127"/>
@@ -8827,7 +8827,7 @@
                         <a:t>2. </a:t>
                       </a:r>
                       <a:r>
-                        <a:rPr lang="ko-KR" altLang="en-US" sz="1600">
+                        <a:rPr lang="ko-KR" altLang="en-US" sz="1400" dirty="0">
                           <a:effectLst/>
                           <a:latin typeface="D2Coding" panose="020B0609020101020101" pitchFamily="49" charset="-127"/>
                           <a:ea typeface="D2Coding" panose="020B0609020101020101" pitchFamily="49" charset="-127"/>
@@ -8885,7 +8885,7 @@
                         <a:buNone/>
                       </a:pPr>
                       <a:r>
-                        <a:rPr lang="ko-KR" altLang="en-US" sz="1600" dirty="0">
+                        <a:rPr lang="ko-KR" altLang="en-US" sz="1400" dirty="0">
                           <a:effectLst/>
                           <a:latin typeface="D2Coding" panose="020B0609020101020101" pitchFamily="49" charset="-127"/>
                           <a:ea typeface="D2Coding" panose="020B0609020101020101" pitchFamily="49" charset="-127"/>
@@ -8943,7 +8943,7 @@
                         <a:buNone/>
                       </a:pPr>
                       <a:r>
-                        <a:rPr lang="ko-KR" altLang="en-US" sz="1600" dirty="0">
+                        <a:rPr lang="ko-KR" altLang="en-US" sz="1400" dirty="0">
                           <a:effectLst/>
                           <a:latin typeface="D2Coding" panose="020B0609020101020101" pitchFamily="49" charset="-127"/>
                           <a:ea typeface="D2Coding" panose="020B0609020101020101" pitchFamily="49" charset="-127"/>
@@ -8951,7 +8951,7 @@
                         <a:t>제공된 다양한 도구</a:t>
                       </a:r>
                       <a:r>
-                        <a:rPr lang="en-US" altLang="ko-KR" sz="1600" dirty="0">
+                        <a:rPr lang="en-US" altLang="ko-KR" sz="1400" dirty="0">
                           <a:effectLst/>
                           <a:latin typeface="D2Coding" panose="020B0609020101020101" pitchFamily="49" charset="-127"/>
                           <a:ea typeface="D2Coding" panose="020B0609020101020101" pitchFamily="49" charset="-127"/>
@@ -8959,14 +8959,14 @@
                         <a:t>/API </a:t>
                       </a:r>
                       <a:r>
-                        <a:rPr lang="ko-KR" altLang="en-US" sz="1600" dirty="0">
+                        <a:rPr lang="ko-KR" altLang="en-US" sz="1400" dirty="0">
                           <a:effectLst/>
                           <a:latin typeface="D2Coding" panose="020B0609020101020101" pitchFamily="49" charset="-127"/>
                           <a:ea typeface="D2Coding" panose="020B0609020101020101" pitchFamily="49" charset="-127"/>
                         </a:rPr>
                         <a:t>목록 </a:t>
                       </a:r>
-                      <a:endParaRPr lang="en-US" altLang="ko-KR" sz="1600" dirty="0">
+                      <a:endParaRPr lang="en-US" altLang="ko-KR" sz="1400" dirty="0">
                         <a:effectLst/>
                         <a:latin typeface="D2Coding" panose="020B0609020101020101" pitchFamily="49" charset="-127"/>
                         <a:ea typeface="D2Coding" panose="020B0609020101020101" pitchFamily="49" charset="-127"/>
@@ -8977,7 +8977,7 @@
                         <a:buNone/>
                       </a:pPr>
                       <a:r>
-                        <a:rPr lang="en-US" altLang="ko-KR" sz="1600" dirty="0">
+                        <a:rPr lang="en-US" altLang="ko-KR" sz="1400" dirty="0">
                           <a:effectLst/>
                           <a:latin typeface="D2Coding" panose="020B0609020101020101" pitchFamily="49" charset="-127"/>
                           <a:ea typeface="D2Coding" panose="020B0609020101020101" pitchFamily="49" charset="-127"/>
@@ -8985,7 +8985,7 @@
                         <a:t>(</a:t>
                       </a:r>
                       <a:r>
-                        <a:rPr lang="ko-KR" altLang="en-US" sz="1600" dirty="0">
+                        <a:rPr lang="ko-KR" altLang="en-US" sz="1400" dirty="0">
                           <a:effectLst/>
                           <a:latin typeface="D2Coding" panose="020B0609020101020101" pitchFamily="49" charset="-127"/>
                           <a:ea typeface="D2Coding" panose="020B0609020101020101" pitchFamily="49" charset="-127"/>
@@ -8993,7 +8993,7 @@
                         <a:t>예</a:t>
                       </a:r>
                       <a:r>
-                        <a:rPr lang="en-US" altLang="ko-KR" sz="1600" dirty="0">
+                        <a:rPr lang="en-US" altLang="ko-KR" sz="1400" dirty="0">
                           <a:effectLst/>
                           <a:latin typeface="D2Coding" panose="020B0609020101020101" pitchFamily="49" charset="-127"/>
                           <a:ea typeface="D2Coding" panose="020B0609020101020101" pitchFamily="49" charset="-127"/>
@@ -9001,7 +9001,7 @@
                         <a:t>: </a:t>
                       </a:r>
                       <a:r>
-                        <a:rPr lang="ko-KR" altLang="en-US" sz="1600" dirty="0">
+                        <a:rPr lang="ko-KR" altLang="en-US" sz="1400" dirty="0">
                           <a:effectLst/>
                           <a:latin typeface="D2Coding" panose="020B0609020101020101" pitchFamily="49" charset="-127"/>
                           <a:ea typeface="D2Coding" panose="020B0609020101020101" pitchFamily="49" charset="-127"/>
@@ -9009,7 +9009,7 @@
                         <a:t>검색</a:t>
                       </a:r>
                       <a:r>
-                        <a:rPr lang="en-US" altLang="ko-KR" sz="1600" dirty="0">
+                        <a:rPr lang="en-US" altLang="ko-KR" sz="1400" dirty="0">
                           <a:effectLst/>
                           <a:latin typeface="D2Coding" panose="020B0609020101020101" pitchFamily="49" charset="-127"/>
                           <a:ea typeface="D2Coding" panose="020B0609020101020101" pitchFamily="49" charset="-127"/>
@@ -9017,7 +9017,7 @@
                         <a:t>, </a:t>
                       </a:r>
                       <a:r>
-                        <a:rPr lang="ko-KR" altLang="en-US" sz="1600" dirty="0">
+                        <a:rPr lang="ko-KR" altLang="en-US" sz="1400" dirty="0">
                           <a:effectLst/>
                           <a:latin typeface="D2Coding" panose="020B0609020101020101" pitchFamily="49" charset="-127"/>
                           <a:ea typeface="D2Coding" panose="020B0609020101020101" pitchFamily="49" charset="-127"/>
@@ -9025,7 +9025,7 @@
                         <a:t>계산기</a:t>
                       </a:r>
                       <a:r>
-                        <a:rPr lang="en-US" altLang="ko-KR" sz="1600" dirty="0">
+                        <a:rPr lang="en-US" altLang="ko-KR" sz="1400" dirty="0">
                           <a:effectLst/>
                           <a:latin typeface="D2Coding" panose="020B0609020101020101" pitchFamily="49" charset="-127"/>
                           <a:ea typeface="D2Coding" panose="020B0609020101020101" pitchFamily="49" charset="-127"/>
@@ -9033,7 +9033,7 @@
                         <a:t>, DB </a:t>
                       </a:r>
                       <a:r>
-                        <a:rPr lang="ko-KR" altLang="en-US" sz="1600" dirty="0">
+                        <a:rPr lang="ko-KR" altLang="en-US" sz="1400" dirty="0">
                           <a:effectLst/>
                           <a:latin typeface="D2Coding" panose="020B0609020101020101" pitchFamily="49" charset="-127"/>
                           <a:ea typeface="D2Coding" panose="020B0609020101020101" pitchFamily="49" charset="-127"/>
@@ -9041,7 +9041,7 @@
                         <a:t>조회 등</a:t>
                       </a:r>
                       <a:r>
-                        <a:rPr lang="en-US" altLang="ko-KR" sz="1600" dirty="0">
+                        <a:rPr lang="en-US" altLang="ko-KR" sz="1400" dirty="0">
                           <a:effectLst/>
                           <a:latin typeface="D2Coding" panose="020B0609020101020101" pitchFamily="49" charset="-127"/>
                           <a:ea typeface="D2Coding" panose="020B0609020101020101" pitchFamily="49" charset="-127"/>
@@ -9106,7 +9106,7 @@
                         <a:buNone/>
                       </a:pPr>
                       <a:r>
-                        <a:rPr lang="en-US" altLang="ko-KR" sz="1600" dirty="0">
+                        <a:rPr lang="en-US" altLang="ko-KR" sz="1400" dirty="0">
                           <a:effectLst/>
                           <a:latin typeface="D2Coding" panose="020B0609020101020101" pitchFamily="49" charset="-127"/>
                           <a:ea typeface="D2Coding" panose="020B0609020101020101" pitchFamily="49" charset="-127"/>
@@ -9114,7 +9114,7 @@
                         <a:t>3. </a:t>
                       </a:r>
                       <a:r>
-                        <a:rPr lang="ko-KR" altLang="en-US" sz="1600" dirty="0">
+                        <a:rPr lang="ko-KR" altLang="en-US" sz="1400" dirty="0">
                           <a:effectLst/>
                           <a:latin typeface="D2Coding" panose="020B0609020101020101" pitchFamily="49" charset="-127"/>
                           <a:ea typeface="D2Coding" panose="020B0609020101020101" pitchFamily="49" charset="-127"/>
@@ -9172,7 +9172,7 @@
                         <a:buNone/>
                       </a:pPr>
                       <a:r>
-                        <a:rPr lang="ko-KR" altLang="en-US" sz="1600" dirty="0">
+                        <a:rPr lang="ko-KR" altLang="en-US" sz="1400" dirty="0">
                           <a:effectLst/>
                           <a:latin typeface="D2Coding" panose="020B0609020101020101" pitchFamily="49" charset="-127"/>
                           <a:ea typeface="D2Coding" panose="020B0609020101020101" pitchFamily="49" charset="-127"/>
@@ -9230,7 +9230,7 @@
                         <a:buNone/>
                       </a:pPr>
                       <a:r>
-                        <a:rPr lang="ko-KR" altLang="en-US" sz="1600" dirty="0">
+                        <a:rPr lang="ko-KR" altLang="en-US" sz="1400" dirty="0">
                           <a:effectLst/>
                           <a:latin typeface="D2Coding" panose="020B0609020101020101" pitchFamily="49" charset="-127"/>
                           <a:ea typeface="D2Coding" panose="020B0609020101020101" pitchFamily="49" charset="-127"/>
@@ -9238,7 +9238,7 @@
                         <a:t>사용자 입력</a:t>
                       </a:r>
                       <a:r>
-                        <a:rPr lang="en-US" altLang="ko-KR" sz="1600" dirty="0">
+                        <a:rPr lang="en-US" altLang="ko-KR" sz="1400" dirty="0">
                           <a:effectLst/>
                           <a:latin typeface="D2Coding" panose="020B0609020101020101" pitchFamily="49" charset="-127"/>
                           <a:ea typeface="D2Coding" panose="020B0609020101020101" pitchFamily="49" charset="-127"/>
@@ -9246,7 +9246,7 @@
                         <a:t>, </a:t>
                       </a:r>
                       <a:r>
-                        <a:rPr lang="ko-KR" altLang="en-US" sz="1600" dirty="0">
+                        <a:rPr lang="ko-KR" altLang="en-US" sz="1400" dirty="0">
                           <a:effectLst/>
                           <a:latin typeface="D2Coding" panose="020B0609020101020101" pitchFamily="49" charset="-127"/>
                           <a:ea typeface="D2Coding" panose="020B0609020101020101" pitchFamily="49" charset="-127"/>
@@ -9254,7 +9254,7 @@
                         <a:t>외부 </a:t>
                       </a:r>
                       <a:r>
-                        <a:rPr lang="en-US" altLang="ko-KR" sz="1600" dirty="0">
+                        <a:rPr lang="en-US" altLang="ko-KR" sz="1400" dirty="0">
                           <a:effectLst/>
                           <a:latin typeface="D2Coding" panose="020B0609020101020101" pitchFamily="49" charset="-127"/>
                           <a:ea typeface="D2Coding" panose="020B0609020101020101" pitchFamily="49" charset="-127"/>
@@ -9262,7 +9262,7 @@
                         <a:t>API</a:t>
                       </a:r>
                       <a:r>
-                        <a:rPr lang="ko-KR" altLang="en-US" sz="1600" dirty="0">
+                        <a:rPr lang="ko-KR" altLang="en-US" sz="1400" dirty="0">
                           <a:effectLst/>
                           <a:latin typeface="D2Coding" panose="020B0609020101020101" pitchFamily="49" charset="-127"/>
                           <a:ea typeface="D2Coding" panose="020B0609020101020101" pitchFamily="49" charset="-127"/>
@@ -9270,7 +9270,7 @@
                         <a:t>의 반환 값</a:t>
                       </a:r>
                       <a:r>
-                        <a:rPr lang="en-US" altLang="ko-KR" sz="1600" dirty="0">
+                        <a:rPr lang="en-US" altLang="ko-KR" sz="1400" dirty="0">
                           <a:effectLst/>
                           <a:latin typeface="D2Coding" panose="020B0609020101020101" pitchFamily="49" charset="-127"/>
                           <a:ea typeface="D2Coding" panose="020B0609020101020101" pitchFamily="49" charset="-127"/>
@@ -9278,7 +9278,7 @@
                         <a:t>, </a:t>
                       </a:r>
                       <a:r>
-                        <a:rPr lang="ko-KR" altLang="en-US" sz="1600" dirty="0">
+                        <a:rPr lang="ko-KR" altLang="en-US" sz="1400" dirty="0">
                           <a:effectLst/>
                           <a:latin typeface="D2Coding" panose="020B0609020101020101" pitchFamily="49" charset="-127"/>
                           <a:ea typeface="D2Coding" panose="020B0609020101020101" pitchFamily="49" charset="-127"/>
@@ -9286,7 +9286,7 @@
                         <a:t>검색 결과 등의 </a:t>
                       </a:r>
                       <a:r>
-                        <a:rPr lang="en-US" altLang="ko-KR" sz="1600" dirty="0">
+                        <a:rPr lang="en-US" altLang="ko-KR" sz="1400" dirty="0">
                           <a:effectLst/>
                           <a:latin typeface="D2Coding" panose="020B0609020101020101" pitchFamily="49" charset="-127"/>
                           <a:ea typeface="D2Coding" panose="020B0609020101020101" pitchFamily="49" charset="-127"/>
@@ -9507,13 +9507,27 @@
                 <a:latin typeface="D2Coding" panose="020B0609020101020101" pitchFamily="49" charset="-127"/>
                 <a:ea typeface="D2Coding" panose="020B0609020101020101" pitchFamily="49" charset="-127"/>
               </a:rPr>
-              <a:t>단순 LLM: 질문을 받으면 학습된 지식이나 입력된 텍스트를 바탕으로 </a:t>
+              <a:t>단순 </a:t>
             </a:r>
             <a:r>
               <a:rPr lang="ko-KR" altLang="en-US" sz="1400" dirty="0" err="1">
                 <a:latin typeface="D2Coding" panose="020B0609020101020101" pitchFamily="49" charset="-127"/>
                 <a:ea typeface="D2Coding" panose="020B0609020101020101" pitchFamily="49" charset="-127"/>
               </a:rPr>
+              <a:t>LLM은</a:t>
+            </a:r>
+            <a:r>
+              <a:rPr lang="ko-KR" altLang="en-US" sz="1400" dirty="0">
+                <a:latin typeface="D2Coding" panose="020B0609020101020101" pitchFamily="49" charset="-127"/>
+                <a:ea typeface="D2Coding" panose="020B0609020101020101" pitchFamily="49" charset="-127"/>
+              </a:rPr>
+              <a:t> 질문을 받으면 학습된 지식이나 입력된 텍스트를 바탕으로 </a:t>
+            </a:r>
+            <a:r>
+              <a:rPr lang="ko-KR" altLang="en-US" sz="1400" dirty="0" err="1">
+                <a:latin typeface="D2Coding" panose="020B0609020101020101" pitchFamily="49" charset="-127"/>
+                <a:ea typeface="D2Coding" panose="020B0609020101020101" pitchFamily="49" charset="-127"/>
+              </a:rPr>
               <a:t>Text</a:t>
             </a:r>
             <a:r>
@@ -9558,10 +9572,41 @@
               </a:rPr>
               <a:t>등을 수행</a:t>
             </a:r>
-            <a:endParaRPr lang="en-US" altLang="ko-KR" sz="1400" dirty="0">
-              <a:latin typeface="D2Coding" panose="020B0609020101020101" pitchFamily="49" charset="-127"/>
-              <a:ea typeface="D2Coding" panose="020B0609020101020101" pitchFamily="49" charset="-127"/>
-            </a:endParaRPr>
+            <a:r>
+              <a:rPr lang="en-US" altLang="ko-KR" sz="1400" dirty="0">
+                <a:latin typeface="D2Coding" panose="020B0609020101020101" pitchFamily="49" charset="-127"/>
+                <a:ea typeface="D2Coding" panose="020B0609020101020101" pitchFamily="49" charset="-127"/>
+              </a:rPr>
+              <a:t>(</a:t>
+            </a:r>
+            <a:r>
+              <a:rPr lang="ko-KR" altLang="en-US" sz="1400" dirty="0">
+                <a:latin typeface="D2Coding" panose="020B0609020101020101" pitchFamily="49" charset="-127"/>
+                <a:ea typeface="D2Coding" panose="020B0609020101020101" pitchFamily="49" charset="-127"/>
+              </a:rPr>
+              <a:t>단순 </a:t>
+            </a:r>
+            <a:r>
+              <a:rPr lang="en-US" altLang="ko-KR" sz="1400" dirty="0">
+                <a:latin typeface="D2Coding" panose="020B0609020101020101" pitchFamily="49" charset="-127"/>
+                <a:ea typeface="D2Coding" panose="020B0609020101020101" pitchFamily="49" charset="-127"/>
+              </a:rPr>
+              <a:t>LLM = </a:t>
+            </a:r>
+            <a:r>
+              <a:rPr lang="ko-KR" altLang="en-US" sz="1400" dirty="0">
+                <a:latin typeface="D2Coding" panose="020B0609020101020101" pitchFamily="49" charset="-127"/>
+                <a:ea typeface="D2Coding" panose="020B0609020101020101" pitchFamily="49" charset="-127"/>
+              </a:rPr>
+              <a:t>확률적 앵무새</a:t>
+            </a:r>
+            <a:r>
+              <a:rPr lang="en-US" altLang="ko-KR" sz="1400" dirty="0">
+                <a:latin typeface="D2Coding" panose="020B0609020101020101" pitchFamily="49" charset="-127"/>
+                <a:ea typeface="D2Coding" panose="020B0609020101020101" pitchFamily="49" charset="-127"/>
+              </a:rPr>
+              <a:t>)</a:t>
+            </a:r>
           </a:p>
         </p:txBody>
       </p:sp>
@@ -9785,8 +9830,8 @@
         </p:nvSpPr>
         <p:spPr>
           <a:xfrm>
-            <a:off x="580102" y="1757462"/>
-            <a:ext cx="10797653" cy="1162498"/>
+            <a:off x="580102" y="1224062"/>
+            <a:ext cx="10964803" cy="1162498"/>
           </a:xfrm>
           <a:prstGeom prst="rect">
             <a:avLst/>
@@ -9940,8 +9985,8 @@
         </p:nvSpPr>
         <p:spPr>
           <a:xfrm>
-            <a:off x="1828799" y="3429000"/>
-            <a:ext cx="9548957" cy="1077218"/>
+            <a:off x="1828799" y="3057525"/>
+            <a:ext cx="9548957" cy="1536639"/>
           </a:xfrm>
           <a:prstGeom prst="rect">
             <a:avLst/>
@@ -9951,6 +9996,7 @@
             <a:solidFill>
               <a:schemeClr val="tx1"/>
             </a:solidFill>
+            <a:prstDash val="dash"/>
           </a:ln>
         </p:spPr>
         <p:txBody>
@@ -9959,6 +10005,11 @@
           </a:bodyPr>
           <a:lstStyle/>
           <a:p>
+            <a:pPr>
+              <a:lnSpc>
+                <a:spcPct val="150000"/>
+              </a:lnSpc>
+            </a:pPr>
             <a:r>
               <a:rPr lang="ko-KR" altLang="en-US" sz="1600" b="1" dirty="0">
                 <a:latin typeface="D2Coding" panose="020B0609020101020101" pitchFamily="49" charset="-127"/>
@@ -9986,12 +10037,22 @@
             </a:endParaRPr>
           </a:p>
           <a:p>
-            <a:endParaRPr lang="en-US" altLang="ko-KR" sz="600" dirty="0">
+            <a:pPr>
+              <a:lnSpc>
+                <a:spcPct val="150000"/>
+              </a:lnSpc>
+            </a:pPr>
+            <a:endParaRPr lang="en-US" altLang="ko-KR" sz="400" dirty="0">
               <a:latin typeface="D2Coding" panose="020B0609020101020101" pitchFamily="49" charset="-127"/>
               <a:ea typeface="D2Coding" panose="020B0609020101020101" pitchFamily="49" charset="-127"/>
             </a:endParaRPr>
           </a:p>
           <a:p>
+            <a:pPr>
+              <a:lnSpc>
+                <a:spcPct val="150000"/>
+              </a:lnSpc>
+            </a:pPr>
             <a:r>
               <a:rPr lang="ko-KR" altLang="en-US" sz="1400" dirty="0">
                 <a:latin typeface="D2Coding" panose="020B0609020101020101" pitchFamily="49" charset="-127"/>
@@ -10067,41 +10128,55 @@
                 <a:latin typeface="D2Coding" panose="020B0609020101020101" pitchFamily="49" charset="-127"/>
                 <a:ea typeface="D2Coding" panose="020B0609020101020101" pitchFamily="49" charset="-127"/>
               </a:rPr>
-              <a:t>생성하는 출력에서 그 선택을 어떤 형식으로 작성할지 지침을 제공하는 기법</a:t>
+              <a:t>생성하는 출력에서 그 선택을 어떤 형식으로 작성할 지 지침을 제공하는 기법</a:t>
             </a:r>
             <a:r>
               <a:rPr lang="en-US" altLang="ko-KR" sz="1400" dirty="0">
                 <a:latin typeface="D2Coding" panose="020B0609020101020101" pitchFamily="49" charset="-127"/>
                 <a:ea typeface="D2Coding" panose="020B0609020101020101" pitchFamily="49" charset="-127"/>
               </a:rPr>
-              <a:t>(</a:t>
-            </a:r>
-            <a:r>
-              <a:rPr lang="en-US" altLang="ko-KR" sz="1400" dirty="0"/>
-              <a:t>LM </a:t>
-            </a:r>
-            <a:r>
-              <a:rPr lang="ko-KR" altLang="en-US" sz="1400" dirty="0"/>
+              <a:t>(LM </a:t>
+            </a:r>
+            <a:r>
+              <a:rPr lang="ko-KR" altLang="en-US" sz="1400" dirty="0">
+                <a:latin typeface="D2Coding" panose="020B0609020101020101" pitchFamily="49" charset="-127"/>
+                <a:ea typeface="D2Coding" panose="020B0609020101020101" pitchFamily="49" charset="-127"/>
+              </a:rPr>
               <a:t>자체는 텍스트만 생성할 수 있지</a:t>
             </a:r>
             <a:r>
-              <a:rPr lang="en-US" altLang="ko-KR" sz="1400" dirty="0"/>
+              <a:rPr lang="en-US" altLang="ko-KR" sz="1400" dirty="0">
+                <a:latin typeface="D2Coding" panose="020B0609020101020101" pitchFamily="49" charset="-127"/>
+                <a:ea typeface="D2Coding" panose="020B0609020101020101" pitchFamily="49" charset="-127"/>
+              </a:rPr>
               <a:t>, </a:t>
             </a:r>
             <a:r>
-              <a:rPr lang="ko-KR" altLang="en-US" sz="1400" dirty="0"/>
+              <a:rPr lang="ko-KR" altLang="en-US" sz="1400" dirty="0">
+                <a:latin typeface="D2Coding" panose="020B0609020101020101" pitchFamily="49" charset="-127"/>
+                <a:ea typeface="D2Coding" panose="020B0609020101020101" pitchFamily="49" charset="-127"/>
+              </a:rPr>
               <a:t>직접 코드를 실행하거나 외부 시스템을 작동시킬 수 없으나</a:t>
             </a:r>
             <a:r>
-              <a:rPr lang="en-US" altLang="ko-KR" sz="1400" dirty="0"/>
+              <a:rPr lang="en-US" altLang="ko-KR" sz="1400" dirty="0">
+                <a:latin typeface="D2Coding" panose="020B0609020101020101" pitchFamily="49" charset="-127"/>
+                <a:ea typeface="D2Coding" panose="020B0609020101020101" pitchFamily="49" charset="-127"/>
+              </a:rPr>
               <a:t>  </a:t>
             </a:r>
             <a:r>
-              <a:rPr lang="ko-KR" altLang="en-US" sz="1400" dirty="0"/>
+              <a:rPr lang="ko-KR" altLang="en-US" sz="1400" dirty="0">
+                <a:latin typeface="D2Coding" panose="020B0609020101020101" pitchFamily="49" charset="-127"/>
+                <a:ea typeface="D2Coding" panose="020B0609020101020101" pitchFamily="49" charset="-127"/>
+              </a:rPr>
               <a:t>도구 호출로 현실 세계와 상호작용</a:t>
             </a:r>
             <a:r>
-              <a:rPr lang="en-US" altLang="ko-KR" sz="1400" dirty="0"/>
+              <a:rPr lang="en-US" altLang="ko-KR" sz="1400" dirty="0">
+                <a:latin typeface="D2Coding" panose="020B0609020101020101" pitchFamily="49" charset="-127"/>
+                <a:ea typeface="D2Coding" panose="020B0609020101020101" pitchFamily="49" charset="-127"/>
+              </a:rPr>
               <a:t>)</a:t>
             </a:r>
             <a:endParaRPr lang="ko-KR" altLang="en-US" sz="1400" dirty="0">
@@ -10126,7 +10201,7 @@
         <p:spPr>
           <a:xfrm>
             <a:off x="1828799" y="5015258"/>
-            <a:ext cx="9548956" cy="1077218"/>
+            <a:ext cx="9548956" cy="1467389"/>
           </a:xfrm>
           <a:prstGeom prst="rect">
             <a:avLst/>
@@ -10136,6 +10211,7 @@
             <a:solidFill>
               <a:schemeClr val="tx1"/>
             </a:solidFill>
+            <a:prstDash val="dash"/>
           </a:ln>
         </p:spPr>
         <p:txBody>
@@ -10145,6 +10221,9 @@
           <a:lstStyle/>
           <a:p>
             <a:pPr>
+              <a:lnSpc>
+                <a:spcPct val="150000"/>
+              </a:lnSpc>
               <a:buNone/>
             </a:pPr>
             <a:r>
@@ -10164,15 +10243,21 @@
           </a:p>
           <a:p>
             <a:pPr>
+              <a:lnSpc>
+                <a:spcPct val="150000"/>
+              </a:lnSpc>
               <a:buNone/>
             </a:pPr>
-            <a:endParaRPr lang="en-US" altLang="ko-KR" sz="600" b="1" dirty="0">
+            <a:endParaRPr lang="en-US" altLang="ko-KR" sz="300" b="1" dirty="0">
               <a:latin typeface="D2Coding" panose="020B0609020101020101" pitchFamily="49" charset="-127"/>
               <a:ea typeface="D2Coding" panose="020B0609020101020101" pitchFamily="49" charset="-127"/>
             </a:endParaRPr>
           </a:p>
           <a:p>
             <a:pPr>
+              <a:lnSpc>
+                <a:spcPct val="150000"/>
+              </a:lnSpc>
               <a:buNone/>
             </a:pPr>
             <a:r>
@@ -10338,8 +10423,8 @@
         </p:nvSpPr>
         <p:spPr>
           <a:xfrm>
-            <a:off x="5978928" y="2919960"/>
-            <a:ext cx="5517847" cy="430887"/>
+            <a:off x="5025578" y="2433935"/>
+            <a:ext cx="6519327" cy="461665"/>
           </a:xfrm>
           <a:prstGeom prst="rect">
             <a:avLst/>
@@ -10352,50 +10437,54 @@
           </a:bodyPr>
           <a:lstStyle/>
           <a:p>
-            <a:r>
-              <a:rPr lang="ko-KR" altLang="en-US" sz="1050" dirty="0">
+            <a:pPr marL="171450" indent="-171450">
+              <a:buFont typeface="나눔고딕" pitchFamily="2" charset="-127"/>
+              <a:buChar char="※"/>
+            </a:pPr>
+            <a:r>
+              <a:rPr lang="ko-KR" altLang="en-US" sz="1200" dirty="0">
                 <a:latin typeface="D2Coding" panose="020B0609020101020101" pitchFamily="49" charset="-127"/>
                 <a:ea typeface="D2Coding" panose="020B0609020101020101" pitchFamily="49" charset="-127"/>
               </a:rPr>
               <a:t>최근 </a:t>
             </a:r>
             <a:r>
-              <a:rPr lang="en-US" altLang="ko-KR" sz="1050" dirty="0">
+              <a:rPr lang="en-US" altLang="ko-KR" sz="1200" dirty="0">
                 <a:latin typeface="D2Coding" panose="020B0609020101020101" pitchFamily="49" charset="-127"/>
                 <a:ea typeface="D2Coding" panose="020B0609020101020101" pitchFamily="49" charset="-127"/>
               </a:rPr>
               <a:t>LLM</a:t>
             </a:r>
             <a:r>
-              <a:rPr lang="ko-KR" altLang="en-US" sz="1050" dirty="0">
+              <a:rPr lang="ko-KR" altLang="en-US" sz="1200" dirty="0">
                 <a:latin typeface="D2Coding" panose="020B0609020101020101" pitchFamily="49" charset="-127"/>
                 <a:ea typeface="D2Coding" panose="020B0609020101020101" pitchFamily="49" charset="-127"/>
               </a:rPr>
               <a:t>은 도구 호출 및 생각의 사슬 애플리케이션에 대한 성능을 향상시키도록 </a:t>
             </a:r>
             <a:r>
-              <a:rPr lang="ko-KR" altLang="en-US" sz="1050" dirty="0" err="1">
+              <a:rPr lang="ko-KR" altLang="en-US" sz="1200" dirty="0" err="1">
                 <a:latin typeface="D2Coding" panose="020B0609020101020101" pitchFamily="49" charset="-127"/>
                 <a:ea typeface="D2Coding" panose="020B0609020101020101" pitchFamily="49" charset="-127"/>
               </a:rPr>
               <a:t>파인튜닝되어</a:t>
             </a:r>
             <a:r>
-              <a:rPr lang="ko-KR" altLang="en-US" sz="1050" dirty="0">
+              <a:rPr lang="ko-KR" altLang="en-US" sz="1200" dirty="0">
                 <a:latin typeface="D2Coding" panose="020B0609020101020101" pitchFamily="49" charset="-127"/>
                 <a:ea typeface="D2Coding" panose="020B0609020101020101" pitchFamily="49" charset="-127"/>
               </a:rPr>
               <a:t> 있어</a:t>
             </a:r>
             <a:r>
-              <a:rPr lang="en-US" altLang="ko-KR" sz="1050" dirty="0">
+              <a:rPr lang="en-US" altLang="ko-KR" sz="1200" dirty="0">
                 <a:latin typeface="D2Coding" panose="020B0609020101020101" pitchFamily="49" charset="-127"/>
                 <a:ea typeface="D2Coding" panose="020B0609020101020101" pitchFamily="49" charset="-127"/>
               </a:rPr>
               <a:t>, </a:t>
             </a:r>
             <a:r>
-              <a:rPr lang="ko-KR" altLang="en-US" sz="1050" dirty="0">
+              <a:rPr lang="ko-KR" altLang="en-US" sz="1200" dirty="0">
                 <a:latin typeface="D2Coding" panose="020B0609020101020101" pitchFamily="49" charset="-127"/>
                 <a:ea typeface="D2Coding" panose="020B0609020101020101" pitchFamily="49" charset="-127"/>
               </a:rPr>
@@ -10404,6 +10493,52 @@
           </a:p>
         </p:txBody>
       </p:sp>
+      <p:cxnSp>
+        <p:nvCxnSpPr>
+          <p:cNvPr id="7" name="연결선: 꺾임 6">
+            <a:extLst>
+              <a:ext uri="{FF2B5EF4-FFF2-40B4-BE49-F238E27FC236}">
+                <a16:creationId xmlns:a16="http://schemas.microsoft.com/office/drawing/2014/main" id="{91EE2696-E102-01BB-288C-2B43D549B451}"/>
+              </a:ext>
+            </a:extLst>
+          </p:cNvPr>
+          <p:cNvCxnSpPr>
+            <a:cxnSpLocks/>
+            <a:stCxn id="23" idx="1"/>
+            <a:endCxn id="6" idx="1"/>
+          </p:cNvCxnSpPr>
+          <p:nvPr/>
+        </p:nvCxnSpPr>
+        <p:spPr>
+          <a:xfrm rot="10800000" flipH="1" flipV="1">
+            <a:off x="580102" y="1805310"/>
+            <a:ext cx="839122" cy="2915519"/>
+          </a:xfrm>
+          <a:prstGeom prst="bentConnector3">
+            <a:avLst>
+              <a:gd name="adj1" fmla="val -27243"/>
+            </a:avLst>
+          </a:prstGeom>
+          <a:ln>
+            <a:headEnd type="none" w="med" len="med"/>
+            <a:tailEnd type="triangle" w="med" len="med"/>
+          </a:ln>
+        </p:spPr>
+        <p:style>
+          <a:lnRef idx="1">
+            <a:schemeClr val="dk1"/>
+          </a:lnRef>
+          <a:fillRef idx="0">
+            <a:schemeClr val="dk1"/>
+          </a:fillRef>
+          <a:effectRef idx="0">
+            <a:schemeClr val="dk1"/>
+          </a:effectRef>
+          <a:fontRef idx="minor">
+            <a:schemeClr val="tx1"/>
+          </a:fontRef>
+        </p:style>
+      </p:cxnSp>
     </p:spTree>
     <p:extLst>
       <p:ext uri="{BB962C8B-B14F-4D97-AF65-F5344CB8AC3E}">
@@ -10608,8 +10743,8 @@
         </p:nvSpPr>
         <p:spPr>
           <a:xfrm>
-            <a:off x="2047357" y="2370953"/>
-            <a:ext cx="9497548" cy="3754874"/>
+            <a:off x="1679504" y="2280486"/>
+            <a:ext cx="9497548" cy="4278094"/>
           </a:xfrm>
           <a:prstGeom prst="rect">
             <a:avLst/>
@@ -10625,42 +10760,42 @@
           <a:lstStyle/>
           <a:p>
             <a:r>
-              <a:rPr lang="ko-KR" altLang="en-US" sz="1400" dirty="0" err="1">
+              <a:rPr lang="ko-KR" altLang="en-US" sz="1600" dirty="0" err="1">
                 <a:latin typeface="D2Coding" panose="020B0609020101020101" pitchFamily="49" charset="-127"/>
                 <a:ea typeface="D2Coding" panose="020B0609020101020101" pitchFamily="49" charset="-127"/>
               </a:rPr>
               <a:t>def</a:t>
             </a:r>
             <a:r>
-              <a:rPr lang="ko-KR" altLang="en-US" sz="1400" dirty="0">
+              <a:rPr lang="ko-KR" altLang="en-US" sz="1600" dirty="0">
                 <a:latin typeface="D2Coding" panose="020B0609020101020101" pitchFamily="49" charset="-127"/>
                 <a:ea typeface="D2Coding" panose="020B0609020101020101" pitchFamily="49" charset="-127"/>
               </a:rPr>
               <a:t> </a:t>
             </a:r>
             <a:r>
-              <a:rPr lang="ko-KR" altLang="en-US" sz="1400" dirty="0" err="1">
+              <a:rPr lang="ko-KR" altLang="en-US" sz="1600" dirty="0" err="1">
                 <a:latin typeface="D2Coding" panose="020B0609020101020101" pitchFamily="49" charset="-127"/>
                 <a:ea typeface="D2Coding" panose="020B0609020101020101" pitchFamily="49" charset="-127"/>
               </a:rPr>
               <a:t>run_static_cot_pipeline</a:t>
             </a:r>
             <a:r>
-              <a:rPr lang="ko-KR" altLang="en-US" sz="1400" dirty="0">
+              <a:rPr lang="ko-KR" altLang="en-US" sz="1600" dirty="0">
                 <a:latin typeface="D2Coding" panose="020B0609020101020101" pitchFamily="49" charset="-127"/>
                 <a:ea typeface="D2Coding" panose="020B0609020101020101" pitchFamily="49" charset="-127"/>
               </a:rPr>
               <a:t>(</a:t>
             </a:r>
             <a:r>
-              <a:rPr lang="ko-KR" altLang="en-US" sz="1400" dirty="0" err="1">
+              <a:rPr lang="ko-KR" altLang="en-US" sz="1600" dirty="0" err="1">
                 <a:latin typeface="D2Coding" panose="020B0609020101020101" pitchFamily="49" charset="-127"/>
                 <a:ea typeface="D2Coding" panose="020B0609020101020101" pitchFamily="49" charset="-127"/>
               </a:rPr>
               <a:t>user_query</a:t>
             </a:r>
             <a:r>
-              <a:rPr lang="ko-KR" altLang="en-US" sz="1400" dirty="0">
+              <a:rPr lang="ko-KR" altLang="en-US" sz="1600" dirty="0">
                 <a:latin typeface="D2Coding" panose="020B0609020101020101" pitchFamily="49" charset="-127"/>
                 <a:ea typeface="D2Coding" panose="020B0609020101020101" pitchFamily="49" charset="-127"/>
               </a:rPr>
@@ -10669,7 +10804,7 @@
           </a:p>
           <a:p>
             <a:r>
-              <a:rPr lang="ko-KR" altLang="en-US" sz="1400" dirty="0">
+              <a:rPr lang="ko-KR" altLang="en-US" sz="1600" dirty="0">
                 <a:latin typeface="D2Coding" panose="020B0609020101020101" pitchFamily="49" charset="-127"/>
                 <a:ea typeface="D2Coding" panose="020B0609020101020101" pitchFamily="49" charset="-127"/>
               </a:rPr>
@@ -10678,49 +10813,49 @@
           </a:p>
           <a:p>
             <a:r>
-              <a:rPr lang="ko-KR" altLang="en-US" sz="1400" dirty="0">
+              <a:rPr lang="ko-KR" altLang="en-US" sz="1600" dirty="0">
                 <a:latin typeface="D2Coding" panose="020B0609020101020101" pitchFamily="49" charset="-127"/>
                 <a:ea typeface="D2Coding" panose="020B0609020101020101" pitchFamily="49" charset="-127"/>
               </a:rPr>
               <a:t>    prompt_1 = </a:t>
             </a:r>
             <a:r>
-              <a:rPr lang="ko-KR" altLang="en-US" sz="1400" dirty="0" err="1">
+              <a:rPr lang="ko-KR" altLang="en-US" sz="1600" dirty="0" err="1">
                 <a:latin typeface="D2Coding" panose="020B0609020101020101" pitchFamily="49" charset="-127"/>
                 <a:ea typeface="D2Coding" panose="020B0609020101020101" pitchFamily="49" charset="-127"/>
               </a:rPr>
               <a:t>f"질문</a:t>
             </a:r>
             <a:r>
-              <a:rPr lang="ko-KR" altLang="en-US" sz="1400" dirty="0">
+              <a:rPr lang="ko-KR" altLang="en-US" sz="1600" dirty="0">
                 <a:latin typeface="D2Coding" panose="020B0609020101020101" pitchFamily="49" charset="-127"/>
                 <a:ea typeface="D2Coding" panose="020B0609020101020101" pitchFamily="49" charset="-127"/>
               </a:rPr>
               <a:t>: {</a:t>
             </a:r>
             <a:r>
-              <a:rPr lang="ko-KR" altLang="en-US" sz="1400" dirty="0" err="1">
+              <a:rPr lang="ko-KR" altLang="en-US" sz="1600" dirty="0" err="1">
                 <a:latin typeface="D2Coding" panose="020B0609020101020101" pitchFamily="49" charset="-127"/>
                 <a:ea typeface="D2Coding" panose="020B0609020101020101" pitchFamily="49" charset="-127"/>
               </a:rPr>
               <a:t>user_query</a:t>
             </a:r>
             <a:r>
-              <a:rPr lang="ko-KR" altLang="en-US" sz="1400" dirty="0">
+              <a:rPr lang="ko-KR" altLang="en-US" sz="1600" dirty="0">
                 <a:latin typeface="D2Coding" panose="020B0609020101020101" pitchFamily="49" charset="-127"/>
                 <a:ea typeface="D2Coding" panose="020B0609020101020101" pitchFamily="49" charset="-127"/>
               </a:rPr>
               <a:t>}\</a:t>
             </a:r>
             <a:r>
-              <a:rPr lang="ko-KR" altLang="en-US" sz="1400" dirty="0" err="1">
+              <a:rPr lang="ko-KR" altLang="en-US" sz="1600" dirty="0" err="1">
                 <a:latin typeface="D2Coding" panose="020B0609020101020101" pitchFamily="49" charset="-127"/>
                 <a:ea typeface="D2Coding" panose="020B0609020101020101" pitchFamily="49" charset="-127"/>
               </a:rPr>
               <a:t>n단계별로</a:t>
             </a:r>
             <a:r>
-              <a:rPr lang="ko-KR" altLang="en-US" sz="1400" dirty="0">
+              <a:rPr lang="ko-KR" altLang="en-US" sz="1600" dirty="0">
                 <a:latin typeface="D2Coding" panose="020B0609020101020101" pitchFamily="49" charset="-127"/>
                 <a:ea typeface="D2Coding" panose="020B0609020101020101" pitchFamily="49" charset="-127"/>
               </a:rPr>
@@ -10729,49 +10864,49 @@
           </a:p>
           <a:p>
             <a:r>
-              <a:rPr lang="ko-KR" altLang="en-US" sz="1400" dirty="0">
+              <a:rPr lang="ko-KR" altLang="en-US" sz="1600" dirty="0">
                 <a:latin typeface="D2Coding" panose="020B0609020101020101" pitchFamily="49" charset="-127"/>
                 <a:ea typeface="D2Coding" panose="020B0609020101020101" pitchFamily="49" charset="-127"/>
               </a:rPr>
               <a:t>    action_1 = </a:t>
             </a:r>
             <a:r>
-              <a:rPr lang="ko-KR" altLang="en-US" sz="1400" dirty="0" err="1">
+              <a:rPr lang="ko-KR" altLang="en-US" sz="1600" dirty="0" err="1">
                 <a:latin typeface="D2Coding" panose="020B0609020101020101" pitchFamily="49" charset="-127"/>
                 <a:ea typeface="D2Coding" panose="020B0609020101020101" pitchFamily="49" charset="-127"/>
               </a:rPr>
               <a:t>llm.generate</a:t>
             </a:r>
             <a:r>
-              <a:rPr lang="ko-KR" altLang="en-US" sz="1400" dirty="0">
+              <a:rPr lang="ko-KR" altLang="en-US" sz="1600" dirty="0">
                 <a:latin typeface="D2Coding" panose="020B0609020101020101" pitchFamily="49" charset="-127"/>
                 <a:ea typeface="D2Coding" panose="020B0609020101020101" pitchFamily="49" charset="-127"/>
               </a:rPr>
               <a:t>(prompt_1)  # 예: "</a:t>
             </a:r>
             <a:r>
-              <a:rPr lang="ko-KR" altLang="en-US" sz="1400" dirty="0" err="1">
+              <a:rPr lang="ko-KR" altLang="en-US" sz="1600" dirty="0" err="1">
                 <a:latin typeface="D2Coding" panose="020B0609020101020101" pitchFamily="49" charset="-127"/>
                 <a:ea typeface="D2Coding" panose="020B0609020101020101" pitchFamily="49" charset="-127"/>
               </a:rPr>
               <a:t>search</a:t>
             </a:r>
             <a:r>
-              <a:rPr lang="ko-KR" altLang="en-US" sz="1400" dirty="0">
+              <a:rPr lang="ko-KR" altLang="en-US" sz="1600" dirty="0">
                 <a:latin typeface="D2Coding" panose="020B0609020101020101" pitchFamily="49" charset="-127"/>
                 <a:ea typeface="D2Coding" panose="020B0609020101020101" pitchFamily="49" charset="-127"/>
               </a:rPr>
               <a:t>, 30th </a:t>
             </a:r>
             <a:r>
-              <a:rPr lang="ko-KR" altLang="en-US" sz="1400" dirty="0" err="1">
+              <a:rPr lang="ko-KR" altLang="en-US" sz="1600" dirty="0" err="1">
                 <a:latin typeface="D2Coding" panose="020B0609020101020101" pitchFamily="49" charset="-127"/>
                 <a:ea typeface="D2Coding" panose="020B0609020101020101" pitchFamily="49" charset="-127"/>
               </a:rPr>
               <a:t>president</a:t>
             </a:r>
             <a:r>
-              <a:rPr lang="ko-KR" altLang="en-US" sz="1400" dirty="0">
+              <a:rPr lang="ko-KR" altLang="en-US" sz="1600" dirty="0">
                 <a:latin typeface="D2Coding" panose="020B0609020101020101" pitchFamily="49" charset="-127"/>
                 <a:ea typeface="D2Coding" panose="020B0609020101020101" pitchFamily="49" charset="-127"/>
               </a:rPr>
@@ -10780,21 +10915,21 @@
           </a:p>
           <a:p>
             <a:r>
-              <a:rPr lang="ko-KR" altLang="en-US" sz="1400" dirty="0">
+              <a:rPr lang="ko-KR" altLang="en-US" sz="1600" dirty="0">
                 <a:latin typeface="D2Coding" panose="020B0609020101020101" pitchFamily="49" charset="-127"/>
                 <a:ea typeface="D2Coding" panose="020B0609020101020101" pitchFamily="49" charset="-127"/>
               </a:rPr>
               <a:t>    result_1 = </a:t>
             </a:r>
             <a:r>
-              <a:rPr lang="ko-KR" altLang="en-US" sz="1400" dirty="0" err="1">
+              <a:rPr lang="ko-KR" altLang="en-US" sz="1600" dirty="0" err="1">
                 <a:latin typeface="D2Coding" panose="020B0609020101020101" pitchFamily="49" charset="-127"/>
                 <a:ea typeface="D2Coding" panose="020B0609020101020101" pitchFamily="49" charset="-127"/>
               </a:rPr>
               <a:t>execute_tool</a:t>
             </a:r>
             <a:r>
-              <a:rPr lang="ko-KR" altLang="en-US" sz="1400" dirty="0">
+              <a:rPr lang="ko-KR" altLang="en-US" sz="1600" dirty="0">
                 <a:latin typeface="D2Coding" panose="020B0609020101020101" pitchFamily="49" charset="-127"/>
                 <a:ea typeface="D2Coding" panose="020B0609020101020101" pitchFamily="49" charset="-127"/>
               </a:rPr>
@@ -10803,7 +10938,7 @@
           </a:p>
           <a:p>
             <a:r>
-              <a:rPr lang="ko-KR" altLang="en-US" sz="1400" dirty="0">
+              <a:rPr lang="ko-KR" altLang="en-US" sz="1600" dirty="0">
                 <a:latin typeface="D2Coding" panose="020B0609020101020101" pitchFamily="49" charset="-127"/>
                 <a:ea typeface="D2Coding" panose="020B0609020101020101" pitchFamily="49" charset="-127"/>
               </a:rPr>
@@ -10812,7 +10947,7 @@
           </a:p>
           <a:p>
             <a:r>
-              <a:rPr lang="ko-KR" altLang="en-US" sz="1400" dirty="0">
+              <a:rPr lang="ko-KR" altLang="en-US" sz="1600" dirty="0">
                 <a:latin typeface="D2Coding" panose="020B0609020101020101" pitchFamily="49" charset="-127"/>
                 <a:ea typeface="D2Coding" panose="020B0609020101020101" pitchFamily="49" charset="-127"/>
               </a:rPr>
@@ -10821,7 +10956,7 @@
           </a:p>
           <a:p>
             <a:r>
-              <a:rPr lang="ko-KR" altLang="en-US" sz="1400" dirty="0">
+              <a:rPr lang="ko-KR" altLang="en-US" sz="1600" dirty="0">
                 <a:latin typeface="D2Coding" panose="020B0609020101020101" pitchFamily="49" charset="-127"/>
                 <a:ea typeface="D2Coding" panose="020B0609020101020101" pitchFamily="49" charset="-127"/>
               </a:rPr>
@@ -10830,49 +10965,49 @@
           </a:p>
           <a:p>
             <a:r>
-              <a:rPr lang="ko-KR" altLang="en-US" sz="1400" dirty="0">
+              <a:rPr lang="ko-KR" altLang="en-US" sz="1600" dirty="0">
                 <a:latin typeface="D2Coding" panose="020B0609020101020101" pitchFamily="49" charset="-127"/>
                 <a:ea typeface="D2Coding" panose="020B0609020101020101" pitchFamily="49" charset="-127"/>
               </a:rPr>
               <a:t>    prompt_2 = </a:t>
             </a:r>
             <a:r>
-              <a:rPr lang="ko-KR" altLang="en-US" sz="1400" dirty="0" err="1">
+              <a:rPr lang="ko-KR" altLang="en-US" sz="1600" dirty="0" err="1">
                 <a:latin typeface="D2Coding" panose="020B0609020101020101" pitchFamily="49" charset="-127"/>
                 <a:ea typeface="D2Coding" panose="020B0609020101020101" pitchFamily="49" charset="-127"/>
               </a:rPr>
               <a:t>f</a:t>
             </a:r>
             <a:r>
-              <a:rPr lang="ko-KR" altLang="en-US" sz="1400" dirty="0">
+              <a:rPr lang="ko-KR" altLang="en-US" sz="1600" dirty="0">
                 <a:latin typeface="D2Coding" panose="020B0609020101020101" pitchFamily="49" charset="-127"/>
                 <a:ea typeface="D2Coding" panose="020B0609020101020101" pitchFamily="49" charset="-127"/>
               </a:rPr>
               <a:t>"{prompt_1}\</a:t>
             </a:r>
             <a:r>
-              <a:rPr lang="ko-KR" altLang="en-US" sz="1400" dirty="0" err="1">
+              <a:rPr lang="ko-KR" altLang="en-US" sz="1600" dirty="0" err="1">
                 <a:latin typeface="D2Coding" panose="020B0609020101020101" pitchFamily="49" charset="-127"/>
                 <a:ea typeface="D2Coding" panose="020B0609020101020101" pitchFamily="49" charset="-127"/>
               </a:rPr>
               <a:t>n결과</a:t>
             </a:r>
             <a:r>
-              <a:rPr lang="ko-KR" altLang="en-US" sz="1400" dirty="0">
+              <a:rPr lang="ko-KR" altLang="en-US" sz="1600" dirty="0">
                 <a:latin typeface="D2Coding" panose="020B0609020101020101" pitchFamily="49" charset="-127"/>
                 <a:ea typeface="D2Coding" panose="020B0609020101020101" pitchFamily="49" charset="-127"/>
               </a:rPr>
               <a:t>: {result_1}\</a:t>
             </a:r>
             <a:r>
-              <a:rPr lang="ko-KR" altLang="en-US" sz="1400" dirty="0" err="1">
+              <a:rPr lang="ko-KR" altLang="en-US" sz="1600" dirty="0" err="1">
                 <a:latin typeface="D2Coding" panose="020B0609020101020101" pitchFamily="49" charset="-127"/>
                 <a:ea typeface="D2Coding" panose="020B0609020101020101" pitchFamily="49" charset="-127"/>
               </a:rPr>
               <a:t>n다음</a:t>
             </a:r>
             <a:r>
-              <a:rPr lang="ko-KR" altLang="en-US" sz="1400" dirty="0">
+              <a:rPr lang="ko-KR" altLang="en-US" sz="1600" dirty="0">
                 <a:latin typeface="D2Coding" panose="020B0609020101020101" pitchFamily="49" charset="-127"/>
                 <a:ea typeface="D2Coding" panose="020B0609020101020101" pitchFamily="49" charset="-127"/>
               </a:rPr>
@@ -10881,35 +11016,35 @@
           </a:p>
           <a:p>
             <a:r>
-              <a:rPr lang="ko-KR" altLang="en-US" sz="1400" dirty="0">
+              <a:rPr lang="ko-KR" altLang="en-US" sz="1600" dirty="0">
                 <a:latin typeface="D2Coding" panose="020B0609020101020101" pitchFamily="49" charset="-127"/>
                 <a:ea typeface="D2Coding" panose="020B0609020101020101" pitchFamily="49" charset="-127"/>
               </a:rPr>
               <a:t>    action_2 = </a:t>
             </a:r>
             <a:r>
-              <a:rPr lang="ko-KR" altLang="en-US" sz="1400" dirty="0" err="1">
+              <a:rPr lang="ko-KR" altLang="en-US" sz="1600" dirty="0" err="1">
                 <a:latin typeface="D2Coding" panose="020B0609020101020101" pitchFamily="49" charset="-127"/>
                 <a:ea typeface="D2Coding" panose="020B0609020101020101" pitchFamily="49" charset="-127"/>
               </a:rPr>
               <a:t>llm.generate</a:t>
             </a:r>
             <a:r>
-              <a:rPr lang="ko-KR" altLang="en-US" sz="1400" dirty="0">
+              <a:rPr lang="ko-KR" altLang="en-US" sz="1600" dirty="0">
                 <a:latin typeface="D2Coding" panose="020B0609020101020101" pitchFamily="49" charset="-127"/>
                 <a:ea typeface="D2Coding" panose="020B0609020101020101" pitchFamily="49" charset="-127"/>
               </a:rPr>
               <a:t>(prompt_2)  # 예: "</a:t>
             </a:r>
             <a:r>
-              <a:rPr lang="ko-KR" altLang="en-US" sz="1400" dirty="0" err="1">
+              <a:rPr lang="ko-KR" altLang="en-US" sz="1600" dirty="0" err="1">
                 <a:latin typeface="D2Coding" panose="020B0609020101020101" pitchFamily="49" charset="-127"/>
                 <a:ea typeface="D2Coding" panose="020B0609020101020101" pitchFamily="49" charset="-127"/>
               </a:rPr>
               <a:t>calculator</a:t>
             </a:r>
             <a:r>
-              <a:rPr lang="ko-KR" altLang="en-US" sz="1400" dirty="0">
+              <a:rPr lang="ko-KR" altLang="en-US" sz="1600" dirty="0">
                 <a:latin typeface="D2Coding" panose="020B0609020101020101" pitchFamily="49" charset="-127"/>
                 <a:ea typeface="D2Coding" panose="020B0609020101020101" pitchFamily="49" charset="-127"/>
               </a:rPr>
@@ -10918,21 +11053,21 @@
           </a:p>
           <a:p>
             <a:r>
-              <a:rPr lang="ko-KR" altLang="en-US" sz="1400" dirty="0">
+              <a:rPr lang="ko-KR" altLang="en-US" sz="1600" dirty="0">
                 <a:latin typeface="D2Coding" panose="020B0609020101020101" pitchFamily="49" charset="-127"/>
                 <a:ea typeface="D2Coding" panose="020B0609020101020101" pitchFamily="49" charset="-127"/>
               </a:rPr>
               <a:t>    result_2 = </a:t>
             </a:r>
             <a:r>
-              <a:rPr lang="ko-KR" altLang="en-US" sz="1400" dirty="0" err="1">
+              <a:rPr lang="ko-KR" altLang="en-US" sz="1600" dirty="0" err="1">
                 <a:latin typeface="D2Coding" panose="020B0609020101020101" pitchFamily="49" charset="-127"/>
                 <a:ea typeface="D2Coding" panose="020B0609020101020101" pitchFamily="49" charset="-127"/>
               </a:rPr>
               <a:t>execute_tool</a:t>
             </a:r>
             <a:r>
-              <a:rPr lang="ko-KR" altLang="en-US" sz="1400" dirty="0">
+              <a:rPr lang="ko-KR" altLang="en-US" sz="1600" dirty="0">
                 <a:latin typeface="D2Coding" panose="020B0609020101020101" pitchFamily="49" charset="-127"/>
                 <a:ea typeface="D2Coding" panose="020B0609020101020101" pitchFamily="49" charset="-127"/>
               </a:rPr>
@@ -10941,7 +11076,7 @@
           </a:p>
           <a:p>
             <a:r>
-              <a:rPr lang="ko-KR" altLang="en-US" sz="1400" dirty="0">
+              <a:rPr lang="ko-KR" altLang="en-US" sz="1600" dirty="0">
                 <a:latin typeface="D2Coding" panose="020B0609020101020101" pitchFamily="49" charset="-127"/>
                 <a:ea typeface="D2Coding" panose="020B0609020101020101" pitchFamily="49" charset="-127"/>
               </a:rPr>
@@ -10950,7 +11085,7 @@
           </a:p>
           <a:p>
             <a:r>
-              <a:rPr lang="ko-KR" altLang="en-US" sz="1400" dirty="0">
+              <a:rPr lang="ko-KR" altLang="en-US" sz="1600" dirty="0">
                 <a:latin typeface="D2Coding" panose="020B0609020101020101" pitchFamily="49" charset="-127"/>
                 <a:ea typeface="D2Coding" panose="020B0609020101020101" pitchFamily="49" charset="-127"/>
               </a:rPr>
@@ -10959,35 +11094,35 @@
           </a:p>
           <a:p>
             <a:r>
-              <a:rPr lang="ko-KR" altLang="en-US" sz="1400" dirty="0">
+              <a:rPr lang="ko-KR" altLang="en-US" sz="1600" dirty="0">
                 <a:latin typeface="D2Coding" panose="020B0609020101020101" pitchFamily="49" charset="-127"/>
                 <a:ea typeface="D2Coding" panose="020B0609020101020101" pitchFamily="49" charset="-127"/>
               </a:rPr>
               <a:t>    </a:t>
             </a:r>
             <a:r>
-              <a:rPr lang="ko-KR" altLang="en-US" sz="1400" dirty="0" err="1">
+              <a:rPr lang="ko-KR" altLang="en-US" sz="1600" dirty="0" err="1">
                 <a:latin typeface="D2Coding" panose="020B0609020101020101" pitchFamily="49" charset="-127"/>
                 <a:ea typeface="D2Coding" panose="020B0609020101020101" pitchFamily="49" charset="-127"/>
               </a:rPr>
               <a:t>final_prompt</a:t>
             </a:r>
             <a:r>
-              <a:rPr lang="ko-KR" altLang="en-US" sz="1400" dirty="0">
+              <a:rPr lang="ko-KR" altLang="en-US" sz="1600" dirty="0">
                 <a:latin typeface="D2Coding" panose="020B0609020101020101" pitchFamily="49" charset="-127"/>
                 <a:ea typeface="D2Coding" panose="020B0609020101020101" pitchFamily="49" charset="-127"/>
               </a:rPr>
               <a:t> = </a:t>
             </a:r>
             <a:r>
-              <a:rPr lang="ko-KR" altLang="en-US" sz="1400" dirty="0" err="1">
+              <a:rPr lang="ko-KR" altLang="en-US" sz="1600" dirty="0" err="1">
                 <a:latin typeface="D2Coding" panose="020B0609020101020101" pitchFamily="49" charset="-127"/>
                 <a:ea typeface="D2Coding" panose="020B0609020101020101" pitchFamily="49" charset="-127"/>
               </a:rPr>
               <a:t>f"계산</a:t>
             </a:r>
             <a:r>
-              <a:rPr lang="ko-KR" altLang="en-US" sz="1400" dirty="0">
+              <a:rPr lang="ko-KR" altLang="en-US" sz="1600" dirty="0">
                 <a:latin typeface="D2Coding" panose="020B0609020101020101" pitchFamily="49" charset="-127"/>
                 <a:ea typeface="D2Coding" panose="020B0609020101020101" pitchFamily="49" charset="-127"/>
               </a:rPr>
@@ -10996,49 +11131,49 @@
           </a:p>
           <a:p>
             <a:r>
-              <a:rPr lang="ko-KR" altLang="en-US" sz="1400" dirty="0">
+              <a:rPr lang="ko-KR" altLang="en-US" sz="1600" dirty="0">
                 <a:latin typeface="D2Coding" panose="020B0609020101020101" pitchFamily="49" charset="-127"/>
                 <a:ea typeface="D2Coding" panose="020B0609020101020101" pitchFamily="49" charset="-127"/>
               </a:rPr>
               <a:t>    </a:t>
             </a:r>
             <a:r>
-              <a:rPr lang="ko-KR" altLang="en-US" sz="1400" dirty="0" err="1">
+              <a:rPr lang="ko-KR" altLang="en-US" sz="1600" dirty="0" err="1">
                 <a:latin typeface="D2Coding" panose="020B0609020101020101" pitchFamily="49" charset="-127"/>
                 <a:ea typeface="D2Coding" panose="020B0609020101020101" pitchFamily="49" charset="-127"/>
               </a:rPr>
               <a:t>final_response</a:t>
             </a:r>
             <a:r>
-              <a:rPr lang="ko-KR" altLang="en-US" sz="1400" dirty="0">
+              <a:rPr lang="ko-KR" altLang="en-US" sz="1600" dirty="0">
                 <a:latin typeface="D2Coding" panose="020B0609020101020101" pitchFamily="49" charset="-127"/>
                 <a:ea typeface="D2Coding" panose="020B0609020101020101" pitchFamily="49" charset="-127"/>
               </a:rPr>
               <a:t> = </a:t>
             </a:r>
             <a:r>
-              <a:rPr lang="ko-KR" altLang="en-US" sz="1400" dirty="0" err="1">
+              <a:rPr lang="ko-KR" altLang="en-US" sz="1600" dirty="0" err="1">
                 <a:latin typeface="D2Coding" panose="020B0609020101020101" pitchFamily="49" charset="-127"/>
                 <a:ea typeface="D2Coding" panose="020B0609020101020101" pitchFamily="49" charset="-127"/>
               </a:rPr>
               <a:t>llm.generate</a:t>
             </a:r>
             <a:r>
-              <a:rPr lang="ko-KR" altLang="en-US" sz="1400" dirty="0">
+              <a:rPr lang="ko-KR" altLang="en-US" sz="1600" dirty="0">
                 <a:latin typeface="D2Coding" panose="020B0609020101020101" pitchFamily="49" charset="-127"/>
                 <a:ea typeface="D2Coding" panose="020B0609020101020101" pitchFamily="49" charset="-127"/>
               </a:rPr>
               <a:t>(</a:t>
             </a:r>
             <a:r>
-              <a:rPr lang="ko-KR" altLang="en-US" sz="1400" dirty="0" err="1">
+              <a:rPr lang="ko-KR" altLang="en-US" sz="1600" dirty="0" err="1">
                 <a:latin typeface="D2Coding" panose="020B0609020101020101" pitchFamily="49" charset="-127"/>
                 <a:ea typeface="D2Coding" panose="020B0609020101020101" pitchFamily="49" charset="-127"/>
               </a:rPr>
               <a:t>final_prompt</a:t>
             </a:r>
             <a:r>
-              <a:rPr lang="ko-KR" altLang="en-US" sz="1400" dirty="0">
+              <a:rPr lang="ko-KR" altLang="en-US" sz="1600" dirty="0">
                 <a:latin typeface="D2Coding" panose="020B0609020101020101" pitchFamily="49" charset="-127"/>
                 <a:ea typeface="D2Coding" panose="020B0609020101020101" pitchFamily="49" charset="-127"/>
               </a:rPr>
@@ -11047,7 +11182,7 @@
           </a:p>
           <a:p>
             <a:r>
-              <a:rPr lang="ko-KR" altLang="en-US" sz="1400" dirty="0">
+              <a:rPr lang="ko-KR" altLang="en-US" sz="1600" dirty="0">
                 <a:latin typeface="D2Coding" panose="020B0609020101020101" pitchFamily="49" charset="-127"/>
                 <a:ea typeface="D2Coding" panose="020B0609020101020101" pitchFamily="49" charset="-127"/>
               </a:rPr>
@@ -11056,34 +11191,34 @@
           </a:p>
           <a:p>
             <a:r>
-              <a:rPr lang="ko-KR" altLang="en-US" sz="1400" dirty="0">
+              <a:rPr lang="ko-KR" altLang="en-US" sz="1600" dirty="0">
                 <a:latin typeface="D2Coding" panose="020B0609020101020101" pitchFamily="49" charset="-127"/>
                 <a:ea typeface="D2Coding" panose="020B0609020101020101" pitchFamily="49" charset="-127"/>
               </a:rPr>
               <a:t>    </a:t>
             </a:r>
             <a:r>
-              <a:rPr lang="ko-KR" altLang="en-US" sz="1400" dirty="0" err="1">
+              <a:rPr lang="ko-KR" altLang="en-US" sz="1600" dirty="0" err="1">
                 <a:latin typeface="D2Coding" panose="020B0609020101020101" pitchFamily="49" charset="-127"/>
                 <a:ea typeface="D2Coding" panose="020B0609020101020101" pitchFamily="49" charset="-127"/>
               </a:rPr>
               <a:t>return</a:t>
             </a:r>
             <a:r>
-              <a:rPr lang="ko-KR" altLang="en-US" sz="1400" dirty="0">
+              <a:rPr lang="ko-KR" altLang="en-US" sz="1600" dirty="0">
                 <a:latin typeface="D2Coding" panose="020B0609020101020101" pitchFamily="49" charset="-127"/>
                 <a:ea typeface="D2Coding" panose="020B0609020101020101" pitchFamily="49" charset="-127"/>
               </a:rPr>
               <a:t> </a:t>
             </a:r>
             <a:r>
-              <a:rPr lang="ko-KR" altLang="en-US" sz="1400" dirty="0" err="1">
+              <a:rPr lang="ko-KR" altLang="en-US" sz="1600" dirty="0" err="1">
                 <a:latin typeface="D2Coding" panose="020B0609020101020101" pitchFamily="49" charset="-127"/>
                 <a:ea typeface="D2Coding" panose="020B0609020101020101" pitchFamily="49" charset="-127"/>
               </a:rPr>
               <a:t>final_response</a:t>
             </a:r>
-            <a:endParaRPr lang="ko-KR" altLang="en-US" sz="1400" dirty="0">
+            <a:endParaRPr lang="ko-KR" altLang="en-US" sz="1600" dirty="0">
               <a:latin typeface="D2Coding" panose="020B0609020101020101" pitchFamily="49" charset="-127"/>
               <a:ea typeface="D2Coding" panose="020B0609020101020101" pitchFamily="49" charset="-127"/>
             </a:endParaRPr>
@@ -11104,8 +11239,8 @@
         </p:nvSpPr>
         <p:spPr>
           <a:xfrm>
-            <a:off x="580507" y="1248422"/>
-            <a:ext cx="10964398" cy="793166"/>
+            <a:off x="580507" y="1199929"/>
+            <a:ext cx="11135848" cy="793166"/>
           </a:xfrm>
           <a:prstGeom prst="rect">
             <a:avLst/>
@@ -11436,14 +11571,14 @@
           <p:nvPr>
             <p:extLst>
               <p:ext uri="{D42A27DB-BD31-4B8C-83A1-F6EECF244321}">
-                <p14:modId xmlns:p14="http://schemas.microsoft.com/office/powerpoint/2010/main" val="3372984209"/>
+                <p14:modId xmlns:p14="http://schemas.microsoft.com/office/powerpoint/2010/main" val="3296845013"/>
               </p:ext>
             </p:extLst>
           </p:nvPr>
         </p:nvGraphicFramePr>
         <p:xfrm>
-          <a:off x="713466" y="2775929"/>
-          <a:ext cx="10868934" cy="3345110"/>
+          <a:off x="713466" y="2533154"/>
+          <a:ext cx="10868934" cy="4025424"/>
         </p:xfrm>
         <a:graphic>
           <a:graphicData uri="http://schemas.openxmlformats.org/drawingml/2006/table">
@@ -11479,17 +11614,20 @@
                   </a:extLst>
                 </a:gridCol>
               </a:tblGrid>
-              <a:tr h="151320">
+              <a:tr h="224781">
                 <a:tc>
                   <a:txBody>
                     <a:bodyPr/>
                     <a:lstStyle/>
                     <a:p>
-                      <a:pPr rtl="0" fontAlgn="b">
+                      <a:pPr algn="ctr" rtl="0" fontAlgn="b">
                         <a:buNone/>
                       </a:pPr>
                       <a:r>
                         <a:rPr lang="ko-KR" altLang="en-US" sz="1200" dirty="0" err="1">
+                          <a:solidFill>
+                            <a:schemeClr val="bg1"/>
+                          </a:solidFill>
                           <a:effectLst/>
                           <a:latin typeface="D2Coding" panose="020B0609020101020101" pitchFamily="49" charset="-127"/>
                           <a:ea typeface="D2Coding" panose="020B0609020101020101" pitchFamily="49" charset="-127"/>
@@ -11497,6 +11635,9 @@
                         <a:t>기법명</a:t>
                       </a:r>
                       <a:endParaRPr lang="ko-KR" altLang="en-US" sz="1200" dirty="0">
+                        <a:solidFill>
+                          <a:schemeClr val="bg1"/>
+                        </a:solidFill>
                         <a:effectLst/>
                         <a:latin typeface="D2Coding" panose="020B0609020101020101" pitchFamily="49" charset="-127"/>
                         <a:ea typeface="D2Coding" panose="020B0609020101020101" pitchFamily="49" charset="-127"/>
@@ -11505,9 +11646,7 @@
                   </a:txBody>
                   <a:tcPr marL="2934" marR="2934" marT="1956" marB="1956" anchor="ctr">
                     <a:lnL w="12700" cap="flat" cmpd="sng" algn="ctr">
-                      <a:solidFill>
-                        <a:schemeClr val="tx1"/>
-                      </a:solidFill>
+                      <a:noFill/>
                       <a:prstDash val="solid"/>
                       <a:round/>
                       <a:headEnd type="none" w="med" len="med"/>
@@ -11521,18 +11660,14 @@
                       <a:tailEnd type="none" w="med" len="med"/>
                     </a:lnR>
                     <a:lnT w="12700" cap="flat" cmpd="sng" algn="ctr">
-                      <a:solidFill>
-                        <a:schemeClr val="tx1"/>
-                      </a:solidFill>
+                      <a:noFill/>
                       <a:prstDash val="solid"/>
                       <a:round/>
                       <a:headEnd type="none" w="med" len="med"/>
                       <a:tailEnd type="none" w="med" len="med"/>
                     </a:lnT>
                     <a:lnB w="12700" cap="flat" cmpd="sng" algn="ctr">
-                      <a:solidFill>
-                        <a:schemeClr val="tx1"/>
-                      </a:solidFill>
+                      <a:noFill/>
                       <a:prstDash val="solid"/>
                       <a:round/>
                       <a:headEnd type="none" w="med" len="med"/>
@@ -11547,10 +11682,7 @@
                       <a:prstDash val="solid"/>
                     </a:lnBlToTr>
                     <a:solidFill>
-                      <a:schemeClr val="accent6">
-                        <a:lumMod val="20000"/>
-                        <a:lumOff val="80000"/>
-                      </a:schemeClr>
+                      <a:schemeClr val="tx1"/>
                     </a:solidFill>
                   </a:tcPr>
                 </a:tc>
@@ -11559,11 +11691,14 @@
                     <a:bodyPr/>
                     <a:lstStyle/>
                     <a:p>
-                      <a:pPr rtl="0" fontAlgn="b">
+                      <a:pPr algn="ctr" rtl="0" fontAlgn="b">
                         <a:buNone/>
                       </a:pPr>
                       <a:r>
                         <a:rPr lang="ko-KR" altLang="en-US" sz="1200" dirty="0">
+                          <a:solidFill>
+                            <a:schemeClr val="bg1"/>
+                          </a:solidFill>
                           <a:effectLst/>
                           <a:latin typeface="D2Coding" panose="020B0609020101020101" pitchFamily="49" charset="-127"/>
                           <a:ea typeface="D2Coding" panose="020B0609020101020101" pitchFamily="49" charset="-127"/>
@@ -11580,14 +11715,7 @@
                       <a:headEnd type="none" w="med" len="med"/>
                       <a:tailEnd type="none" w="med" len="med"/>
                     </a:lnL>
-                    <a:lnR w="7620" cap="flat" cmpd="sng" algn="ctr">
-                      <a:noFill/>
-                      <a:prstDash val="solid"/>
-                      <a:round/>
-                      <a:headEnd type="none" w="med" len="med"/>
-                      <a:tailEnd type="none" w="med" len="med"/>
-                    </a:lnR>
-                    <a:lnT w="12700" cap="flat" cmpd="sng" algn="ctr">
+                    <a:lnR w="12700" cap="flat" cmpd="sng" algn="ctr">
                       <a:solidFill>
                         <a:schemeClr val="tx1"/>
                       </a:solidFill>
@@ -11595,11 +11723,16 @@
                       <a:round/>
                       <a:headEnd type="none" w="med" len="med"/>
                       <a:tailEnd type="none" w="med" len="med"/>
+                    </a:lnR>
+                    <a:lnT w="12700" cap="flat" cmpd="sng" algn="ctr">
+                      <a:noFill/>
+                      <a:prstDash val="solid"/>
+                      <a:round/>
+                      <a:headEnd type="none" w="med" len="med"/>
+                      <a:tailEnd type="none" w="med" len="med"/>
                     </a:lnT>
                     <a:lnB w="12700" cap="flat" cmpd="sng" algn="ctr">
-                      <a:solidFill>
-                        <a:schemeClr val="tx1"/>
-                      </a:solidFill>
+                      <a:noFill/>
                       <a:prstDash val="solid"/>
                       <a:round/>
                       <a:headEnd type="none" w="med" len="med"/>
@@ -11614,10 +11747,7 @@
                       <a:prstDash val="solid"/>
                     </a:lnBlToTr>
                     <a:solidFill>
-                      <a:schemeClr val="accent6">
-                        <a:lumMod val="20000"/>
-                        <a:lumOff val="80000"/>
-                      </a:schemeClr>
+                      <a:schemeClr val="tx1"/>
                     </a:solidFill>
                   </a:tcPr>
                 </a:tc>
@@ -11626,11 +11756,14 @@
                     <a:bodyPr/>
                     <a:lstStyle/>
                     <a:p>
-                      <a:pPr rtl="0" fontAlgn="b">
+                      <a:pPr algn="ctr" rtl="0" fontAlgn="b">
                         <a:buNone/>
                       </a:pPr>
                       <a:r>
                         <a:rPr lang="ko-KR" altLang="en-US" sz="1200" dirty="0">
+                          <a:solidFill>
+                            <a:schemeClr val="bg1"/>
+                          </a:solidFill>
                           <a:effectLst/>
                           <a:latin typeface="D2Coding" panose="020B0609020101020101" pitchFamily="49" charset="-127"/>
                           <a:ea typeface="D2Coding" panose="020B0609020101020101" pitchFamily="49" charset="-127"/>
@@ -11640,21 +11773,7 @@
                     </a:p>
                   </a:txBody>
                   <a:tcPr marL="2934" marR="2934" marT="1956" marB="1956" anchor="ctr">
-                    <a:lnL w="7620" cap="flat" cmpd="sng" algn="ctr">
-                      <a:noFill/>
-                      <a:prstDash val="solid"/>
-                      <a:round/>
-                      <a:headEnd type="none" w="med" len="med"/>
-                      <a:tailEnd type="none" w="med" len="med"/>
-                    </a:lnL>
-                    <a:lnR w="7620" cap="flat" cmpd="sng" algn="ctr">
-                      <a:noFill/>
-                      <a:prstDash val="solid"/>
-                      <a:round/>
-                      <a:headEnd type="none" w="med" len="med"/>
-                      <a:tailEnd type="none" w="med" len="med"/>
-                    </a:lnR>
-                    <a:lnT w="12700" cap="flat" cmpd="sng" algn="ctr">
+                    <a:lnL w="12700" cap="flat" cmpd="sng" algn="ctr">
                       <a:solidFill>
                         <a:schemeClr val="tx1"/>
                       </a:solidFill>
@@ -11662,8 +11781,8 @@
                       <a:round/>
                       <a:headEnd type="none" w="med" len="med"/>
                       <a:tailEnd type="none" w="med" len="med"/>
-                    </a:lnT>
-                    <a:lnB w="12700" cap="flat" cmpd="sng" algn="ctr">
+                    </a:lnL>
+                    <a:lnR w="12700" cap="flat" cmpd="sng" algn="ctr">
                       <a:solidFill>
                         <a:schemeClr val="tx1"/>
                       </a:solidFill>
@@ -11671,6 +11790,20 @@
                       <a:round/>
                       <a:headEnd type="none" w="med" len="med"/>
                       <a:tailEnd type="none" w="med" len="med"/>
+                    </a:lnR>
+                    <a:lnT w="12700" cap="flat" cmpd="sng" algn="ctr">
+                      <a:noFill/>
+                      <a:prstDash val="solid"/>
+                      <a:round/>
+                      <a:headEnd type="none" w="med" len="med"/>
+                      <a:tailEnd type="none" w="med" len="med"/>
+                    </a:lnT>
+                    <a:lnB w="12700" cap="flat" cmpd="sng" algn="ctr">
+                      <a:noFill/>
+                      <a:prstDash val="solid"/>
+                      <a:round/>
+                      <a:headEnd type="none" w="med" len="med"/>
+                      <a:tailEnd type="none" w="med" len="med"/>
                     </a:lnB>
                     <a:lnTlToBr w="12700" cmpd="sng">
                       <a:noFill/>
@@ -11681,10 +11814,7 @@
                       <a:prstDash val="solid"/>
                     </a:lnBlToTr>
                     <a:solidFill>
-                      <a:schemeClr val="accent6">
-                        <a:lumMod val="20000"/>
-                        <a:lumOff val="80000"/>
-                      </a:schemeClr>
+                      <a:schemeClr val="tx1"/>
                     </a:solidFill>
                   </a:tcPr>
                 </a:tc>
@@ -11693,11 +11823,14 @@
                     <a:bodyPr/>
                     <a:lstStyle/>
                     <a:p>
-                      <a:pPr rtl="0" fontAlgn="b">
+                      <a:pPr algn="ctr" rtl="0" fontAlgn="b">
                         <a:buNone/>
                       </a:pPr>
                       <a:r>
                         <a:rPr lang="ko-KR" altLang="en-US" sz="1200" dirty="0">
+                          <a:solidFill>
+                            <a:schemeClr val="bg1"/>
+                          </a:solidFill>
                           <a:effectLst/>
                           <a:latin typeface="D2Coding" panose="020B0609020101020101" pitchFamily="49" charset="-127"/>
                           <a:ea typeface="D2Coding" panose="020B0609020101020101" pitchFamily="49" charset="-127"/>
@@ -11707,14 +11840,7 @@
                     </a:p>
                   </a:txBody>
                   <a:tcPr marL="2934" marR="2934" marT="1956" marB="1956" anchor="ctr">
-                    <a:lnL w="7620" cap="flat" cmpd="sng" algn="ctr">
-                      <a:noFill/>
-                      <a:prstDash val="solid"/>
-                      <a:round/>
-                      <a:headEnd type="none" w="med" len="med"/>
-                      <a:tailEnd type="none" w="med" len="med"/>
-                    </a:lnL>
-                    <a:lnR w="12700" cap="flat" cmpd="sng" algn="ctr">
+                    <a:lnL w="12700" cap="flat" cmpd="sng" algn="ctr">
                       <a:solidFill>
                         <a:schemeClr val="tx1"/>
                       </a:solidFill>
@@ -11722,20 +11848,23 @@
                       <a:round/>
                       <a:headEnd type="none" w="med" len="med"/>
                       <a:tailEnd type="none" w="med" len="med"/>
+                    </a:lnL>
+                    <a:lnR w="12700" cap="flat" cmpd="sng" algn="ctr">
+                      <a:noFill/>
+                      <a:prstDash val="solid"/>
+                      <a:round/>
+                      <a:headEnd type="none" w="med" len="med"/>
+                      <a:tailEnd type="none" w="med" len="med"/>
                     </a:lnR>
                     <a:lnT w="12700" cap="flat" cmpd="sng" algn="ctr">
-                      <a:solidFill>
-                        <a:schemeClr val="tx1"/>
-                      </a:solidFill>
+                      <a:noFill/>
                       <a:prstDash val="solid"/>
                       <a:round/>
                       <a:headEnd type="none" w="med" len="med"/>
                       <a:tailEnd type="none" w="med" len="med"/>
                     </a:lnT>
                     <a:lnB w="12700" cap="flat" cmpd="sng" algn="ctr">
-                      <a:solidFill>
-                        <a:schemeClr val="tx1"/>
-                      </a:solidFill>
+                      <a:noFill/>
                       <a:prstDash val="solid"/>
                       <a:round/>
                       <a:headEnd type="none" w="med" len="med"/>
@@ -11750,10 +11879,7 @@
                       <a:prstDash val="solid"/>
                     </a:lnBlToTr>
                     <a:solidFill>
-                      <a:schemeClr val="accent6">
-                        <a:lumMod val="20000"/>
-                        <a:lumOff val="80000"/>
-                      </a:schemeClr>
+                      <a:schemeClr val="tx1"/>
                     </a:solidFill>
                   </a:tcPr>
                 </a:tc>
@@ -11763,7 +11889,7 @@
                   </a:ext>
                 </a:extLst>
               </a:tr>
-              <a:tr h="373932">
+              <a:tr h="449981">
                 <a:tc>
                   <a:txBody>
                     <a:bodyPr/>
@@ -11810,6 +11936,13 @@
                   </a:txBody>
                   <a:tcPr marL="2934" marR="2934" marT="1956" marB="1956" anchor="ctr">
                     <a:lnL w="12700" cap="flat" cmpd="sng" algn="ctr">
+                      <a:noFill/>
+                      <a:prstDash val="solid"/>
+                      <a:round/>
+                      <a:headEnd type="none" w="med" len="med"/>
+                      <a:tailEnd type="none" w="med" len="med"/>
+                    </a:lnL>
+                    <a:lnR w="12700" cap="flat" cmpd="sng" algn="ctr">
                       <a:solidFill>
                         <a:schemeClr val="tx1"/>
                       </a:solidFill>
@@ -11817,18 +11950,9 @@
                       <a:round/>
                       <a:headEnd type="none" w="med" len="med"/>
                       <a:tailEnd type="none" w="med" len="med"/>
-                    </a:lnL>
-                    <a:lnR w="7620" cap="flat" cmpd="sng" algn="ctr">
-                      <a:noFill/>
-                      <a:prstDash val="solid"/>
-                      <a:round/>
-                      <a:headEnd type="none" w="med" len="med"/>
-                      <a:tailEnd type="none" w="med" len="med"/>
                     </a:lnR>
                     <a:lnT w="12700" cap="flat" cmpd="sng" algn="ctr">
-                      <a:solidFill>
-                        <a:schemeClr val="tx1"/>
-                      </a:solidFill>
+                      <a:noFill/>
                       <a:prstDash val="solid"/>
                       <a:round/>
                       <a:headEnd type="none" w="med" len="med"/>
@@ -11849,7 +11973,12 @@
                       <a:noFill/>
                       <a:prstDash val="solid"/>
                     </a:lnBlToTr>
-                    <a:noFill/>
+                    <a:solidFill>
+                      <a:schemeClr val="accent1">
+                        <a:lumMod val="20000"/>
+                        <a:lumOff val="80000"/>
+                      </a:schemeClr>
+                    </a:solidFill>
                   </a:tcPr>
                 </a:tc>
                 <a:tc>
@@ -11887,21 +12016,7 @@
                     </a:p>
                   </a:txBody>
                   <a:tcPr marL="2934" marR="2934" marT="1956" marB="1956" anchor="ctr">
-                    <a:lnL w="7620" cap="flat" cmpd="sng" algn="ctr">
-                      <a:noFill/>
-                      <a:prstDash val="solid"/>
-                      <a:round/>
-                      <a:headEnd type="none" w="med" len="med"/>
-                      <a:tailEnd type="none" w="med" len="med"/>
-                    </a:lnL>
-                    <a:lnR w="7620" cap="flat" cmpd="sng" algn="ctr">
-                      <a:noFill/>
-                      <a:prstDash val="solid"/>
-                      <a:round/>
-                      <a:headEnd type="none" w="med" len="med"/>
-                      <a:tailEnd type="none" w="med" len="med"/>
-                    </a:lnR>
-                    <a:lnT w="12700" cap="flat" cmpd="sng" algn="ctr">
+                    <a:lnL w="12700" cap="flat" cmpd="sng" algn="ctr">
                       <a:solidFill>
                         <a:schemeClr val="tx1"/>
                       </a:solidFill>
@@ -11909,6 +12024,22 @@
                       <a:round/>
                       <a:headEnd type="none" w="med" len="med"/>
                       <a:tailEnd type="none" w="med" len="med"/>
+                    </a:lnL>
+                    <a:lnR w="12700" cap="flat" cmpd="sng" algn="ctr">
+                      <a:solidFill>
+                        <a:schemeClr val="tx1"/>
+                      </a:solidFill>
+                      <a:prstDash val="solid"/>
+                      <a:round/>
+                      <a:headEnd type="none" w="med" len="med"/>
+                      <a:tailEnd type="none" w="med" len="med"/>
+                    </a:lnR>
+                    <a:lnT w="12700" cap="flat" cmpd="sng" algn="ctr">
+                      <a:noFill/>
+                      <a:prstDash val="solid"/>
+                      <a:round/>
+                      <a:headEnd type="none" w="med" len="med"/>
+                      <a:tailEnd type="none" w="med" len="med"/>
                     </a:lnT>
                     <a:lnB w="7620" cap="flat" cmpd="sng" algn="ctr">
                       <a:noFill/>
@@ -11925,7 +12056,12 @@
                       <a:noFill/>
                       <a:prstDash val="solid"/>
                     </a:lnBlToTr>
-                    <a:noFill/>
+                    <a:solidFill>
+                      <a:schemeClr val="accent1">
+                        <a:lumMod val="20000"/>
+                        <a:lumOff val="80000"/>
+                      </a:schemeClr>
+                    </a:solidFill>
                   </a:tcPr>
                 </a:tc>
                 <a:tc>
@@ -11979,21 +12115,7 @@
                     </a:p>
                   </a:txBody>
                   <a:tcPr marL="2934" marR="2934" marT="1956" marB="1956" anchor="ctr">
-                    <a:lnL w="7620" cap="flat" cmpd="sng" algn="ctr">
-                      <a:noFill/>
-                      <a:prstDash val="solid"/>
-                      <a:round/>
-                      <a:headEnd type="none" w="med" len="med"/>
-                      <a:tailEnd type="none" w="med" len="med"/>
-                    </a:lnL>
-                    <a:lnR w="7620" cap="flat" cmpd="sng" algn="ctr">
-                      <a:noFill/>
-                      <a:prstDash val="solid"/>
-                      <a:round/>
-                      <a:headEnd type="none" w="med" len="med"/>
-                      <a:tailEnd type="none" w="med" len="med"/>
-                    </a:lnR>
-                    <a:lnT w="12700" cap="flat" cmpd="sng" algn="ctr">
+                    <a:lnL w="12700" cap="flat" cmpd="sng" algn="ctr">
                       <a:solidFill>
                         <a:schemeClr val="tx1"/>
                       </a:solidFill>
@@ -12001,6 +12123,22 @@
                       <a:round/>
                       <a:headEnd type="none" w="med" len="med"/>
                       <a:tailEnd type="none" w="med" len="med"/>
+                    </a:lnL>
+                    <a:lnR w="12700" cap="flat" cmpd="sng" algn="ctr">
+                      <a:solidFill>
+                        <a:schemeClr val="tx1"/>
+                      </a:solidFill>
+                      <a:prstDash val="solid"/>
+                      <a:round/>
+                      <a:headEnd type="none" w="med" len="med"/>
+                      <a:tailEnd type="none" w="med" len="med"/>
+                    </a:lnR>
+                    <a:lnT w="12700" cap="flat" cmpd="sng" algn="ctr">
+                      <a:noFill/>
+                      <a:prstDash val="solid"/>
+                      <a:round/>
+                      <a:headEnd type="none" w="med" len="med"/>
+                      <a:tailEnd type="none" w="med" len="med"/>
                     </a:lnT>
                     <a:lnB w="7620" cap="flat" cmpd="sng" algn="ctr">
                       <a:noFill/>
@@ -12017,7 +12155,12 @@
                       <a:noFill/>
                       <a:prstDash val="solid"/>
                     </a:lnBlToTr>
-                    <a:noFill/>
+                    <a:solidFill>
+                      <a:schemeClr val="accent1">
+                        <a:lumMod val="20000"/>
+                        <a:lumOff val="80000"/>
+                      </a:schemeClr>
+                    </a:solidFill>
                   </a:tcPr>
                 </a:tc>
                 <a:tc>
@@ -12029,7 +12172,7 @@
                         <a:buNone/>
                       </a:pPr>
                       <a:r>
-                        <a:rPr lang="ko-KR" altLang="en-US" sz="1200">
+                        <a:rPr lang="ko-KR" altLang="en-US" sz="1200" dirty="0">
                           <a:effectLst/>
                           <a:latin typeface="D2Coding" panose="020B0609020101020101" pitchFamily="49" charset="-127"/>
                           <a:ea typeface="D2Coding" panose="020B0609020101020101" pitchFamily="49" charset="-127"/>
@@ -12037,7 +12180,7 @@
                         <a:t>현실 세계와 상호작용하는 </a:t>
                       </a:r>
                       <a:r>
-                        <a:rPr lang="en-US" altLang="ko-KR" sz="1200">
+                        <a:rPr lang="en-US" altLang="ko-KR" sz="1200" dirty="0">
                           <a:effectLst/>
                           <a:latin typeface="D2Coding" panose="020B0609020101020101" pitchFamily="49" charset="-127"/>
                           <a:ea typeface="D2Coding" panose="020B0609020101020101" pitchFamily="49" charset="-127"/>
@@ -12045,7 +12188,7 @@
                         <a:t>'</a:t>
                       </a:r>
                       <a:r>
-                        <a:rPr lang="ko-KR" altLang="en-US" sz="1200">
+                        <a:rPr lang="ko-KR" altLang="en-US" sz="1200" dirty="0">
                           <a:effectLst/>
                           <a:latin typeface="D2Coding" panose="020B0609020101020101" pitchFamily="49" charset="-127"/>
                           <a:ea typeface="D2Coding" panose="020B0609020101020101" pitchFamily="49" charset="-127"/>
@@ -12053,7 +12196,7 @@
                         <a:t>손과 발</a:t>
                       </a:r>
                       <a:r>
-                        <a:rPr lang="en-US" altLang="ko-KR" sz="1200">
+                        <a:rPr lang="en-US" altLang="ko-KR" sz="1200" dirty="0">
                           <a:effectLst/>
                           <a:latin typeface="D2Coding" panose="020B0609020101020101" pitchFamily="49" charset="-127"/>
                           <a:ea typeface="D2Coding" panose="020B0609020101020101" pitchFamily="49" charset="-127"/>
@@ -12063,14 +12206,7 @@
                     </a:p>
                   </a:txBody>
                   <a:tcPr marL="0" marR="0" marT="1956" marB="1956" anchor="ctr">
-                    <a:lnL w="7620" cap="flat" cmpd="sng" algn="ctr">
-                      <a:noFill/>
-                      <a:prstDash val="solid"/>
-                      <a:round/>
-                      <a:headEnd type="none" w="med" len="med"/>
-                      <a:tailEnd type="none" w="med" len="med"/>
-                    </a:lnL>
-                    <a:lnR w="12700" cap="flat" cmpd="sng" algn="ctr">
+                    <a:lnL w="12700" cap="flat" cmpd="sng" algn="ctr">
                       <a:solidFill>
                         <a:schemeClr val="tx1"/>
                       </a:solidFill>
@@ -12078,11 +12214,16 @@
                       <a:round/>
                       <a:headEnd type="none" w="med" len="med"/>
                       <a:tailEnd type="none" w="med" len="med"/>
+                    </a:lnL>
+                    <a:lnR w="12700" cap="flat" cmpd="sng" algn="ctr">
+                      <a:noFill/>
+                      <a:prstDash val="solid"/>
+                      <a:round/>
+                      <a:headEnd type="none" w="med" len="med"/>
+                      <a:tailEnd type="none" w="med" len="med"/>
                     </a:lnR>
                     <a:lnT w="12700" cap="flat" cmpd="sng" algn="ctr">
-                      <a:solidFill>
-                        <a:schemeClr val="tx1"/>
-                      </a:solidFill>
+                      <a:noFill/>
                       <a:prstDash val="solid"/>
                       <a:round/>
                       <a:headEnd type="none" w="med" len="med"/>
@@ -12103,7 +12244,12 @@
                       <a:noFill/>
                       <a:prstDash val="solid"/>
                     </a:lnBlToTr>
-                    <a:noFill/>
+                    <a:solidFill>
+                      <a:schemeClr val="accent1">
+                        <a:lumMod val="20000"/>
+                        <a:lumOff val="80000"/>
+                      </a:schemeClr>
+                    </a:solidFill>
                   </a:tcPr>
                 </a:tc>
                 <a:extLst>
@@ -12112,7 +12258,7 @@
                   </a:ext>
                 </a:extLst>
               </a:tr>
-              <a:tr h="299470">
+              <a:tr h="444854">
                 <a:tc>
                   <a:txBody>
                     <a:bodyPr/>
@@ -12159,6 +12305,13 @@
                   </a:txBody>
                   <a:tcPr marL="2934" marR="2934" marT="1956" marB="1956" anchor="ctr">
                     <a:lnL w="12700" cap="flat" cmpd="sng" algn="ctr">
+                      <a:noFill/>
+                      <a:prstDash val="solid"/>
+                      <a:round/>
+                      <a:headEnd type="none" w="med" len="med"/>
+                      <a:tailEnd type="none" w="med" len="med"/>
+                    </a:lnL>
+                    <a:lnR w="12700" cap="flat" cmpd="sng" algn="ctr">
                       <a:solidFill>
                         <a:schemeClr val="tx1"/>
                       </a:solidFill>
@@ -12166,13 +12319,6 @@
                       <a:round/>
                       <a:headEnd type="none" w="med" len="med"/>
                       <a:tailEnd type="none" w="med" len="med"/>
-                    </a:lnL>
-                    <a:lnR w="7620" cap="flat" cmpd="sng" algn="ctr">
-                      <a:noFill/>
-                      <a:prstDash val="solid"/>
-                      <a:round/>
-                      <a:headEnd type="none" w="med" len="med"/>
-                      <a:tailEnd type="none" w="med" len="med"/>
                     </a:lnR>
                     <a:lnT w="7620" cap="flat" cmpd="sng" algn="ctr">
                       <a:noFill/>
@@ -12182,9 +12328,7 @@
                       <a:tailEnd type="none" w="med" len="med"/>
                     </a:lnT>
                     <a:lnB w="12700" cap="flat" cmpd="sng" algn="ctr">
-                      <a:solidFill>
-                        <a:schemeClr val="tx1"/>
-                      </a:solidFill>
+                      <a:noFill/>
                       <a:prstDash val="solid"/>
                       <a:round/>
                       <a:headEnd type="none" w="med" len="med"/>
@@ -12198,7 +12342,12 @@
                       <a:noFill/>
                       <a:prstDash val="solid"/>
                     </a:lnBlToTr>
-                    <a:noFill/>
+                    <a:solidFill>
+                      <a:schemeClr val="accent1">
+                        <a:lumMod val="20000"/>
+                        <a:lumOff val="80000"/>
+                      </a:schemeClr>
+                    </a:solidFill>
                   </a:tcPr>
                 </a:tc>
                 <a:tc>
@@ -12246,28 +12395,7 @@
                     </a:p>
                   </a:txBody>
                   <a:tcPr marL="2934" marR="2934" marT="1956" marB="1956" anchor="ctr">
-                    <a:lnL w="7620" cap="flat" cmpd="sng" algn="ctr">
-                      <a:noFill/>
-                      <a:prstDash val="solid"/>
-                      <a:round/>
-                      <a:headEnd type="none" w="med" len="med"/>
-                      <a:tailEnd type="none" w="med" len="med"/>
-                    </a:lnL>
-                    <a:lnR w="7620" cap="flat" cmpd="sng" algn="ctr">
-                      <a:noFill/>
-                      <a:prstDash val="solid"/>
-                      <a:round/>
-                      <a:headEnd type="none" w="med" len="med"/>
-                      <a:tailEnd type="none" w="med" len="med"/>
-                    </a:lnR>
-                    <a:lnT w="7620" cap="flat" cmpd="sng" algn="ctr">
-                      <a:noFill/>
-                      <a:prstDash val="solid"/>
-                      <a:round/>
-                      <a:headEnd type="none" w="med" len="med"/>
-                      <a:tailEnd type="none" w="med" len="med"/>
-                    </a:lnT>
-                    <a:lnB w="12700" cap="flat" cmpd="sng" algn="ctr">
+                    <a:lnL w="12700" cap="flat" cmpd="sng" algn="ctr">
                       <a:solidFill>
                         <a:schemeClr val="tx1"/>
                       </a:solidFill>
@@ -12275,6 +12403,29 @@
                       <a:round/>
                       <a:headEnd type="none" w="med" len="med"/>
                       <a:tailEnd type="none" w="med" len="med"/>
+                    </a:lnL>
+                    <a:lnR w="12700" cap="flat" cmpd="sng" algn="ctr">
+                      <a:solidFill>
+                        <a:schemeClr val="tx1"/>
+                      </a:solidFill>
+                      <a:prstDash val="solid"/>
+                      <a:round/>
+                      <a:headEnd type="none" w="med" len="med"/>
+                      <a:tailEnd type="none" w="med" len="med"/>
+                    </a:lnR>
+                    <a:lnT w="7620" cap="flat" cmpd="sng" algn="ctr">
+                      <a:noFill/>
+                      <a:prstDash val="solid"/>
+                      <a:round/>
+                      <a:headEnd type="none" w="med" len="med"/>
+                      <a:tailEnd type="none" w="med" len="med"/>
+                    </a:lnT>
+                    <a:lnB w="12700" cap="flat" cmpd="sng" algn="ctr">
+                      <a:noFill/>
+                      <a:prstDash val="solid"/>
+                      <a:round/>
+                      <a:headEnd type="none" w="med" len="med"/>
+                      <a:tailEnd type="none" w="med" len="med"/>
                     </a:lnB>
                     <a:lnTlToBr w="12700" cmpd="sng">
                       <a:noFill/>
@@ -12284,7 +12435,12 @@
                       <a:noFill/>
                       <a:prstDash val="solid"/>
                     </a:lnBlToTr>
-                    <a:noFill/>
+                    <a:solidFill>
+                      <a:schemeClr val="accent1">
+                        <a:lumMod val="20000"/>
+                        <a:lumOff val="80000"/>
+                      </a:schemeClr>
+                    </a:solidFill>
                   </a:tcPr>
                 </a:tc>
                 <a:tc>
@@ -12322,28 +12478,7 @@
                     </a:p>
                   </a:txBody>
                   <a:tcPr marL="2934" marR="2934" marT="1956" marB="1956" anchor="ctr">
-                    <a:lnL w="7620" cap="flat" cmpd="sng" algn="ctr">
-                      <a:noFill/>
-                      <a:prstDash val="solid"/>
-                      <a:round/>
-                      <a:headEnd type="none" w="med" len="med"/>
-                      <a:tailEnd type="none" w="med" len="med"/>
-                    </a:lnL>
-                    <a:lnR w="7620" cap="flat" cmpd="sng" algn="ctr">
-                      <a:noFill/>
-                      <a:prstDash val="solid"/>
-                      <a:round/>
-                      <a:headEnd type="none" w="med" len="med"/>
-                      <a:tailEnd type="none" w="med" len="med"/>
-                    </a:lnR>
-                    <a:lnT w="7620" cap="flat" cmpd="sng" algn="ctr">
-                      <a:noFill/>
-                      <a:prstDash val="solid"/>
-                      <a:round/>
-                      <a:headEnd type="none" w="med" len="med"/>
-                      <a:tailEnd type="none" w="med" len="med"/>
-                    </a:lnT>
-                    <a:lnB w="12700" cap="flat" cmpd="sng" algn="ctr">
+                    <a:lnL w="12700" cap="flat" cmpd="sng" algn="ctr">
                       <a:solidFill>
                         <a:schemeClr val="tx1"/>
                       </a:solidFill>
@@ -12351,6 +12486,29 @@
                       <a:round/>
                       <a:headEnd type="none" w="med" len="med"/>
                       <a:tailEnd type="none" w="med" len="med"/>
+                    </a:lnL>
+                    <a:lnR w="12700" cap="flat" cmpd="sng" algn="ctr">
+                      <a:solidFill>
+                        <a:schemeClr val="tx1"/>
+                      </a:solidFill>
+                      <a:prstDash val="solid"/>
+                      <a:round/>
+                      <a:headEnd type="none" w="med" len="med"/>
+                      <a:tailEnd type="none" w="med" len="med"/>
+                    </a:lnR>
+                    <a:lnT w="7620" cap="flat" cmpd="sng" algn="ctr">
+                      <a:noFill/>
+                      <a:prstDash val="solid"/>
+                      <a:round/>
+                      <a:headEnd type="none" w="med" len="med"/>
+                      <a:tailEnd type="none" w="med" len="med"/>
+                    </a:lnT>
+                    <a:lnB w="12700" cap="flat" cmpd="sng" algn="ctr">
+                      <a:noFill/>
+                      <a:prstDash val="solid"/>
+                      <a:round/>
+                      <a:headEnd type="none" w="med" len="med"/>
+                      <a:tailEnd type="none" w="med" len="med"/>
                     </a:lnB>
                     <a:lnTlToBr w="12700" cmpd="sng">
                       <a:noFill/>
@@ -12360,7 +12518,12 @@
                       <a:noFill/>
                       <a:prstDash val="solid"/>
                     </a:lnBlToTr>
-                    <a:noFill/>
+                    <a:solidFill>
+                      <a:schemeClr val="accent1">
+                        <a:lumMod val="20000"/>
+                        <a:lumOff val="80000"/>
+                      </a:schemeClr>
+                    </a:solidFill>
                   </a:tcPr>
                 </a:tc>
                 <a:tc>
@@ -12422,14 +12585,7 @@
                     </a:p>
                   </a:txBody>
                   <a:tcPr marL="0" marR="0" marT="1956" marB="1956" anchor="ctr">
-                    <a:lnL w="7620" cap="flat" cmpd="sng" algn="ctr">
-                      <a:noFill/>
-                      <a:prstDash val="solid"/>
-                      <a:round/>
-                      <a:headEnd type="none" w="med" len="med"/>
-                      <a:tailEnd type="none" w="med" len="med"/>
-                    </a:lnL>
-                    <a:lnR w="12700" cap="flat" cmpd="sng" algn="ctr">
+                    <a:lnL w="12700" cap="flat" cmpd="sng" algn="ctr">
                       <a:solidFill>
                         <a:schemeClr val="tx1"/>
                       </a:solidFill>
@@ -12437,6 +12593,13 @@
                       <a:round/>
                       <a:headEnd type="none" w="med" len="med"/>
                       <a:tailEnd type="none" w="med" len="med"/>
+                    </a:lnL>
+                    <a:lnR w="12700" cap="flat" cmpd="sng" algn="ctr">
+                      <a:noFill/>
+                      <a:prstDash val="solid"/>
+                      <a:round/>
+                      <a:headEnd type="none" w="med" len="med"/>
+                      <a:tailEnd type="none" w="med" len="med"/>
                     </a:lnR>
                     <a:lnT w="7620" cap="flat" cmpd="sng" algn="ctr">
                       <a:noFill/>
@@ -12446,9 +12609,7 @@
                       <a:tailEnd type="none" w="med" len="med"/>
                     </a:lnT>
                     <a:lnB w="12700" cap="flat" cmpd="sng" algn="ctr">
-                      <a:solidFill>
-                        <a:schemeClr val="tx1"/>
-                      </a:solidFill>
+                      <a:noFill/>
                       <a:prstDash val="solid"/>
                       <a:round/>
                       <a:headEnd type="none" w="med" len="med"/>
@@ -12462,7 +12623,12 @@
                       <a:noFill/>
                       <a:prstDash val="solid"/>
                     </a:lnBlToTr>
-                    <a:noFill/>
+                    <a:solidFill>
+                      <a:schemeClr val="accent1">
+                        <a:lumMod val="20000"/>
+                        <a:lumOff val="80000"/>
+                      </a:schemeClr>
+                    </a:solidFill>
                   </a:tcPr>
                 </a:tc>
                 <a:extLst>
@@ -12471,7 +12637,7 @@
                   </a:ext>
                 </a:extLst>
               </a:tr>
-              <a:tr h="402452">
+              <a:tr h="484301">
                 <a:tc>
                   <a:txBody>
                     <a:bodyPr/>
@@ -12518,6 +12684,13 @@
                   </a:txBody>
                   <a:tcPr marL="2934" marR="2934" marT="1956" marB="1956" anchor="ctr">
                     <a:lnL w="12700" cap="flat" cmpd="sng" algn="ctr">
+                      <a:noFill/>
+                      <a:prstDash val="solid"/>
+                      <a:round/>
+                      <a:headEnd type="none" w="med" len="med"/>
+                      <a:tailEnd type="none" w="med" len="med"/>
+                    </a:lnL>
+                    <a:lnR w="12700" cap="flat" cmpd="sng" algn="ctr">
                       <a:solidFill>
                         <a:schemeClr val="tx1"/>
                       </a:solidFill>
@@ -12525,18 +12698,9 @@
                       <a:round/>
                       <a:headEnd type="none" w="med" len="med"/>
                       <a:tailEnd type="none" w="med" len="med"/>
-                    </a:lnL>
-                    <a:lnR w="7620" cap="flat" cmpd="sng" algn="ctr">
-                      <a:noFill/>
-                      <a:prstDash val="solid"/>
-                      <a:round/>
-                      <a:headEnd type="none" w="med" len="med"/>
-                      <a:tailEnd type="none" w="med" len="med"/>
                     </a:lnR>
                     <a:lnT w="12700" cap="flat" cmpd="sng" algn="ctr">
-                      <a:solidFill>
-                        <a:schemeClr val="tx1"/>
-                      </a:solidFill>
+                      <a:noFill/>
                       <a:prstDash val="solid"/>
                       <a:round/>
                       <a:headEnd type="none" w="med" len="med"/>
@@ -12557,7 +12721,12 @@
                       <a:noFill/>
                       <a:prstDash val="solid"/>
                     </a:lnBlToTr>
-                    <a:noFill/>
+                    <a:solidFill>
+                      <a:schemeClr val="accent6">
+                        <a:lumMod val="20000"/>
+                        <a:lumOff val="80000"/>
+                      </a:schemeClr>
+                    </a:solidFill>
                   </a:tcPr>
                 </a:tc>
                 <a:tc>
@@ -12597,21 +12766,7 @@
                     </a:p>
                   </a:txBody>
                   <a:tcPr marL="2934" marR="2934" marT="1956" marB="1956" anchor="ctr">
-                    <a:lnL w="7620" cap="flat" cmpd="sng" algn="ctr">
-                      <a:noFill/>
-                      <a:prstDash val="solid"/>
-                      <a:round/>
-                      <a:headEnd type="none" w="med" len="med"/>
-                      <a:tailEnd type="none" w="med" len="med"/>
-                    </a:lnL>
-                    <a:lnR w="7620" cap="flat" cmpd="sng" algn="ctr">
-                      <a:noFill/>
-                      <a:prstDash val="solid"/>
-                      <a:round/>
-                      <a:headEnd type="none" w="med" len="med"/>
-                      <a:tailEnd type="none" w="med" len="med"/>
-                    </a:lnR>
-                    <a:lnT w="12700" cap="flat" cmpd="sng" algn="ctr">
+                    <a:lnL w="12700" cap="flat" cmpd="sng" algn="ctr">
                       <a:solidFill>
                         <a:schemeClr val="tx1"/>
                       </a:solidFill>
@@ -12619,6 +12774,22 @@
                       <a:round/>
                       <a:headEnd type="none" w="med" len="med"/>
                       <a:tailEnd type="none" w="med" len="med"/>
+                    </a:lnL>
+                    <a:lnR w="12700" cap="flat" cmpd="sng" algn="ctr">
+                      <a:solidFill>
+                        <a:schemeClr val="tx1"/>
+                      </a:solidFill>
+                      <a:prstDash val="solid"/>
+                      <a:round/>
+                      <a:headEnd type="none" w="med" len="med"/>
+                      <a:tailEnd type="none" w="med" len="med"/>
+                    </a:lnR>
+                    <a:lnT w="12700" cap="flat" cmpd="sng" algn="ctr">
+                      <a:noFill/>
+                      <a:prstDash val="solid"/>
+                      <a:round/>
+                      <a:headEnd type="none" w="med" len="med"/>
+                      <a:tailEnd type="none" w="med" len="med"/>
                     </a:lnT>
                     <a:lnB w="7620" cap="flat" cmpd="sng" algn="ctr">
                       <a:noFill/>
@@ -12635,7 +12806,12 @@
                       <a:noFill/>
                       <a:prstDash val="solid"/>
                     </a:lnBlToTr>
-                    <a:noFill/>
+                    <a:solidFill>
+                      <a:schemeClr val="accent6">
+                        <a:lumMod val="20000"/>
+                        <a:lumOff val="80000"/>
+                      </a:schemeClr>
+                    </a:solidFill>
                   </a:tcPr>
                 </a:tc>
                 <a:tc>
@@ -12700,39 +12876,12 @@
                           <a:latin typeface="D2Coding" panose="020B0609020101020101" pitchFamily="49" charset="-127"/>
                           <a:ea typeface="D2Coding" panose="020B0609020101020101" pitchFamily="49" charset="-127"/>
                         </a:rPr>
-                        <a:t>개체 관계를 저장하고 </a:t>
+                        <a:t>개체 관계를 저장하고 재 참조함</a:t>
                       </a:r>
-                      <a:r>
-                        <a:rPr lang="ko-KR" altLang="en-US" sz="1200" dirty="0" err="1">
-                          <a:effectLst/>
-                          <a:latin typeface="D2Coding" panose="020B0609020101020101" pitchFamily="49" charset="-127"/>
-                          <a:ea typeface="D2Coding" panose="020B0609020101020101" pitchFamily="49" charset="-127"/>
-                        </a:rPr>
-                        <a:t>재참조함</a:t>
-                      </a:r>
-                      <a:endParaRPr lang="ko-KR" altLang="en-US" sz="1200" dirty="0">
-                        <a:effectLst/>
-                        <a:latin typeface="D2Coding" panose="020B0609020101020101" pitchFamily="49" charset="-127"/>
-                        <a:ea typeface="D2Coding" panose="020B0609020101020101" pitchFamily="49" charset="-127"/>
-                      </a:endParaRPr>
                     </a:p>
                   </a:txBody>
                   <a:tcPr marL="2934" marR="2934" marT="1956" marB="1956" anchor="ctr">
-                    <a:lnL w="7620" cap="flat" cmpd="sng" algn="ctr">
-                      <a:noFill/>
-                      <a:prstDash val="solid"/>
-                      <a:round/>
-                      <a:headEnd type="none" w="med" len="med"/>
-                      <a:tailEnd type="none" w="med" len="med"/>
-                    </a:lnL>
-                    <a:lnR w="7620" cap="flat" cmpd="sng" algn="ctr">
-                      <a:noFill/>
-                      <a:prstDash val="solid"/>
-                      <a:round/>
-                      <a:headEnd type="none" w="med" len="med"/>
-                      <a:tailEnd type="none" w="med" len="med"/>
-                    </a:lnR>
-                    <a:lnT w="12700" cap="flat" cmpd="sng" algn="ctr">
+                    <a:lnL w="12700" cap="flat" cmpd="sng" algn="ctr">
                       <a:solidFill>
                         <a:schemeClr val="tx1"/>
                       </a:solidFill>
@@ -12740,6 +12889,22 @@
                       <a:round/>
                       <a:headEnd type="none" w="med" len="med"/>
                       <a:tailEnd type="none" w="med" len="med"/>
+                    </a:lnL>
+                    <a:lnR w="12700" cap="flat" cmpd="sng" algn="ctr">
+                      <a:solidFill>
+                        <a:schemeClr val="tx1"/>
+                      </a:solidFill>
+                      <a:prstDash val="solid"/>
+                      <a:round/>
+                      <a:headEnd type="none" w="med" len="med"/>
+                      <a:tailEnd type="none" w="med" len="med"/>
+                    </a:lnR>
+                    <a:lnT w="12700" cap="flat" cmpd="sng" algn="ctr">
+                      <a:noFill/>
+                      <a:prstDash val="solid"/>
+                      <a:round/>
+                      <a:headEnd type="none" w="med" len="med"/>
+                      <a:tailEnd type="none" w="med" len="med"/>
                     </a:lnT>
                     <a:lnB w="7620" cap="flat" cmpd="sng" algn="ctr">
                       <a:noFill/>
@@ -12756,7 +12921,12 @@
                       <a:noFill/>
                       <a:prstDash val="solid"/>
                     </a:lnBlToTr>
-                    <a:noFill/>
+                    <a:solidFill>
+                      <a:schemeClr val="accent6">
+                        <a:lumMod val="20000"/>
+                        <a:lumOff val="80000"/>
+                      </a:schemeClr>
+                    </a:solidFill>
                   </a:tcPr>
                 </a:tc>
                 <a:tc>
@@ -12768,7 +12938,7 @@
                         <a:buNone/>
                       </a:pPr>
                       <a:r>
-                        <a:rPr lang="ko-KR" altLang="en-US" sz="1200">
+                        <a:rPr lang="ko-KR" altLang="en-US" sz="1200" dirty="0">
                           <a:effectLst/>
                           <a:latin typeface="D2Coding" panose="020B0609020101020101" pitchFamily="49" charset="-127"/>
                           <a:ea typeface="D2Coding" panose="020B0609020101020101" pitchFamily="49" charset="-127"/>
@@ -12776,7 +12946,7 @@
                         <a:t>에이전트의 </a:t>
                       </a:r>
                       <a:r>
-                        <a:rPr lang="en-US" altLang="ko-KR" sz="1200">
+                        <a:rPr lang="en-US" altLang="ko-KR" sz="1200" dirty="0">
                           <a:effectLst/>
                           <a:latin typeface="D2Coding" panose="020B0609020101020101" pitchFamily="49" charset="-127"/>
                           <a:ea typeface="D2Coding" panose="020B0609020101020101" pitchFamily="49" charset="-127"/>
@@ -12784,7 +12954,7 @@
                         <a:t>'</a:t>
                       </a:r>
                       <a:r>
-                        <a:rPr lang="ko-KR" altLang="en-US" sz="1200">
+                        <a:rPr lang="ko-KR" altLang="en-US" sz="1200" dirty="0">
                           <a:effectLst/>
                           <a:latin typeface="D2Coding" panose="020B0609020101020101" pitchFamily="49" charset="-127"/>
                           <a:ea typeface="D2Coding" panose="020B0609020101020101" pitchFamily="49" charset="-127"/>
@@ -12792,7 +12962,7 @@
                         <a:t>장</a:t>
                       </a:r>
                       <a:r>
-                        <a:rPr lang="en-US" altLang="ko-KR" sz="1200">
+                        <a:rPr lang="en-US" altLang="ko-KR" sz="1200" dirty="0">
                           <a:effectLst/>
                           <a:latin typeface="D2Coding" panose="020B0609020101020101" pitchFamily="49" charset="-127"/>
                           <a:ea typeface="D2Coding" panose="020B0609020101020101" pitchFamily="49" charset="-127"/>
@@ -12800,7 +12970,7 @@
                         <a:t>·</a:t>
                       </a:r>
                       <a:r>
-                        <a:rPr lang="ko-KR" altLang="en-US" sz="1200">
+                        <a:rPr lang="ko-KR" altLang="en-US" sz="1200" dirty="0">
                           <a:effectLst/>
                           <a:latin typeface="D2Coding" panose="020B0609020101020101" pitchFamily="49" charset="-127"/>
                           <a:ea typeface="D2Coding" panose="020B0609020101020101" pitchFamily="49" charset="-127"/>
@@ -12808,7 +12978,7 @@
                         <a:t>단기 기억 뇌</a:t>
                       </a:r>
                       <a:r>
-                        <a:rPr lang="en-US" altLang="ko-KR" sz="1200">
+                        <a:rPr lang="en-US" altLang="ko-KR" sz="1200" dirty="0">
                           <a:effectLst/>
                           <a:latin typeface="D2Coding" panose="020B0609020101020101" pitchFamily="49" charset="-127"/>
                           <a:ea typeface="D2Coding" panose="020B0609020101020101" pitchFamily="49" charset="-127"/>
@@ -12818,14 +12988,7 @@
                     </a:p>
                   </a:txBody>
                   <a:tcPr marL="0" marR="0" marT="1956" marB="1956" anchor="ctr">
-                    <a:lnL w="7620" cap="flat" cmpd="sng" algn="ctr">
-                      <a:noFill/>
-                      <a:prstDash val="solid"/>
-                      <a:round/>
-                      <a:headEnd type="none" w="med" len="med"/>
-                      <a:tailEnd type="none" w="med" len="med"/>
-                    </a:lnL>
-                    <a:lnR w="12700" cap="flat" cmpd="sng" algn="ctr">
+                    <a:lnL w="12700" cap="flat" cmpd="sng" algn="ctr">
                       <a:solidFill>
                         <a:schemeClr val="tx1"/>
                       </a:solidFill>
@@ -12833,11 +12996,16 @@
                       <a:round/>
                       <a:headEnd type="none" w="med" len="med"/>
                       <a:tailEnd type="none" w="med" len="med"/>
+                    </a:lnL>
+                    <a:lnR w="12700" cap="flat" cmpd="sng" algn="ctr">
+                      <a:noFill/>
+                      <a:prstDash val="solid"/>
+                      <a:round/>
+                      <a:headEnd type="none" w="med" len="med"/>
+                      <a:tailEnd type="none" w="med" len="med"/>
                     </a:lnR>
                     <a:lnT w="12700" cap="flat" cmpd="sng" algn="ctr">
-                      <a:solidFill>
-                        <a:schemeClr val="tx1"/>
-                      </a:solidFill>
+                      <a:noFill/>
                       <a:prstDash val="solid"/>
                       <a:round/>
                       <a:headEnd type="none" w="med" len="med"/>
@@ -12858,7 +13026,12 @@
                       <a:noFill/>
                       <a:prstDash val="solid"/>
                     </a:lnBlToTr>
-                    <a:noFill/>
+                    <a:solidFill>
+                      <a:schemeClr val="accent6">
+                        <a:lumMod val="20000"/>
+                        <a:lumOff val="80000"/>
+                      </a:schemeClr>
+                    </a:solidFill>
                   </a:tcPr>
                 </a:tc>
                 <a:extLst>
@@ -12867,7 +13040,7 @@
                   </a:ext>
                 </a:extLst>
               </a:tr>
-              <a:tr h="402452">
+              <a:tr h="484301">
                 <a:tc>
                   <a:txBody>
                     <a:bodyPr/>
@@ -12914,6 +13087,13 @@
                   </a:txBody>
                   <a:tcPr marL="2934" marR="2934" marT="1956" marB="1956" anchor="ctr">
                     <a:lnL w="12700" cap="flat" cmpd="sng" algn="ctr">
+                      <a:noFill/>
+                      <a:prstDash val="solid"/>
+                      <a:round/>
+                      <a:headEnd type="none" w="med" len="med"/>
+                      <a:tailEnd type="none" w="med" len="med"/>
+                    </a:lnL>
+                    <a:lnR w="12700" cap="flat" cmpd="sng" algn="ctr">
                       <a:solidFill>
                         <a:schemeClr val="tx1"/>
                       </a:solidFill>
@@ -12921,13 +13101,6 @@
                       <a:round/>
                       <a:headEnd type="none" w="med" len="med"/>
                       <a:tailEnd type="none" w="med" len="med"/>
-                    </a:lnL>
-                    <a:lnR w="7620" cap="flat" cmpd="sng" algn="ctr">
-                      <a:noFill/>
-                      <a:prstDash val="solid"/>
-                      <a:round/>
-                      <a:headEnd type="none" w="med" len="med"/>
-                      <a:tailEnd type="none" w="med" len="med"/>
                     </a:lnR>
                     <a:lnT w="7620" cap="flat" cmpd="sng" algn="ctr">
                       <a:noFill/>
@@ -12951,7 +13124,12 @@
                       <a:noFill/>
                       <a:prstDash val="solid"/>
                     </a:lnBlToTr>
-                    <a:noFill/>
+                    <a:solidFill>
+                      <a:schemeClr val="accent6">
+                        <a:lumMod val="20000"/>
+                        <a:lumOff val="80000"/>
+                      </a:schemeClr>
+                    </a:solidFill>
                   </a:tcPr>
                 </a:tc>
                 <a:tc>
@@ -12991,15 +13169,19 @@
                     </a:p>
                   </a:txBody>
                   <a:tcPr marL="2934" marR="2934" marT="1956" marB="1956" anchor="ctr">
-                    <a:lnL w="7620" cap="flat" cmpd="sng" algn="ctr">
-                      <a:noFill/>
+                    <a:lnL w="12700" cap="flat" cmpd="sng" algn="ctr">
+                      <a:solidFill>
+                        <a:schemeClr val="tx1"/>
+                      </a:solidFill>
                       <a:prstDash val="solid"/>
                       <a:round/>
                       <a:headEnd type="none" w="med" len="med"/>
                       <a:tailEnd type="none" w="med" len="med"/>
                     </a:lnL>
-                    <a:lnR w="7620" cap="flat" cmpd="sng" algn="ctr">
-                      <a:noFill/>
+                    <a:lnR w="12700" cap="flat" cmpd="sng" algn="ctr">
+                      <a:solidFill>
+                        <a:schemeClr val="tx1"/>
+                      </a:solidFill>
                       <a:prstDash val="solid"/>
                       <a:round/>
                       <a:headEnd type="none" w="med" len="med"/>
@@ -13027,7 +13209,12 @@
                       <a:noFill/>
                       <a:prstDash val="solid"/>
                     </a:lnBlToTr>
-                    <a:noFill/>
+                    <a:solidFill>
+                      <a:schemeClr val="accent6">
+                        <a:lumMod val="20000"/>
+                        <a:lumOff val="80000"/>
+                      </a:schemeClr>
+                    </a:solidFill>
                   </a:tcPr>
                 </a:tc>
                 <a:tc>
@@ -13065,15 +13252,19 @@
                     </a:p>
                   </a:txBody>
                   <a:tcPr marL="2934" marR="2934" marT="1956" marB="1956" anchor="ctr">
-                    <a:lnL w="7620" cap="flat" cmpd="sng" algn="ctr">
-                      <a:noFill/>
+                    <a:lnL w="12700" cap="flat" cmpd="sng" algn="ctr">
+                      <a:solidFill>
+                        <a:schemeClr val="tx1"/>
+                      </a:solidFill>
                       <a:prstDash val="solid"/>
                       <a:round/>
                       <a:headEnd type="none" w="med" len="med"/>
                       <a:tailEnd type="none" w="med" len="med"/>
                     </a:lnL>
-                    <a:lnR w="7620" cap="flat" cmpd="sng" algn="ctr">
-                      <a:noFill/>
+                    <a:lnR w="12700" cap="flat" cmpd="sng" algn="ctr">
+                      <a:solidFill>
+                        <a:schemeClr val="tx1"/>
+                      </a:solidFill>
                       <a:prstDash val="solid"/>
                       <a:round/>
                       <a:headEnd type="none" w="med" len="med"/>
@@ -13101,7 +13292,12 @@
                       <a:noFill/>
                       <a:prstDash val="solid"/>
                     </a:lnBlToTr>
-                    <a:noFill/>
+                    <a:solidFill>
+                      <a:schemeClr val="accent6">
+                        <a:lumMod val="20000"/>
+                        <a:lumOff val="80000"/>
+                      </a:schemeClr>
+                    </a:solidFill>
                   </a:tcPr>
                 </a:tc>
                 <a:tc>
@@ -13113,7 +13309,7 @@
                         <a:buNone/>
                       </a:pPr>
                       <a:r>
-                        <a:rPr lang="ko-KR" altLang="en-US" sz="1200">
+                        <a:rPr lang="ko-KR" altLang="en-US" sz="1200" dirty="0">
                           <a:effectLst/>
                           <a:latin typeface="D2Coding" panose="020B0609020101020101" pitchFamily="49" charset="-127"/>
                           <a:ea typeface="D2Coding" panose="020B0609020101020101" pitchFamily="49" charset="-127"/>
@@ -13121,7 +13317,7 @@
                         <a:t>스스로 채점하고 수정하는 </a:t>
                       </a:r>
                       <a:r>
-                        <a:rPr lang="en-US" altLang="ko-KR" sz="1200">
+                        <a:rPr lang="en-US" altLang="ko-KR" sz="1200" dirty="0">
                           <a:effectLst/>
                           <a:latin typeface="D2Coding" panose="020B0609020101020101" pitchFamily="49" charset="-127"/>
                           <a:ea typeface="D2Coding" panose="020B0609020101020101" pitchFamily="49" charset="-127"/>
@@ -13129,7 +13325,7 @@
                         <a:t>'</a:t>
                       </a:r>
                       <a:r>
-                        <a:rPr lang="ko-KR" altLang="en-US" sz="1200">
+                        <a:rPr lang="ko-KR" altLang="en-US" sz="1200" dirty="0">
                           <a:effectLst/>
                           <a:latin typeface="D2Coding" panose="020B0609020101020101" pitchFamily="49" charset="-127"/>
                           <a:ea typeface="D2Coding" panose="020B0609020101020101" pitchFamily="49" charset="-127"/>
@@ -13137,7 +13333,7 @@
                         <a:t>오답 노트</a:t>
                       </a:r>
                       <a:r>
-                        <a:rPr lang="en-US" altLang="ko-KR" sz="1200">
+                        <a:rPr lang="en-US" altLang="ko-KR" sz="1200" dirty="0">
                           <a:effectLst/>
                           <a:latin typeface="D2Coding" panose="020B0609020101020101" pitchFamily="49" charset="-127"/>
                           <a:ea typeface="D2Coding" panose="020B0609020101020101" pitchFamily="49" charset="-127"/>
@@ -13147,14 +13343,7 @@
                     </a:p>
                   </a:txBody>
                   <a:tcPr marL="0" marR="0" marT="1956" marB="1956" anchor="ctr">
-                    <a:lnL w="7620" cap="flat" cmpd="sng" algn="ctr">
-                      <a:noFill/>
-                      <a:prstDash val="solid"/>
-                      <a:round/>
-                      <a:headEnd type="none" w="med" len="med"/>
-                      <a:tailEnd type="none" w="med" len="med"/>
-                    </a:lnL>
-                    <a:lnR w="12700" cap="flat" cmpd="sng" algn="ctr">
+                    <a:lnL w="12700" cap="flat" cmpd="sng" algn="ctr">
                       <a:solidFill>
                         <a:schemeClr val="tx1"/>
                       </a:solidFill>
@@ -13162,6 +13351,13 @@
                       <a:round/>
                       <a:headEnd type="none" w="med" len="med"/>
                       <a:tailEnd type="none" w="med" len="med"/>
+                    </a:lnL>
+                    <a:lnR w="12700" cap="flat" cmpd="sng" algn="ctr">
+                      <a:noFill/>
+                      <a:prstDash val="solid"/>
+                      <a:round/>
+                      <a:headEnd type="none" w="med" len="med"/>
+                      <a:tailEnd type="none" w="med" len="med"/>
                     </a:lnR>
                     <a:lnT w="7620" cap="flat" cmpd="sng" algn="ctr">
                       <a:noFill/>
@@ -13185,7 +13381,12 @@
                       <a:noFill/>
                       <a:prstDash val="solid"/>
                     </a:lnBlToTr>
-                    <a:noFill/>
+                    <a:solidFill>
+                      <a:schemeClr val="accent6">
+                        <a:lumMod val="20000"/>
+                        <a:lumOff val="80000"/>
+                      </a:schemeClr>
+                    </a:solidFill>
                   </a:tcPr>
                 </a:tc>
                 <a:extLst>
@@ -13194,7 +13395,7 @@
                   </a:ext>
                 </a:extLst>
               </a:tr>
-              <a:tr h="373932">
+              <a:tr h="449981">
                 <a:tc>
                   <a:txBody>
                     <a:bodyPr/>
@@ -13233,6 +13434,13 @@
                   </a:txBody>
                   <a:tcPr marL="2934" marR="2934" marT="1956" marB="1956" anchor="ctr">
                     <a:lnL w="12700" cap="flat" cmpd="sng" algn="ctr">
+                      <a:noFill/>
+                      <a:prstDash val="solid"/>
+                      <a:round/>
+                      <a:headEnd type="none" w="med" len="med"/>
+                      <a:tailEnd type="none" w="med" len="med"/>
+                    </a:lnL>
+                    <a:lnR w="12700" cap="flat" cmpd="sng" algn="ctr">
                       <a:solidFill>
                         <a:schemeClr val="tx1"/>
                       </a:solidFill>
@@ -13240,13 +13448,6 @@
                       <a:round/>
                       <a:headEnd type="none" w="med" len="med"/>
                       <a:tailEnd type="none" w="med" len="med"/>
-                    </a:lnL>
-                    <a:lnR w="7620" cap="flat" cmpd="sng" algn="ctr">
-                      <a:noFill/>
-                      <a:prstDash val="solid"/>
-                      <a:round/>
-                      <a:headEnd type="none" w="med" len="med"/>
-                      <a:tailEnd type="none" w="med" len="med"/>
                     </a:lnR>
                     <a:lnT w="7620" cap="flat" cmpd="sng" algn="ctr">
                       <a:noFill/>
@@ -13270,7 +13471,12 @@
                       <a:noFill/>
                       <a:prstDash val="solid"/>
                     </a:lnBlToTr>
-                    <a:noFill/>
+                    <a:solidFill>
+                      <a:schemeClr val="accent6">
+                        <a:lumMod val="20000"/>
+                        <a:lumOff val="80000"/>
+                      </a:schemeClr>
+                    </a:solidFill>
                   </a:tcPr>
                 </a:tc>
                 <a:tc>
@@ -13310,15 +13516,19 @@
                     </a:p>
                   </a:txBody>
                   <a:tcPr marL="2934" marR="2934" marT="1956" marB="1956" anchor="ctr">
-                    <a:lnL w="7620" cap="flat" cmpd="sng" algn="ctr">
-                      <a:noFill/>
+                    <a:lnL w="12700" cap="flat" cmpd="sng" algn="ctr">
+                      <a:solidFill>
+                        <a:schemeClr val="tx1"/>
+                      </a:solidFill>
                       <a:prstDash val="solid"/>
                       <a:round/>
                       <a:headEnd type="none" w="med" len="med"/>
                       <a:tailEnd type="none" w="med" len="med"/>
                     </a:lnL>
-                    <a:lnR w="7620" cap="flat" cmpd="sng" algn="ctr">
-                      <a:noFill/>
+                    <a:lnR w="12700" cap="flat" cmpd="sng" algn="ctr">
+                      <a:solidFill>
+                        <a:schemeClr val="tx1"/>
+                      </a:solidFill>
                       <a:prstDash val="solid"/>
                       <a:round/>
                       <a:headEnd type="none" w="med" len="med"/>
@@ -13346,7 +13556,12 @@
                       <a:noFill/>
                       <a:prstDash val="solid"/>
                     </a:lnBlToTr>
-                    <a:noFill/>
+                    <a:solidFill>
+                      <a:schemeClr val="accent6">
+                        <a:lumMod val="20000"/>
+                        <a:lumOff val="80000"/>
+                      </a:schemeClr>
+                    </a:solidFill>
                   </a:tcPr>
                 </a:tc>
                 <a:tc>
@@ -13358,7 +13573,7 @@
                         <a:buNone/>
                       </a:pPr>
                       <a:r>
-                        <a:rPr lang="ko-KR" altLang="en-US" sz="1200">
+                        <a:rPr lang="ko-KR" altLang="en-US" sz="1200" dirty="0">
                           <a:effectLst/>
                           <a:latin typeface="D2Coding" panose="020B0609020101020101" pitchFamily="49" charset="-127"/>
                           <a:ea typeface="D2Coding" panose="020B0609020101020101" pitchFamily="49" charset="-127"/>
@@ -13366,7 +13581,7 @@
                         <a:t>기획자</a:t>
                       </a:r>
                       <a:r>
-                        <a:rPr lang="en-US" altLang="ko-KR" sz="1200">
+                        <a:rPr lang="en-US" altLang="ko-KR" sz="1200" dirty="0">
                           <a:effectLst/>
                           <a:latin typeface="D2Coding" panose="020B0609020101020101" pitchFamily="49" charset="-127"/>
                           <a:ea typeface="D2Coding" panose="020B0609020101020101" pitchFamily="49" charset="-127"/>
@@ -13374,7 +13589,7 @@
                         <a:t>, </a:t>
                       </a:r>
                       <a:r>
-                        <a:rPr lang="ko-KR" altLang="en-US" sz="1200">
+                        <a:rPr lang="ko-KR" altLang="en-US" sz="1200" dirty="0">
                           <a:effectLst/>
                           <a:latin typeface="D2Coding" panose="020B0609020101020101" pitchFamily="49" charset="-127"/>
                           <a:ea typeface="D2Coding" panose="020B0609020101020101" pitchFamily="49" charset="-127"/>
@@ -13382,7 +13597,7 @@
                         <a:t>개발자</a:t>
                       </a:r>
                       <a:r>
-                        <a:rPr lang="en-US" altLang="ko-KR" sz="1200">
+                        <a:rPr lang="en-US" altLang="ko-KR" sz="1200" dirty="0">
                           <a:effectLst/>
                           <a:latin typeface="D2Coding" panose="020B0609020101020101" pitchFamily="49" charset="-127"/>
                           <a:ea typeface="D2Coding" panose="020B0609020101020101" pitchFamily="49" charset="-127"/>
@@ -13390,25 +13605,37 @@
                         <a:t>, </a:t>
                       </a:r>
                       <a:r>
-                        <a:rPr lang="ko-KR" altLang="en-US" sz="1200">
+                        <a:rPr lang="ko-KR" altLang="en-US" sz="1200" dirty="0" err="1">
                           <a:effectLst/>
                           <a:latin typeface="D2Coding" panose="020B0609020101020101" pitchFamily="49" charset="-127"/>
                           <a:ea typeface="D2Coding" panose="020B0609020101020101" pitchFamily="49" charset="-127"/>
                         </a:rPr>
-                        <a:t>검수자 등 개별 에이전트가 토론하고 협력하여 대형 과제를 수행함</a:t>
+                        <a:t>검수자</a:t>
+                      </a:r>
+                      <a:r>
+                        <a:rPr lang="ko-KR" altLang="en-US" sz="1200" dirty="0">
+                          <a:effectLst/>
+                          <a:latin typeface="D2Coding" panose="020B0609020101020101" pitchFamily="49" charset="-127"/>
+                          <a:ea typeface="D2Coding" panose="020B0609020101020101" pitchFamily="49" charset="-127"/>
+                        </a:rPr>
+                        <a:t> 등 개별 에이전트가 토론하고 협력하여 대형 과제를 수행함</a:t>
                       </a:r>
                     </a:p>
                   </a:txBody>
                   <a:tcPr marL="2934" marR="2934" marT="1956" marB="1956" anchor="ctr">
-                    <a:lnL w="7620" cap="flat" cmpd="sng" algn="ctr">
-                      <a:noFill/>
+                    <a:lnL w="12700" cap="flat" cmpd="sng" algn="ctr">
+                      <a:solidFill>
+                        <a:schemeClr val="tx1"/>
+                      </a:solidFill>
                       <a:prstDash val="solid"/>
                       <a:round/>
                       <a:headEnd type="none" w="med" len="med"/>
                       <a:tailEnd type="none" w="med" len="med"/>
                     </a:lnL>
-                    <a:lnR w="7620" cap="flat" cmpd="sng" algn="ctr">
-                      <a:noFill/>
+                    <a:lnR w="12700" cap="flat" cmpd="sng" algn="ctr">
+                      <a:solidFill>
+                        <a:schemeClr val="tx1"/>
+                      </a:solidFill>
                       <a:prstDash val="solid"/>
                       <a:round/>
                       <a:headEnd type="none" w="med" len="med"/>
@@ -13436,7 +13663,12 @@
                       <a:noFill/>
                       <a:prstDash val="solid"/>
                     </a:lnBlToTr>
-                    <a:noFill/>
+                    <a:solidFill>
+                      <a:schemeClr val="accent6">
+                        <a:lumMod val="20000"/>
+                        <a:lumOff val="80000"/>
+                      </a:schemeClr>
+                    </a:solidFill>
                   </a:tcPr>
                 </a:tc>
                 <a:tc>
@@ -13482,14 +13714,7 @@
                     </a:p>
                   </a:txBody>
                   <a:tcPr marL="0" marR="0" marT="1956" marB="1956" anchor="ctr">
-                    <a:lnL w="7620" cap="flat" cmpd="sng" algn="ctr">
-                      <a:noFill/>
-                      <a:prstDash val="solid"/>
-                      <a:round/>
-                      <a:headEnd type="none" w="med" len="med"/>
-                      <a:tailEnd type="none" w="med" len="med"/>
-                    </a:lnL>
-                    <a:lnR w="12700" cap="flat" cmpd="sng" algn="ctr">
+                    <a:lnL w="12700" cap="flat" cmpd="sng" algn="ctr">
                       <a:solidFill>
                         <a:schemeClr val="tx1"/>
                       </a:solidFill>
@@ -13497,6 +13722,13 @@
                       <a:round/>
                       <a:headEnd type="none" w="med" len="med"/>
                       <a:tailEnd type="none" w="med" len="med"/>
+                    </a:lnL>
+                    <a:lnR w="12700" cap="flat" cmpd="sng" algn="ctr">
+                      <a:noFill/>
+                      <a:prstDash val="solid"/>
+                      <a:round/>
+                      <a:headEnd type="none" w="med" len="med"/>
+                      <a:tailEnd type="none" w="med" len="med"/>
                     </a:lnR>
                     <a:lnT w="7620" cap="flat" cmpd="sng" algn="ctr">
                       <a:noFill/>
@@ -13520,7 +13752,12 @@
                       <a:noFill/>
                       <a:prstDash val="solid"/>
                     </a:lnBlToTr>
-                    <a:noFill/>
+                    <a:solidFill>
+                      <a:schemeClr val="accent6">
+                        <a:lumMod val="20000"/>
+                        <a:lumOff val="80000"/>
+                      </a:schemeClr>
+                    </a:solidFill>
                   </a:tcPr>
                 </a:tc>
                 <a:extLst>
@@ -13529,7 +13766,7 @@
                   </a:ext>
                 </a:extLst>
               </a:tr>
-              <a:tr h="430973">
+              <a:tr h="518622">
                 <a:tc>
                   <a:txBody>
                     <a:bodyPr/>
@@ -13600,6 +13837,13 @@
                   </a:txBody>
                   <a:tcPr marL="2934" marR="2934" marT="1956" marB="1956" anchor="ctr">
                     <a:lnL w="12700" cap="flat" cmpd="sng" algn="ctr">
+                      <a:noFill/>
+                      <a:prstDash val="solid"/>
+                      <a:round/>
+                      <a:headEnd type="none" w="med" len="med"/>
+                      <a:tailEnd type="none" w="med" len="med"/>
+                    </a:lnL>
+                    <a:lnR w="12700" cap="flat" cmpd="sng" algn="ctr">
                       <a:solidFill>
                         <a:schemeClr val="tx1"/>
                       </a:solidFill>
@@ -13607,13 +13851,6 @@
                       <a:round/>
                       <a:headEnd type="none" w="med" len="med"/>
                       <a:tailEnd type="none" w="med" len="med"/>
-                    </a:lnL>
-                    <a:lnR w="7620" cap="flat" cmpd="sng" algn="ctr">
-                      <a:noFill/>
-                      <a:prstDash val="solid"/>
-                      <a:round/>
-                      <a:headEnd type="none" w="med" len="med"/>
-                      <a:tailEnd type="none" w="med" len="med"/>
                     </a:lnR>
                     <a:lnT w="7620" cap="flat" cmpd="sng" algn="ctr">
                       <a:noFill/>
@@ -13637,7 +13874,12 @@
                       <a:noFill/>
                       <a:prstDash val="solid"/>
                     </a:lnBlToTr>
-                    <a:noFill/>
+                    <a:solidFill>
+                      <a:schemeClr val="accent6">
+                        <a:lumMod val="20000"/>
+                        <a:lumOff val="80000"/>
+                      </a:schemeClr>
+                    </a:solidFill>
                   </a:tcPr>
                 </a:tc>
                 <a:tc>
@@ -13677,15 +13919,19 @@
                     </a:p>
                   </a:txBody>
                   <a:tcPr marL="2934" marR="2934" marT="1956" marB="1956" anchor="ctr">
-                    <a:lnL w="7620" cap="flat" cmpd="sng" algn="ctr">
-                      <a:noFill/>
+                    <a:lnL w="12700" cap="flat" cmpd="sng" algn="ctr">
+                      <a:solidFill>
+                        <a:schemeClr val="tx1"/>
+                      </a:solidFill>
                       <a:prstDash val="solid"/>
                       <a:round/>
                       <a:headEnd type="none" w="med" len="med"/>
                       <a:tailEnd type="none" w="med" len="med"/>
                     </a:lnL>
-                    <a:lnR w="7620" cap="flat" cmpd="sng" algn="ctr">
-                      <a:noFill/>
+                    <a:lnR w="12700" cap="flat" cmpd="sng" algn="ctr">
+                      <a:solidFill>
+                        <a:schemeClr val="tx1"/>
+                      </a:solidFill>
                       <a:prstDash val="solid"/>
                       <a:round/>
                       <a:headEnd type="none" w="med" len="med"/>
@@ -13713,7 +13959,12 @@
                       <a:noFill/>
                       <a:prstDash val="solid"/>
                     </a:lnBlToTr>
-                    <a:noFill/>
+                    <a:solidFill>
+                      <a:schemeClr val="accent6">
+                        <a:lumMod val="20000"/>
+                        <a:lumOff val="80000"/>
+                      </a:schemeClr>
+                    </a:solidFill>
                   </a:tcPr>
                 </a:tc>
                 <a:tc>
@@ -13751,15 +14002,19 @@
                     </a:p>
                   </a:txBody>
                   <a:tcPr marL="2934" marR="2934" marT="1956" marB="1956" anchor="ctr">
-                    <a:lnL w="7620" cap="flat" cmpd="sng" algn="ctr">
-                      <a:noFill/>
+                    <a:lnL w="12700" cap="flat" cmpd="sng" algn="ctr">
+                      <a:solidFill>
+                        <a:schemeClr val="tx1"/>
+                      </a:solidFill>
                       <a:prstDash val="solid"/>
                       <a:round/>
                       <a:headEnd type="none" w="med" len="med"/>
                       <a:tailEnd type="none" w="med" len="med"/>
                     </a:lnL>
-                    <a:lnR w="7620" cap="flat" cmpd="sng" algn="ctr">
-                      <a:noFill/>
+                    <a:lnR w="12700" cap="flat" cmpd="sng" algn="ctr">
+                      <a:solidFill>
+                        <a:schemeClr val="tx1"/>
+                      </a:solidFill>
                       <a:prstDash val="solid"/>
                       <a:round/>
                       <a:headEnd type="none" w="med" len="med"/>
@@ -13787,7 +14042,12 @@
                       <a:noFill/>
                       <a:prstDash val="solid"/>
                     </a:lnBlToTr>
-                    <a:noFill/>
+                    <a:solidFill>
+                      <a:schemeClr val="accent6">
+                        <a:lumMod val="20000"/>
+                        <a:lumOff val="80000"/>
+                      </a:schemeClr>
+                    </a:solidFill>
                   </a:tcPr>
                 </a:tc>
                 <a:tc>
@@ -13833,14 +14093,7 @@
                     </a:p>
                   </a:txBody>
                   <a:tcPr marL="0" marR="0" marT="1956" marB="1956" anchor="ctr">
-                    <a:lnL w="7620" cap="flat" cmpd="sng" algn="ctr">
-                      <a:noFill/>
-                      <a:prstDash val="solid"/>
-                      <a:round/>
-                      <a:headEnd type="none" w="med" len="med"/>
-                      <a:tailEnd type="none" w="med" len="med"/>
-                    </a:lnL>
-                    <a:lnR w="12700" cap="flat" cmpd="sng" algn="ctr">
+                    <a:lnL w="12700" cap="flat" cmpd="sng" algn="ctr">
                       <a:solidFill>
                         <a:schemeClr val="tx1"/>
                       </a:solidFill>
@@ -13848,6 +14101,13 @@
                       <a:round/>
                       <a:headEnd type="none" w="med" len="med"/>
                       <a:tailEnd type="none" w="med" len="med"/>
+                    </a:lnL>
+                    <a:lnR w="12700" cap="flat" cmpd="sng" algn="ctr">
+                      <a:noFill/>
+                      <a:prstDash val="solid"/>
+                      <a:round/>
+                      <a:headEnd type="none" w="med" len="med"/>
+                      <a:tailEnd type="none" w="med" len="med"/>
                     </a:lnR>
                     <a:lnT w="7620" cap="flat" cmpd="sng" algn="ctr">
                       <a:noFill/>
@@ -13871,7 +14131,12 @@
                       <a:noFill/>
                       <a:prstDash val="solid"/>
                     </a:lnBlToTr>
-                    <a:noFill/>
+                    <a:solidFill>
+                      <a:schemeClr val="accent6">
+                        <a:lumMod val="20000"/>
+                        <a:lumOff val="80000"/>
+                      </a:schemeClr>
+                    </a:solidFill>
                   </a:tcPr>
                 </a:tc>
                 <a:extLst>
@@ -13880,7 +14145,7 @@
                   </a:ext>
                 </a:extLst>
               </a:tr>
-              <a:tr h="430973">
+              <a:tr h="518622">
                 <a:tc>
                   <a:txBody>
                     <a:bodyPr/>
@@ -13927,6 +14192,13 @@
                   </a:txBody>
                   <a:tcPr marL="2934" marR="2934" marT="1956" marB="1956" anchor="ctr">
                     <a:lnL w="12700" cap="flat" cmpd="sng" algn="ctr">
+                      <a:noFill/>
+                      <a:prstDash val="solid"/>
+                      <a:round/>
+                      <a:headEnd type="none" w="med" len="med"/>
+                      <a:tailEnd type="none" w="med" len="med"/>
+                    </a:lnL>
+                    <a:lnR w="12700" cap="flat" cmpd="sng" algn="ctr">
                       <a:solidFill>
                         <a:schemeClr val="tx1"/>
                       </a:solidFill>
@@ -13934,13 +14206,6 @@
                       <a:round/>
                       <a:headEnd type="none" w="med" len="med"/>
                       <a:tailEnd type="none" w="med" len="med"/>
-                    </a:lnL>
-                    <a:lnR w="7620" cap="flat" cmpd="sng" algn="ctr">
-                      <a:noFill/>
-                      <a:prstDash val="solid"/>
-                      <a:round/>
-                      <a:headEnd type="none" w="med" len="med"/>
-                      <a:tailEnd type="none" w="med" len="med"/>
                     </a:lnR>
                     <a:lnT w="7620" cap="flat" cmpd="sng" algn="ctr">
                       <a:noFill/>
@@ -13964,7 +14229,12 @@
                       <a:noFill/>
                       <a:prstDash val="solid"/>
                     </a:lnBlToTr>
-                    <a:noFill/>
+                    <a:solidFill>
+                      <a:schemeClr val="accent6">
+                        <a:lumMod val="20000"/>
+                        <a:lumOff val="80000"/>
+                      </a:schemeClr>
+                    </a:solidFill>
                   </a:tcPr>
                 </a:tc>
                 <a:tc>
@@ -13976,7 +14246,7 @@
                         <a:buNone/>
                       </a:pPr>
                       <a:r>
-                        <a:rPr lang="en-US" sz="1200">
+                        <a:rPr lang="en-US" sz="1200" dirty="0">
                           <a:effectLst/>
                           <a:latin typeface="D2Coding" panose="020B0609020101020101" pitchFamily="49" charset="-127"/>
                           <a:ea typeface="D2Coding" panose="020B0609020101020101" pitchFamily="49" charset="-127"/>
@@ -13984,7 +14254,7 @@
                         <a:t>GUI </a:t>
                       </a:r>
                       <a:r>
-                        <a:rPr lang="ko-KR" altLang="en-US" sz="1200">
+                        <a:rPr lang="ko-KR" altLang="en-US" sz="1200" dirty="0">
                           <a:effectLst/>
                           <a:latin typeface="D2Coding" panose="020B0609020101020101" pitchFamily="49" charset="-127"/>
                           <a:ea typeface="D2Coding" panose="020B0609020101020101" pitchFamily="49" charset="-127"/>
@@ -13994,15 +14264,19 @@
                     </a:p>
                   </a:txBody>
                   <a:tcPr marL="2934" marR="2934" marT="1956" marB="1956" anchor="ctr">
-                    <a:lnL w="7620" cap="flat" cmpd="sng" algn="ctr">
-                      <a:noFill/>
+                    <a:lnL w="12700" cap="flat" cmpd="sng" algn="ctr">
+                      <a:solidFill>
+                        <a:schemeClr val="tx1"/>
+                      </a:solidFill>
                       <a:prstDash val="solid"/>
                       <a:round/>
                       <a:headEnd type="none" w="med" len="med"/>
                       <a:tailEnd type="none" w="med" len="med"/>
                     </a:lnL>
-                    <a:lnR w="7620" cap="flat" cmpd="sng" algn="ctr">
-                      <a:noFill/>
+                    <a:lnR w="12700" cap="flat" cmpd="sng" algn="ctr">
+                      <a:solidFill>
+                        <a:schemeClr val="tx1"/>
+                      </a:solidFill>
                       <a:prstDash val="solid"/>
                       <a:round/>
                       <a:headEnd type="none" w="med" len="med"/>
@@ -14030,7 +14304,12 @@
                       <a:noFill/>
                       <a:prstDash val="solid"/>
                     </a:lnBlToTr>
-                    <a:noFill/>
+                    <a:solidFill>
+                      <a:schemeClr val="accent6">
+                        <a:lumMod val="20000"/>
+                        <a:lumOff val="80000"/>
+                      </a:schemeClr>
+                    </a:solidFill>
                   </a:tcPr>
                 </a:tc>
                 <a:tc>
@@ -14042,7 +14321,7 @@
                         <a:buNone/>
                       </a:pPr>
                       <a:r>
-                        <a:rPr lang="ko-KR" altLang="en-US" sz="1200">
+                        <a:rPr lang="ko-KR" altLang="en-US" sz="1200" dirty="0">
                           <a:effectLst/>
                           <a:latin typeface="D2Coding" panose="020B0609020101020101" pitchFamily="49" charset="-127"/>
                           <a:ea typeface="D2Coding" panose="020B0609020101020101" pitchFamily="49" charset="-127"/>
@@ -14050,7 +14329,7 @@
                         <a:t>화면 스크린샷을 시각적으로 인식해 </a:t>
                       </a:r>
                       <a:r>
-                        <a:rPr lang="en-US" altLang="ko-KR" sz="1200">
+                        <a:rPr lang="en-US" altLang="ko-KR" sz="1200" dirty="0">
                           <a:effectLst/>
                           <a:latin typeface="D2Coding" panose="020B0609020101020101" pitchFamily="49" charset="-127"/>
                           <a:ea typeface="D2Coding" panose="020B0609020101020101" pitchFamily="49" charset="-127"/>
@@ -14058,7 +14337,7 @@
                         <a:t>API</a:t>
                       </a:r>
                       <a:r>
-                        <a:rPr lang="ko-KR" altLang="en-US" sz="1200">
+                        <a:rPr lang="ko-KR" altLang="en-US" sz="1200" dirty="0">
                           <a:effectLst/>
                           <a:latin typeface="D2Coding" panose="020B0609020101020101" pitchFamily="49" charset="-127"/>
                           <a:ea typeface="D2Coding" panose="020B0609020101020101" pitchFamily="49" charset="-127"/>
@@ -14066,7 +14345,7 @@
                         <a:t>가 없는 프로그램의 마우스</a:t>
                       </a:r>
                       <a:r>
-                        <a:rPr lang="en-US" altLang="ko-KR" sz="1200">
+                        <a:rPr lang="en-US" altLang="ko-KR" sz="1200" dirty="0">
                           <a:effectLst/>
                           <a:latin typeface="D2Coding" panose="020B0609020101020101" pitchFamily="49" charset="-127"/>
                           <a:ea typeface="D2Coding" panose="020B0609020101020101" pitchFamily="49" charset="-127"/>
@@ -14074,7 +14353,7 @@
                         <a:t>·</a:t>
                       </a:r>
                       <a:r>
-                        <a:rPr lang="ko-KR" altLang="en-US" sz="1200">
+                        <a:rPr lang="ko-KR" altLang="en-US" sz="1200" dirty="0">
                           <a:effectLst/>
                           <a:latin typeface="D2Coding" panose="020B0609020101020101" pitchFamily="49" charset="-127"/>
                           <a:ea typeface="D2Coding" panose="020B0609020101020101" pitchFamily="49" charset="-127"/>
@@ -14084,15 +14363,19 @@
                     </a:p>
                   </a:txBody>
                   <a:tcPr marL="2934" marR="2934" marT="1956" marB="1956" anchor="ctr">
-                    <a:lnL w="7620" cap="flat" cmpd="sng" algn="ctr">
-                      <a:noFill/>
+                    <a:lnL w="12700" cap="flat" cmpd="sng" algn="ctr">
+                      <a:solidFill>
+                        <a:schemeClr val="tx1"/>
+                      </a:solidFill>
                       <a:prstDash val="solid"/>
                       <a:round/>
                       <a:headEnd type="none" w="med" len="med"/>
                       <a:tailEnd type="none" w="med" len="med"/>
                     </a:lnL>
-                    <a:lnR w="7620" cap="flat" cmpd="sng" algn="ctr">
-                      <a:noFill/>
+                    <a:lnR w="12700" cap="flat" cmpd="sng" algn="ctr">
+                      <a:solidFill>
+                        <a:schemeClr val="tx1"/>
+                      </a:solidFill>
                       <a:prstDash val="solid"/>
                       <a:round/>
                       <a:headEnd type="none" w="med" len="med"/>
@@ -14120,7 +14403,12 @@
                       <a:noFill/>
                       <a:prstDash val="solid"/>
                     </a:lnBlToTr>
-                    <a:noFill/>
+                    <a:solidFill>
+                      <a:schemeClr val="accent6">
+                        <a:lumMod val="20000"/>
+                        <a:lumOff val="80000"/>
+                      </a:schemeClr>
+                    </a:solidFill>
                   </a:tcPr>
                 </a:tc>
                 <a:tc>
@@ -14132,7 +14420,7 @@
                         <a:buNone/>
                       </a:pPr>
                       <a:r>
-                        <a:rPr lang="ko-KR" altLang="en-US" sz="1200">
+                        <a:rPr lang="ko-KR" altLang="en-US" sz="1200" dirty="0">
                           <a:effectLst/>
                           <a:latin typeface="D2Coding" panose="020B0609020101020101" pitchFamily="49" charset="-127"/>
                           <a:ea typeface="D2Coding" panose="020B0609020101020101" pitchFamily="49" charset="-127"/>
@@ -14140,7 +14428,7 @@
                         <a:t>모니터를 보며 마우스를 잡은 </a:t>
                       </a:r>
                       <a:r>
-                        <a:rPr lang="en-US" altLang="ko-KR" sz="1200">
+                        <a:rPr lang="en-US" altLang="ko-KR" sz="1200" dirty="0">
                           <a:effectLst/>
                           <a:latin typeface="D2Coding" panose="020B0609020101020101" pitchFamily="49" charset="-127"/>
                           <a:ea typeface="D2Coding" panose="020B0609020101020101" pitchFamily="49" charset="-127"/>
@@ -14148,7 +14436,7 @@
                         <a:t>'</a:t>
                       </a:r>
                       <a:r>
-                        <a:rPr lang="ko-KR" altLang="en-US" sz="1200">
+                        <a:rPr lang="ko-KR" altLang="en-US" sz="1200" dirty="0">
                           <a:effectLst/>
                           <a:latin typeface="D2Coding" panose="020B0609020101020101" pitchFamily="49" charset="-127"/>
                           <a:ea typeface="D2Coding" panose="020B0609020101020101" pitchFamily="49" charset="-127"/>
@@ -14156,7 +14444,7 @@
                         <a:t>사람의 신체</a:t>
                       </a:r>
                       <a:r>
-                        <a:rPr lang="en-US" altLang="ko-KR" sz="1200">
+                        <a:rPr lang="en-US" altLang="ko-KR" sz="1200" dirty="0">
                           <a:effectLst/>
                           <a:latin typeface="D2Coding" panose="020B0609020101020101" pitchFamily="49" charset="-127"/>
                           <a:ea typeface="D2Coding" panose="020B0609020101020101" pitchFamily="49" charset="-127"/>
@@ -14166,14 +14454,7 @@
                     </a:p>
                   </a:txBody>
                   <a:tcPr marL="0" marR="0" marT="1956" marB="1956" anchor="ctr">
-                    <a:lnL w="7620" cap="flat" cmpd="sng" algn="ctr">
-                      <a:noFill/>
-                      <a:prstDash val="solid"/>
-                      <a:round/>
-                      <a:headEnd type="none" w="med" len="med"/>
-                      <a:tailEnd type="none" w="med" len="med"/>
-                    </a:lnL>
-                    <a:lnR w="12700" cap="flat" cmpd="sng" algn="ctr">
+                    <a:lnL w="12700" cap="flat" cmpd="sng" algn="ctr">
                       <a:solidFill>
                         <a:schemeClr val="tx1"/>
                       </a:solidFill>
@@ -14181,6 +14462,13 @@
                       <a:round/>
                       <a:headEnd type="none" w="med" len="med"/>
                       <a:tailEnd type="none" w="med" len="med"/>
+                    </a:lnL>
+                    <a:lnR w="12700" cap="flat" cmpd="sng" algn="ctr">
+                      <a:noFill/>
+                      <a:prstDash val="solid"/>
+                      <a:round/>
+                      <a:headEnd type="none" w="med" len="med"/>
+                      <a:tailEnd type="none" w="med" len="med"/>
                     </a:lnR>
                     <a:lnT w="7620" cap="flat" cmpd="sng" algn="ctr">
                       <a:noFill/>
@@ -14204,7 +14492,12 @@
                       <a:noFill/>
                       <a:prstDash val="solid"/>
                     </a:lnBlToTr>
-                    <a:noFill/>
+                    <a:solidFill>
+                      <a:schemeClr val="accent6">
+                        <a:lumMod val="20000"/>
+                        <a:lumOff val="80000"/>
+                      </a:schemeClr>
+                    </a:solidFill>
                   </a:tcPr>
                 </a:tc>
                 <a:extLst>
@@ -14213,7 +14506,7 @@
                   </a:ext>
                 </a:extLst>
               </a:tr>
-              <a:tr h="373932">
+              <a:tr h="449981">
                 <a:tc>
                   <a:txBody>
                     <a:bodyPr/>
@@ -14263,6 +14556,13 @@
                   </a:txBody>
                   <a:tcPr marL="2934" marR="2934" marT="1956" marB="1956" anchor="ctr">
                     <a:lnL w="12700" cap="flat" cmpd="sng" algn="ctr">
+                      <a:noFill/>
+                      <a:prstDash val="solid"/>
+                      <a:round/>
+                      <a:headEnd type="none" w="med" len="med"/>
+                      <a:tailEnd type="none" w="med" len="med"/>
+                    </a:lnL>
+                    <a:lnR w="12700" cap="flat" cmpd="sng" algn="ctr">
                       <a:solidFill>
                         <a:schemeClr val="tx1"/>
                       </a:solidFill>
@@ -14270,13 +14570,6 @@
                       <a:round/>
                       <a:headEnd type="none" w="med" len="med"/>
                       <a:tailEnd type="none" w="med" len="med"/>
-                    </a:lnL>
-                    <a:lnR w="7620" cap="flat" cmpd="sng" algn="ctr">
-                      <a:noFill/>
-                      <a:prstDash val="solid"/>
-                      <a:round/>
-                      <a:headEnd type="none" w="med" len="med"/>
-                      <a:tailEnd type="none" w="med" len="med"/>
                     </a:lnR>
                     <a:lnT w="7620" cap="flat" cmpd="sng" algn="ctr">
                       <a:noFill/>
@@ -14286,9 +14579,7 @@
                       <a:tailEnd type="none" w="med" len="med"/>
                     </a:lnT>
                     <a:lnB w="12700" cap="flat" cmpd="sng" algn="ctr">
-                      <a:solidFill>
-                        <a:schemeClr val="tx1"/>
-                      </a:solidFill>
+                      <a:noFill/>
                       <a:prstDash val="solid"/>
                       <a:round/>
                       <a:headEnd type="none" w="med" len="med"/>
@@ -14302,7 +14593,12 @@
                       <a:noFill/>
                       <a:prstDash val="solid"/>
                     </a:lnBlToTr>
-                    <a:noFill/>
+                    <a:solidFill>
+                      <a:schemeClr val="accent6">
+                        <a:lumMod val="20000"/>
+                        <a:lumOff val="80000"/>
+                      </a:schemeClr>
+                    </a:solidFill>
                   </a:tcPr>
                 </a:tc>
                 <a:tc>
@@ -14314,7 +14610,7 @@
                         <a:buNone/>
                       </a:pPr>
                       <a:r>
-                        <a:rPr lang="ko-KR" altLang="en-US" sz="1200">
+                        <a:rPr lang="ko-KR" altLang="en-US" sz="1200" dirty="0">
                           <a:effectLst/>
                           <a:latin typeface="D2Coding" panose="020B0609020101020101" pitchFamily="49" charset="-127"/>
                           <a:ea typeface="D2Coding" panose="020B0609020101020101" pitchFamily="49" charset="-127"/>
@@ -14324,28 +14620,7 @@
                     </a:p>
                   </a:txBody>
                   <a:tcPr marL="2934" marR="2934" marT="1956" marB="1956" anchor="ctr">
-                    <a:lnL w="7620" cap="flat" cmpd="sng" algn="ctr">
-                      <a:noFill/>
-                      <a:prstDash val="solid"/>
-                      <a:round/>
-                      <a:headEnd type="none" w="med" len="med"/>
-                      <a:tailEnd type="none" w="med" len="med"/>
-                    </a:lnL>
-                    <a:lnR w="7620" cap="flat" cmpd="sng" algn="ctr">
-                      <a:noFill/>
-                      <a:prstDash val="solid"/>
-                      <a:round/>
-                      <a:headEnd type="none" w="med" len="med"/>
-                      <a:tailEnd type="none" w="med" len="med"/>
-                    </a:lnR>
-                    <a:lnT w="7620" cap="flat" cmpd="sng" algn="ctr">
-                      <a:noFill/>
-                      <a:prstDash val="solid"/>
-                      <a:round/>
-                      <a:headEnd type="none" w="med" len="med"/>
-                      <a:tailEnd type="none" w="med" len="med"/>
-                    </a:lnT>
-                    <a:lnB w="12700" cap="flat" cmpd="sng" algn="ctr">
+                    <a:lnL w="12700" cap="flat" cmpd="sng" algn="ctr">
                       <a:solidFill>
                         <a:schemeClr val="tx1"/>
                       </a:solidFill>
@@ -14353,6 +14628,29 @@
                       <a:round/>
                       <a:headEnd type="none" w="med" len="med"/>
                       <a:tailEnd type="none" w="med" len="med"/>
+                    </a:lnL>
+                    <a:lnR w="12700" cap="flat" cmpd="sng" algn="ctr">
+                      <a:solidFill>
+                        <a:schemeClr val="tx1"/>
+                      </a:solidFill>
+                      <a:prstDash val="solid"/>
+                      <a:round/>
+                      <a:headEnd type="none" w="med" len="med"/>
+                      <a:tailEnd type="none" w="med" len="med"/>
+                    </a:lnR>
+                    <a:lnT w="7620" cap="flat" cmpd="sng" algn="ctr">
+                      <a:noFill/>
+                      <a:prstDash val="solid"/>
+                      <a:round/>
+                      <a:headEnd type="none" w="med" len="med"/>
+                      <a:tailEnd type="none" w="med" len="med"/>
+                    </a:lnT>
+                    <a:lnB w="12700" cap="flat" cmpd="sng" algn="ctr">
+                      <a:noFill/>
+                      <a:prstDash val="solid"/>
+                      <a:round/>
+                      <a:headEnd type="none" w="med" len="med"/>
+                      <a:tailEnd type="none" w="med" len="med"/>
                     </a:lnB>
                     <a:lnTlToBr w="12700" cmpd="sng">
                       <a:noFill/>
@@ -14362,7 +14660,12 @@
                       <a:noFill/>
                       <a:prstDash val="solid"/>
                     </a:lnBlToTr>
-                    <a:noFill/>
+                    <a:solidFill>
+                      <a:schemeClr val="accent6">
+                        <a:lumMod val="20000"/>
+                        <a:lumOff val="80000"/>
+                      </a:schemeClr>
+                    </a:solidFill>
                   </a:tcPr>
                 </a:tc>
                 <a:tc>
@@ -14374,7 +14677,7 @@
                         <a:buNone/>
                       </a:pPr>
                       <a:r>
-                        <a:rPr lang="ko-KR" altLang="en-US" sz="1200">
+                        <a:rPr lang="ko-KR" altLang="en-US" sz="1200" dirty="0">
                           <a:effectLst/>
                           <a:latin typeface="D2Coding" panose="020B0609020101020101" pitchFamily="49" charset="-127"/>
                           <a:ea typeface="D2Coding" panose="020B0609020101020101" pitchFamily="49" charset="-127"/>
@@ -14382,7 +14685,7 @@
                         <a:t>단발성 검색에 그치지 않고</a:t>
                       </a:r>
                       <a:r>
-                        <a:rPr lang="en-US" altLang="ko-KR" sz="1200">
+                        <a:rPr lang="en-US" altLang="ko-KR" sz="1200" dirty="0">
                           <a:effectLst/>
                           <a:latin typeface="D2Coding" panose="020B0609020101020101" pitchFamily="49" charset="-127"/>
                           <a:ea typeface="D2Coding" panose="020B0609020101020101" pitchFamily="49" charset="-127"/>
@@ -14390,7 +14693,7 @@
                         <a:t>, </a:t>
                       </a:r>
                       <a:r>
-                        <a:rPr lang="ko-KR" altLang="en-US" sz="1200">
+                        <a:rPr lang="ko-KR" altLang="en-US" sz="1200" dirty="0">
                           <a:effectLst/>
                           <a:latin typeface="D2Coding" panose="020B0609020101020101" pitchFamily="49" charset="-127"/>
                           <a:ea typeface="D2Coding" panose="020B0609020101020101" pitchFamily="49" charset="-127"/>
@@ -14400,28 +14703,7 @@
                     </a:p>
                   </a:txBody>
                   <a:tcPr marL="2934" marR="2934" marT="1956" marB="1956" anchor="ctr">
-                    <a:lnL w="7620" cap="flat" cmpd="sng" algn="ctr">
-                      <a:noFill/>
-                      <a:prstDash val="solid"/>
-                      <a:round/>
-                      <a:headEnd type="none" w="med" len="med"/>
-                      <a:tailEnd type="none" w="med" len="med"/>
-                    </a:lnL>
-                    <a:lnR w="7620" cap="flat" cmpd="sng" algn="ctr">
-                      <a:noFill/>
-                      <a:prstDash val="solid"/>
-                      <a:round/>
-                      <a:headEnd type="none" w="med" len="med"/>
-                      <a:tailEnd type="none" w="med" len="med"/>
-                    </a:lnR>
-                    <a:lnT w="7620" cap="flat" cmpd="sng" algn="ctr">
-                      <a:noFill/>
-                      <a:prstDash val="solid"/>
-                      <a:round/>
-                      <a:headEnd type="none" w="med" len="med"/>
-                      <a:tailEnd type="none" w="med" len="med"/>
-                    </a:lnT>
-                    <a:lnB w="12700" cap="flat" cmpd="sng" algn="ctr">
+                    <a:lnL w="12700" cap="flat" cmpd="sng" algn="ctr">
                       <a:solidFill>
                         <a:schemeClr val="tx1"/>
                       </a:solidFill>
@@ -14429,6 +14711,29 @@
                       <a:round/>
                       <a:headEnd type="none" w="med" len="med"/>
                       <a:tailEnd type="none" w="med" len="med"/>
+                    </a:lnL>
+                    <a:lnR w="12700" cap="flat" cmpd="sng" algn="ctr">
+                      <a:solidFill>
+                        <a:schemeClr val="tx1"/>
+                      </a:solidFill>
+                      <a:prstDash val="solid"/>
+                      <a:round/>
+                      <a:headEnd type="none" w="med" len="med"/>
+                      <a:tailEnd type="none" w="med" len="med"/>
+                    </a:lnR>
+                    <a:lnT w="7620" cap="flat" cmpd="sng" algn="ctr">
+                      <a:noFill/>
+                      <a:prstDash val="solid"/>
+                      <a:round/>
+                      <a:headEnd type="none" w="med" len="med"/>
+                      <a:tailEnd type="none" w="med" len="med"/>
+                    </a:lnT>
+                    <a:lnB w="12700" cap="flat" cmpd="sng" algn="ctr">
+                      <a:noFill/>
+                      <a:prstDash val="solid"/>
+                      <a:round/>
+                      <a:headEnd type="none" w="med" len="med"/>
+                      <a:tailEnd type="none" w="med" len="med"/>
                     </a:lnB>
                     <a:lnTlToBr w="12700" cmpd="sng">
                       <a:noFill/>
@@ -14438,7 +14743,12 @@
                       <a:noFill/>
                       <a:prstDash val="solid"/>
                     </a:lnBlToTr>
-                    <a:noFill/>
+                    <a:solidFill>
+                      <a:schemeClr val="accent6">
+                        <a:lumMod val="20000"/>
+                        <a:lumOff val="80000"/>
+                      </a:schemeClr>
+                    </a:solidFill>
                   </a:tcPr>
                 </a:tc>
                 <a:tc>
@@ -14484,14 +14794,7 @@
                     </a:p>
                   </a:txBody>
                   <a:tcPr marL="0" marR="0" marT="1956" marB="1956" anchor="ctr">
-                    <a:lnL w="7620" cap="flat" cmpd="sng" algn="ctr">
-                      <a:noFill/>
-                      <a:prstDash val="solid"/>
-                      <a:round/>
-                      <a:headEnd type="none" w="med" len="med"/>
-                      <a:tailEnd type="none" w="med" len="med"/>
-                    </a:lnL>
-                    <a:lnR w="12700" cap="flat" cmpd="sng" algn="ctr">
+                    <a:lnL w="12700" cap="flat" cmpd="sng" algn="ctr">
                       <a:solidFill>
                         <a:schemeClr val="tx1"/>
                       </a:solidFill>
@@ -14499,6 +14802,13 @@
                       <a:round/>
                       <a:headEnd type="none" w="med" len="med"/>
                       <a:tailEnd type="none" w="med" len="med"/>
+                    </a:lnL>
+                    <a:lnR w="12700" cap="flat" cmpd="sng" algn="ctr">
+                      <a:noFill/>
+                      <a:prstDash val="solid"/>
+                      <a:round/>
+                      <a:headEnd type="none" w="med" len="med"/>
+                      <a:tailEnd type="none" w="med" len="med"/>
                     </a:lnR>
                     <a:lnT w="7620" cap="flat" cmpd="sng" algn="ctr">
                       <a:noFill/>
@@ -14508,9 +14818,7 @@
                       <a:tailEnd type="none" w="med" len="med"/>
                     </a:lnT>
                     <a:lnB w="12700" cap="flat" cmpd="sng" algn="ctr">
-                      <a:solidFill>
-                        <a:schemeClr val="tx1"/>
-                      </a:solidFill>
+                      <a:noFill/>
                       <a:prstDash val="solid"/>
                       <a:round/>
                       <a:headEnd type="none" w="med" len="med"/>
@@ -14524,7 +14832,12 @@
                       <a:noFill/>
                       <a:prstDash val="solid"/>
                     </a:lnBlToTr>
-                    <a:noFill/>
+                    <a:solidFill>
+                      <a:schemeClr val="accent6">
+                        <a:lumMod val="20000"/>
+                        <a:lumOff val="80000"/>
+                      </a:schemeClr>
+                    </a:solidFill>
                   </a:tcPr>
                 </a:tc>
                 <a:extLst>
@@ -14842,7 +15155,7 @@
         </p:nvSpPr>
         <p:spPr>
           <a:xfrm>
-            <a:off x="593422" y="1248422"/>
+            <a:off x="593422" y="1229372"/>
             <a:ext cx="10951483" cy="791050"/>
           </a:xfrm>
           <a:prstGeom prst="rect">
@@ -14984,14 +15297,14 @@
           <p:nvPr>
             <p:extLst>
               <p:ext uri="{D42A27DB-BD31-4B8C-83A1-F6EECF244321}">
-                <p14:modId xmlns:p14="http://schemas.microsoft.com/office/powerpoint/2010/main" val="1589669080"/>
+                <p14:modId xmlns:p14="http://schemas.microsoft.com/office/powerpoint/2010/main" val="742369643"/>
               </p:ext>
             </p:extLst>
           </p:nvPr>
         </p:nvGraphicFramePr>
         <p:xfrm>
-          <a:off x="1140851" y="3177019"/>
-          <a:ext cx="9260449" cy="2030138"/>
+          <a:off x="1331351" y="2805911"/>
+          <a:ext cx="9260449" cy="2576080"/>
         </p:xfrm>
         <a:graphic>
           <a:graphicData uri="http://schemas.openxmlformats.org/drawingml/2006/table">
@@ -15020,7 +15333,7 @@
                   </a:extLst>
                 </a:gridCol>
               </a:tblGrid>
-              <a:tr h="300604">
+              <a:tr h="381442">
                 <a:tc>
                   <a:txBody>
                     <a:bodyPr/>
@@ -15030,7 +15343,7 @@
                         <a:buNone/>
                       </a:pPr>
                       <a:r>
-                        <a:rPr lang="ko-KR" altLang="en-US" sz="1600">
+                        <a:rPr lang="ko-KR" altLang="en-US" sz="1600" dirty="0">
                           <a:effectLst/>
                           <a:latin typeface="D2Coding" panose="020B0609020101020101" pitchFamily="49" charset="-127"/>
                           <a:ea typeface="D2Coding" panose="020B0609020101020101" pitchFamily="49" charset="-127"/>
@@ -15041,6 +15354,13 @@
                   </a:txBody>
                   <a:tcPr marL="19834" marR="19834" marT="13223" marB="13223" anchor="ctr">
                     <a:lnL w="12700" cap="flat" cmpd="sng" algn="ctr">
+                      <a:noFill/>
+                      <a:prstDash val="solid"/>
+                      <a:round/>
+                      <a:headEnd type="none" w="med" len="med"/>
+                      <a:tailEnd type="none" w="med" len="med"/>
+                    </a:lnL>
+                    <a:lnR w="12700" cap="flat" cmpd="sng" algn="ctr">
                       <a:solidFill>
                         <a:schemeClr val="tx1"/>
                       </a:solidFill>
@@ -15048,17 +15368,15 @@
                       <a:round/>
                       <a:headEnd type="none" w="med" len="med"/>
                       <a:tailEnd type="none" w="med" len="med"/>
-                    </a:lnL>
-                    <a:lnR w="7620" cap="flat" cmpd="sng" algn="ctr">
-                      <a:solidFill>
-                        <a:srgbClr val="CCCCCC"/>
-                      </a:solidFill>
-                      <a:prstDash val="solid"/>
-                      <a:round/>
-                      <a:headEnd type="none" w="med" len="med"/>
-                      <a:tailEnd type="none" w="med" len="med"/>
                     </a:lnR>
                     <a:lnT w="12700" cap="flat" cmpd="sng" algn="ctr">
+                      <a:noFill/>
+                      <a:prstDash val="solid"/>
+                      <a:round/>
+                      <a:headEnd type="none" w="med" len="med"/>
+                      <a:tailEnd type="none" w="med" len="med"/>
+                    </a:lnT>
+                    <a:lnB w="12700" cap="flat" cmpd="sng" algn="ctr">
                       <a:solidFill>
                         <a:schemeClr val="tx1"/>
                       </a:solidFill>
@@ -15066,17 +15384,20 @@
                       <a:round/>
                       <a:headEnd type="none" w="med" len="med"/>
                       <a:tailEnd type="none" w="med" len="med"/>
-                    </a:lnT>
-                    <a:lnB w="7620" cap="flat" cmpd="sng" algn="ctr">
-                      <a:solidFill>
-                        <a:srgbClr val="CCCCCC"/>
-                      </a:solidFill>
-                      <a:prstDash val="solid"/>
-                      <a:round/>
-                      <a:headEnd type="none" w="med" len="med"/>
-                      <a:tailEnd type="none" w="med" len="med"/>
                     </a:lnB>
-                    <a:noFill/>
+                    <a:lnTlToBr w="12700" cmpd="sng">
+                      <a:noFill/>
+                      <a:prstDash val="solid"/>
+                    </a:lnTlToBr>
+                    <a:lnBlToTr w="12700" cmpd="sng">
+                      <a:noFill/>
+                      <a:prstDash val="solid"/>
+                    </a:lnBlToTr>
+                    <a:solidFill>
+                      <a:schemeClr val="bg1">
+                        <a:lumMod val="85000"/>
+                      </a:schemeClr>
+                    </a:solidFill>
                   </a:tcPr>
                 </a:tc>
                 <a:tc>
@@ -15088,7 +15409,7 @@
                         <a:buNone/>
                       </a:pPr>
                       <a:r>
-                        <a:rPr lang="ko-KR" altLang="en-US" sz="1600">
+                        <a:rPr lang="ko-KR" altLang="en-US" sz="1600" dirty="0">
                           <a:effectLst/>
                           <a:latin typeface="D2Coding" panose="020B0609020101020101" pitchFamily="49" charset="-127"/>
                           <a:ea typeface="D2Coding" panose="020B0609020101020101" pitchFamily="49" charset="-127"/>
@@ -15098,25 +15419,7 @@
                     </a:p>
                   </a:txBody>
                   <a:tcPr marL="19834" marR="19834" marT="13223" marB="13223" anchor="ctr">
-                    <a:lnL w="7620" cap="flat" cmpd="sng" algn="ctr">
-                      <a:solidFill>
-                        <a:srgbClr val="CCCCCC"/>
-                      </a:solidFill>
-                      <a:prstDash val="solid"/>
-                      <a:round/>
-                      <a:headEnd type="none" w="med" len="med"/>
-                      <a:tailEnd type="none" w="med" len="med"/>
-                    </a:lnL>
-                    <a:lnR w="7620" cap="flat" cmpd="sng" algn="ctr">
-                      <a:solidFill>
-                        <a:srgbClr val="CCCCCC"/>
-                      </a:solidFill>
-                      <a:prstDash val="solid"/>
-                      <a:round/>
-                      <a:headEnd type="none" w="med" len="med"/>
-                      <a:tailEnd type="none" w="med" len="med"/>
-                    </a:lnR>
-                    <a:lnT w="12700" cap="flat" cmpd="sng" algn="ctr">
+                    <a:lnL w="12700" cap="flat" cmpd="sng" algn="ctr">
                       <a:solidFill>
                         <a:schemeClr val="tx1"/>
                       </a:solidFill>
@@ -15124,17 +15427,45 @@
                       <a:round/>
                       <a:headEnd type="none" w="med" len="med"/>
                       <a:tailEnd type="none" w="med" len="med"/>
+                    </a:lnL>
+                    <a:lnR w="12700" cap="flat" cmpd="sng" algn="ctr">
+                      <a:solidFill>
+                        <a:schemeClr val="tx1"/>
+                      </a:solidFill>
+                      <a:prstDash val="solid"/>
+                      <a:round/>
+                      <a:headEnd type="none" w="med" len="med"/>
+                      <a:tailEnd type="none" w="med" len="med"/>
+                    </a:lnR>
+                    <a:lnT w="12700" cap="flat" cmpd="sng" algn="ctr">
+                      <a:noFill/>
+                      <a:prstDash val="solid"/>
+                      <a:round/>
+                      <a:headEnd type="none" w="med" len="med"/>
+                      <a:tailEnd type="none" w="med" len="med"/>
                     </a:lnT>
-                    <a:lnB w="7620" cap="flat" cmpd="sng" algn="ctr">
+                    <a:lnB w="12700" cap="flat" cmpd="sng" algn="ctr">
                       <a:solidFill>
-                        <a:srgbClr val="CCCCCC"/>
+                        <a:schemeClr val="tx1"/>
                       </a:solidFill>
                       <a:prstDash val="solid"/>
                       <a:round/>
                       <a:headEnd type="none" w="med" len="med"/>
                       <a:tailEnd type="none" w="med" len="med"/>
                     </a:lnB>
-                    <a:noFill/>
+                    <a:lnTlToBr w="12700" cmpd="sng">
+                      <a:noFill/>
+                      <a:prstDash val="solid"/>
+                    </a:lnTlToBr>
+                    <a:lnBlToTr w="12700" cmpd="sng">
+                      <a:noFill/>
+                      <a:prstDash val="solid"/>
+                    </a:lnBlToTr>
+                    <a:solidFill>
+                      <a:schemeClr val="bg1">
+                        <a:lumMod val="85000"/>
+                      </a:schemeClr>
+                    </a:solidFill>
                   </a:tcPr>
                 </a:tc>
                 <a:tc>
@@ -15146,7 +15477,7 @@
                         <a:buNone/>
                       </a:pPr>
                       <a:r>
-                        <a:rPr lang="ko-KR" altLang="en-US" sz="1600">
+                        <a:rPr lang="ko-KR" altLang="en-US" sz="1600" dirty="0">
                           <a:effectLst/>
                           <a:latin typeface="D2Coding" panose="020B0609020101020101" pitchFamily="49" charset="-127"/>
                           <a:ea typeface="D2Coding" panose="020B0609020101020101" pitchFamily="49" charset="-127"/>
@@ -15156,16 +15487,7 @@
                     </a:p>
                   </a:txBody>
                   <a:tcPr marL="19834" marR="19834" marT="13223" marB="13223" anchor="ctr">
-                    <a:lnL w="7620" cap="flat" cmpd="sng" algn="ctr">
-                      <a:solidFill>
-                        <a:srgbClr val="CCCCCC"/>
-                      </a:solidFill>
-                      <a:prstDash val="solid"/>
-                      <a:round/>
-                      <a:headEnd type="none" w="med" len="med"/>
-                      <a:tailEnd type="none" w="med" len="med"/>
-                    </a:lnL>
-                    <a:lnR w="12700" cap="flat" cmpd="sng" algn="ctr">
+                    <a:lnL w="12700" cap="flat" cmpd="sng" algn="ctr">
                       <a:solidFill>
                         <a:schemeClr val="tx1"/>
                       </a:solidFill>
@@ -15173,8 +15495,22 @@
                       <a:round/>
                       <a:headEnd type="none" w="med" len="med"/>
                       <a:tailEnd type="none" w="med" len="med"/>
+                    </a:lnL>
+                    <a:lnR w="12700" cap="flat" cmpd="sng" algn="ctr">
+                      <a:noFill/>
+                      <a:prstDash val="solid"/>
+                      <a:round/>
+                      <a:headEnd type="none" w="med" len="med"/>
+                      <a:tailEnd type="none" w="med" len="med"/>
                     </a:lnR>
                     <a:lnT w="12700" cap="flat" cmpd="sng" algn="ctr">
+                      <a:noFill/>
+                      <a:prstDash val="solid"/>
+                      <a:round/>
+                      <a:headEnd type="none" w="med" len="med"/>
+                      <a:tailEnd type="none" w="med" len="med"/>
+                    </a:lnT>
+                    <a:lnB w="12700" cap="flat" cmpd="sng" algn="ctr">
                       <a:solidFill>
                         <a:schemeClr val="tx1"/>
                       </a:solidFill>
@@ -15182,17 +15518,20 @@
                       <a:round/>
                       <a:headEnd type="none" w="med" len="med"/>
                       <a:tailEnd type="none" w="med" len="med"/>
-                    </a:lnT>
-                    <a:lnB w="7620" cap="flat" cmpd="sng" algn="ctr">
-                      <a:solidFill>
-                        <a:srgbClr val="CCCCCC"/>
-                      </a:solidFill>
-                      <a:prstDash val="solid"/>
-                      <a:round/>
-                      <a:headEnd type="none" w="med" len="med"/>
-                      <a:tailEnd type="none" w="med" len="med"/>
                     </a:lnB>
-                    <a:noFill/>
+                    <a:lnTlToBr w="12700" cmpd="sng">
+                      <a:noFill/>
+                      <a:prstDash val="solid"/>
+                    </a:lnTlToBr>
+                    <a:lnBlToTr w="12700" cmpd="sng">
+                      <a:noFill/>
+                      <a:prstDash val="solid"/>
+                    </a:lnBlToTr>
+                    <a:solidFill>
+                      <a:schemeClr val="bg1">
+                        <a:lumMod val="85000"/>
+                      </a:schemeClr>
+                    </a:solidFill>
                   </a:tcPr>
                 </a:tc>
                 <a:extLst>
@@ -15201,7 +15540,7 @@
                   </a:ext>
                 </a:extLst>
               </a:tr>
-              <a:tr h="607704">
+              <a:tr h="771127">
                 <a:tc>
                   <a:txBody>
                     <a:bodyPr/>
@@ -15211,7 +15550,7 @@
                         <a:buNone/>
                       </a:pPr>
                       <a:r>
-                        <a:rPr lang="ko-KR" altLang="en-US" sz="1600">
+                        <a:rPr lang="ko-KR" altLang="en-US" sz="1600" dirty="0">
                           <a:effectLst/>
                           <a:latin typeface="D2Coding" panose="020B0609020101020101" pitchFamily="49" charset="-127"/>
                           <a:ea typeface="D2Coding" panose="020B0609020101020101" pitchFamily="49" charset="-127"/>
@@ -15222,6 +15561,13 @@
                   </a:txBody>
                   <a:tcPr marL="19834" marR="19834" marT="13223" marB="13223" anchor="ctr">
                     <a:lnL w="12700" cap="flat" cmpd="sng" algn="ctr">
+                      <a:noFill/>
+                      <a:prstDash val="solid"/>
+                      <a:round/>
+                      <a:headEnd type="none" w="med" len="med"/>
+                      <a:tailEnd type="none" w="med" len="med"/>
+                    </a:lnL>
+                    <a:lnR w="12700" cap="flat" cmpd="sng" algn="ctr">
                       <a:solidFill>
                         <a:schemeClr val="tx1"/>
                       </a:solidFill>
@@ -15229,19 +15575,10 @@
                       <a:round/>
                       <a:headEnd type="none" w="med" len="med"/>
                       <a:tailEnd type="none" w="med" len="med"/>
-                    </a:lnL>
-                    <a:lnR w="7620" cap="flat" cmpd="sng" algn="ctr">
+                    </a:lnR>
+                    <a:lnT w="12700" cap="flat" cmpd="sng" algn="ctr">
                       <a:solidFill>
-                        <a:srgbClr val="CCCCCC"/>
-                      </a:solidFill>
-                      <a:prstDash val="solid"/>
-                      <a:round/>
-                      <a:headEnd type="none" w="med" len="med"/>
-                      <a:tailEnd type="none" w="med" len="med"/>
-                    </a:lnR>
-                    <a:lnT w="7620" cap="flat" cmpd="sng" algn="ctr">
-                      <a:solidFill>
-                        <a:srgbClr val="CCCCCC"/>
+                        <a:schemeClr val="tx1"/>
                       </a:solidFill>
                       <a:prstDash val="solid"/>
                       <a:round/>
@@ -15249,14 +15586,20 @@
                       <a:tailEnd type="none" w="med" len="med"/>
                     </a:lnT>
                     <a:lnB w="7620" cap="flat" cmpd="sng" algn="ctr">
-                      <a:solidFill>
-                        <a:srgbClr val="CCCCCC"/>
-                      </a:solidFill>
+                      <a:noFill/>
                       <a:prstDash val="solid"/>
                       <a:round/>
                       <a:headEnd type="none" w="med" len="med"/>
                       <a:tailEnd type="none" w="med" len="med"/>
                     </a:lnB>
+                    <a:lnTlToBr w="12700" cmpd="sng">
+                      <a:noFill/>
+                      <a:prstDash val="solid"/>
+                    </a:lnTlToBr>
+                    <a:lnBlToTr w="12700" cmpd="sng">
+                      <a:noFill/>
+                      <a:prstDash val="solid"/>
+                    </a:lnBlToTr>
                     <a:noFill/>
                   </a:tcPr>
                 </a:tc>
@@ -15319,27 +15662,27 @@
                     </a:p>
                   </a:txBody>
                   <a:tcPr marL="19834" marR="19834" marT="13223" marB="13223" anchor="ctr">
-                    <a:lnL w="7620" cap="flat" cmpd="sng" algn="ctr">
+                    <a:lnL w="12700" cap="flat" cmpd="sng" algn="ctr">
                       <a:solidFill>
-                        <a:srgbClr val="CCCCCC"/>
+                        <a:schemeClr val="tx1"/>
                       </a:solidFill>
                       <a:prstDash val="solid"/>
                       <a:round/>
                       <a:headEnd type="none" w="med" len="med"/>
                       <a:tailEnd type="none" w="med" len="med"/>
                     </a:lnL>
-                    <a:lnR w="7620" cap="flat" cmpd="sng" algn="ctr">
+                    <a:lnR w="12700" cap="flat" cmpd="sng" algn="ctr">
                       <a:solidFill>
-                        <a:srgbClr val="CCCCCC"/>
+                        <a:schemeClr val="tx1"/>
                       </a:solidFill>
                       <a:prstDash val="solid"/>
                       <a:round/>
                       <a:headEnd type="none" w="med" len="med"/>
                       <a:tailEnd type="none" w="med" len="med"/>
                     </a:lnR>
-                    <a:lnT w="7620" cap="flat" cmpd="sng" algn="ctr">
+                    <a:lnT w="12700" cap="flat" cmpd="sng" algn="ctr">
                       <a:solidFill>
-                        <a:srgbClr val="CCCCCC"/>
+                        <a:schemeClr val="tx1"/>
                       </a:solidFill>
                       <a:prstDash val="solid"/>
                       <a:round/>
@@ -15347,14 +15690,20 @@
                       <a:tailEnd type="none" w="med" len="med"/>
                     </a:lnT>
                     <a:lnB w="7620" cap="flat" cmpd="sng" algn="ctr">
-                      <a:solidFill>
-                        <a:srgbClr val="CCCCCC"/>
-                      </a:solidFill>
+                      <a:noFill/>
                       <a:prstDash val="solid"/>
                       <a:round/>
                       <a:headEnd type="none" w="med" len="med"/>
                       <a:tailEnd type="none" w="med" len="med"/>
                     </a:lnB>
+                    <a:lnTlToBr w="12700" cmpd="sng">
+                      <a:noFill/>
+                      <a:prstDash val="solid"/>
+                    </a:lnTlToBr>
+                    <a:lnBlToTr w="12700" cmpd="sng">
+                      <a:noFill/>
+                      <a:prstDash val="solid"/>
+                    </a:lnBlToTr>
                     <a:noFill/>
                   </a:tcPr>
                 </a:tc>
@@ -15390,16 +15739,7 @@
                     </a:p>
                   </a:txBody>
                   <a:tcPr marL="19834" marR="19834" marT="13223" marB="13223" anchor="ctr">
-                    <a:lnL w="7620" cap="flat" cmpd="sng" algn="ctr">
-                      <a:solidFill>
-                        <a:srgbClr val="CCCCCC"/>
-                      </a:solidFill>
-                      <a:prstDash val="solid"/>
-                      <a:round/>
-                      <a:headEnd type="none" w="med" len="med"/>
-                      <a:tailEnd type="none" w="med" len="med"/>
-                    </a:lnL>
-                    <a:lnR w="12700" cap="flat" cmpd="sng" algn="ctr">
+                    <a:lnL w="12700" cap="flat" cmpd="sng" algn="ctr">
                       <a:solidFill>
                         <a:schemeClr val="tx1"/>
                       </a:solidFill>
@@ -15407,10 +15747,17 @@
                       <a:round/>
                       <a:headEnd type="none" w="med" len="med"/>
                       <a:tailEnd type="none" w="med" len="med"/>
+                    </a:lnL>
+                    <a:lnR w="12700" cap="flat" cmpd="sng" algn="ctr">
+                      <a:noFill/>
+                      <a:prstDash val="solid"/>
+                      <a:round/>
+                      <a:headEnd type="none" w="med" len="med"/>
+                      <a:tailEnd type="none" w="med" len="med"/>
                     </a:lnR>
-                    <a:lnT w="7620" cap="flat" cmpd="sng" algn="ctr">
+                    <a:lnT w="12700" cap="flat" cmpd="sng" algn="ctr">
                       <a:solidFill>
-                        <a:srgbClr val="CCCCCC"/>
+                        <a:schemeClr val="tx1"/>
                       </a:solidFill>
                       <a:prstDash val="solid"/>
                       <a:round/>
@@ -15418,14 +15765,20 @@
                       <a:tailEnd type="none" w="med" len="med"/>
                     </a:lnT>
                     <a:lnB w="7620" cap="flat" cmpd="sng" algn="ctr">
-                      <a:solidFill>
-                        <a:srgbClr val="CCCCCC"/>
-                      </a:solidFill>
+                      <a:noFill/>
                       <a:prstDash val="solid"/>
                       <a:round/>
                       <a:headEnd type="none" w="med" len="med"/>
                       <a:tailEnd type="none" w="med" len="med"/>
                     </a:lnB>
+                    <a:lnTlToBr w="12700" cmpd="sng">
+                      <a:noFill/>
+                      <a:prstDash val="solid"/>
+                    </a:lnTlToBr>
+                    <a:lnBlToTr w="12700" cmpd="sng">
+                      <a:noFill/>
+                      <a:prstDash val="solid"/>
+                    </a:lnBlToTr>
                     <a:noFill/>
                   </a:tcPr>
                 </a:tc>
@@ -15435,7 +15788,7 @@
                   </a:ext>
                 </a:extLst>
               </a:tr>
-              <a:tr h="412370">
+              <a:tr h="652384">
                 <a:tc>
                   <a:txBody>
                     <a:bodyPr/>
@@ -15445,7 +15798,7 @@
                         <a:buNone/>
                       </a:pPr>
                       <a:r>
-                        <a:rPr lang="ko-KR" altLang="en-US" sz="1600">
+                        <a:rPr lang="ko-KR" altLang="en-US" sz="1600" dirty="0">
                           <a:effectLst/>
                           <a:latin typeface="D2Coding" panose="020B0609020101020101" pitchFamily="49" charset="-127"/>
                           <a:ea typeface="D2Coding" panose="020B0609020101020101" pitchFamily="49" charset="-127"/>
@@ -15456,6 +15809,13 @@
                   </a:txBody>
                   <a:tcPr marL="19834" marR="19834" marT="13223" marB="13223" anchor="ctr">
                     <a:lnL w="12700" cap="flat" cmpd="sng" algn="ctr">
+                      <a:noFill/>
+                      <a:prstDash val="solid"/>
+                      <a:round/>
+                      <a:headEnd type="none" w="med" len="med"/>
+                      <a:tailEnd type="none" w="med" len="med"/>
+                    </a:lnL>
+                    <a:lnR w="12700" cap="flat" cmpd="sng" algn="ctr">
                       <a:solidFill>
                         <a:schemeClr val="tx1"/>
                       </a:solidFill>
@@ -15463,34 +15823,29 @@
                       <a:round/>
                       <a:headEnd type="none" w="med" len="med"/>
                       <a:tailEnd type="none" w="med" len="med"/>
-                    </a:lnL>
-                    <a:lnR w="7620" cap="flat" cmpd="sng" algn="ctr">
-                      <a:solidFill>
-                        <a:srgbClr val="CCCCCC"/>
-                      </a:solidFill>
-                      <a:prstDash val="solid"/>
-                      <a:round/>
-                      <a:headEnd type="none" w="med" len="med"/>
-                      <a:tailEnd type="none" w="med" len="med"/>
                     </a:lnR>
                     <a:lnT w="7620" cap="flat" cmpd="sng" algn="ctr">
-                      <a:solidFill>
-                        <a:srgbClr val="CCCCCC"/>
-                      </a:solidFill>
+                      <a:noFill/>
                       <a:prstDash val="solid"/>
                       <a:round/>
                       <a:headEnd type="none" w="med" len="med"/>
                       <a:tailEnd type="none" w="med" len="med"/>
                     </a:lnT>
                     <a:lnB w="7620" cap="flat" cmpd="sng" algn="ctr">
-                      <a:solidFill>
-                        <a:srgbClr val="CCCCCC"/>
-                      </a:solidFill>
+                      <a:noFill/>
                       <a:prstDash val="solid"/>
                       <a:round/>
                       <a:headEnd type="none" w="med" len="med"/>
                       <a:tailEnd type="none" w="med" len="med"/>
                     </a:lnB>
+                    <a:lnTlToBr w="12700" cmpd="sng">
+                      <a:noFill/>
+                      <a:prstDash val="solid"/>
+                    </a:lnTlToBr>
+                    <a:lnBlToTr w="12700" cmpd="sng">
+                      <a:noFill/>
+                      <a:prstDash val="solid"/>
+                    </a:lnBlToTr>
                     <a:noFill/>
                   </a:tcPr>
                 </a:tc>
@@ -15526,18 +15881,18 @@
                     </a:p>
                   </a:txBody>
                   <a:tcPr marL="19834" marR="19834" marT="13223" marB="13223" anchor="ctr">
-                    <a:lnL w="7620" cap="flat" cmpd="sng" algn="ctr">
+                    <a:lnL w="12700" cap="flat" cmpd="sng" algn="ctr">
                       <a:solidFill>
-                        <a:srgbClr val="CCCCCC"/>
+                        <a:schemeClr val="tx1"/>
                       </a:solidFill>
                       <a:prstDash val="solid"/>
                       <a:round/>
                       <a:headEnd type="none" w="med" len="med"/>
                       <a:tailEnd type="none" w="med" len="med"/>
                     </a:lnL>
-                    <a:lnR w="7620" cap="flat" cmpd="sng" algn="ctr">
+                    <a:lnR w="12700" cap="flat" cmpd="sng" algn="ctr">
                       <a:solidFill>
-                        <a:srgbClr val="CCCCCC"/>
+                        <a:schemeClr val="tx1"/>
                       </a:solidFill>
                       <a:prstDash val="solid"/>
                       <a:round/>
@@ -15545,23 +15900,27 @@
                       <a:tailEnd type="none" w="med" len="med"/>
                     </a:lnR>
                     <a:lnT w="7620" cap="flat" cmpd="sng" algn="ctr">
-                      <a:solidFill>
-                        <a:srgbClr val="CCCCCC"/>
-                      </a:solidFill>
+                      <a:noFill/>
                       <a:prstDash val="solid"/>
                       <a:round/>
                       <a:headEnd type="none" w="med" len="med"/>
                       <a:tailEnd type="none" w="med" len="med"/>
                     </a:lnT>
                     <a:lnB w="7620" cap="flat" cmpd="sng" algn="ctr">
-                      <a:solidFill>
-                        <a:srgbClr val="CCCCCC"/>
-                      </a:solidFill>
+                      <a:noFill/>
                       <a:prstDash val="solid"/>
                       <a:round/>
                       <a:headEnd type="none" w="med" len="med"/>
                       <a:tailEnd type="none" w="med" len="med"/>
                     </a:lnB>
+                    <a:lnTlToBr w="12700" cmpd="sng">
+                      <a:noFill/>
+                      <a:prstDash val="solid"/>
+                    </a:lnTlToBr>
+                    <a:lnBlToTr w="12700" cmpd="sng">
+                      <a:noFill/>
+                      <a:prstDash val="solid"/>
+                    </a:lnBlToTr>
                     <a:noFill/>
                   </a:tcPr>
                 </a:tc>
@@ -15634,16 +15993,7 @@
                     </a:p>
                   </a:txBody>
                   <a:tcPr marL="19834" marR="19834" marT="13223" marB="13223" anchor="ctr">
-                    <a:lnL w="7620" cap="flat" cmpd="sng" algn="ctr">
-                      <a:solidFill>
-                        <a:srgbClr val="CCCCCC"/>
-                      </a:solidFill>
-                      <a:prstDash val="solid"/>
-                      <a:round/>
-                      <a:headEnd type="none" w="med" len="med"/>
-                      <a:tailEnd type="none" w="med" len="med"/>
-                    </a:lnL>
-                    <a:lnR w="12700" cap="flat" cmpd="sng" algn="ctr">
+                    <a:lnL w="12700" cap="flat" cmpd="sng" algn="ctr">
                       <a:solidFill>
                         <a:schemeClr val="tx1"/>
                       </a:solidFill>
@@ -15651,25 +16001,36 @@
                       <a:round/>
                       <a:headEnd type="none" w="med" len="med"/>
                       <a:tailEnd type="none" w="med" len="med"/>
+                    </a:lnL>
+                    <a:lnR w="12700" cap="flat" cmpd="sng" algn="ctr">
+                      <a:noFill/>
+                      <a:prstDash val="solid"/>
+                      <a:round/>
+                      <a:headEnd type="none" w="med" len="med"/>
+                      <a:tailEnd type="none" w="med" len="med"/>
                     </a:lnR>
                     <a:lnT w="7620" cap="flat" cmpd="sng" algn="ctr">
-                      <a:solidFill>
-                        <a:srgbClr val="CCCCCC"/>
-                      </a:solidFill>
+                      <a:noFill/>
                       <a:prstDash val="solid"/>
                       <a:round/>
                       <a:headEnd type="none" w="med" len="med"/>
                       <a:tailEnd type="none" w="med" len="med"/>
                     </a:lnT>
                     <a:lnB w="7620" cap="flat" cmpd="sng" algn="ctr">
-                      <a:solidFill>
-                        <a:srgbClr val="CCCCCC"/>
-                      </a:solidFill>
+                      <a:noFill/>
                       <a:prstDash val="solid"/>
                       <a:round/>
                       <a:headEnd type="none" w="med" len="med"/>
                       <a:tailEnd type="none" w="med" len="med"/>
                     </a:lnB>
+                    <a:lnTlToBr w="12700" cmpd="sng">
+                      <a:noFill/>
+                      <a:prstDash val="solid"/>
+                    </a:lnTlToBr>
+                    <a:lnBlToTr w="12700" cmpd="sng">
+                      <a:noFill/>
+                      <a:prstDash val="solid"/>
+                    </a:lnBlToTr>
                     <a:noFill/>
                   </a:tcPr>
                 </a:tc>
@@ -15679,7 +16040,7 @@
                   </a:ext>
                 </a:extLst>
               </a:tr>
-              <a:tr h="607704">
+              <a:tr h="771127">
                 <a:tc>
                   <a:txBody>
                     <a:bodyPr/>
@@ -15700,6 +16061,13 @@
                   </a:txBody>
                   <a:tcPr marL="19834" marR="19834" marT="13223" marB="13223" anchor="ctr">
                     <a:lnL w="12700" cap="flat" cmpd="sng" algn="ctr">
+                      <a:noFill/>
+                      <a:prstDash val="solid"/>
+                      <a:round/>
+                      <a:headEnd type="none" w="med" len="med"/>
+                      <a:tailEnd type="none" w="med" len="med"/>
+                    </a:lnL>
+                    <a:lnR w="12700" cap="flat" cmpd="sng" algn="ctr">
                       <a:solidFill>
                         <a:schemeClr val="tx1"/>
                       </a:solidFill>
@@ -15707,34 +16075,29 @@
                       <a:round/>
                       <a:headEnd type="none" w="med" len="med"/>
                       <a:tailEnd type="none" w="med" len="med"/>
-                    </a:lnL>
-                    <a:lnR w="7620" cap="flat" cmpd="sng" algn="ctr">
-                      <a:solidFill>
-                        <a:srgbClr val="CCCCCC"/>
-                      </a:solidFill>
-                      <a:prstDash val="solid"/>
-                      <a:round/>
-                      <a:headEnd type="none" w="med" len="med"/>
-                      <a:tailEnd type="none" w="med" len="med"/>
                     </a:lnR>
                     <a:lnT w="7620" cap="flat" cmpd="sng" algn="ctr">
-                      <a:solidFill>
-                        <a:srgbClr val="CCCCCC"/>
-                      </a:solidFill>
+                      <a:noFill/>
                       <a:prstDash val="solid"/>
                       <a:round/>
                       <a:headEnd type="none" w="med" len="med"/>
                       <a:tailEnd type="none" w="med" len="med"/>
                     </a:lnT>
                     <a:lnB w="12700" cap="flat" cmpd="sng" algn="ctr">
-                      <a:solidFill>
-                        <a:schemeClr val="tx1"/>
-                      </a:solidFill>
+                      <a:noFill/>
                       <a:prstDash val="solid"/>
                       <a:round/>
                       <a:headEnd type="none" w="med" len="med"/>
                       <a:tailEnd type="none" w="med" len="med"/>
                     </a:lnB>
+                    <a:lnTlToBr w="12700" cmpd="sng">
+                      <a:noFill/>
+                      <a:prstDash val="solid"/>
+                    </a:lnTlToBr>
+                    <a:lnBlToTr w="12700" cmpd="sng">
+                      <a:noFill/>
+                      <a:prstDash val="solid"/>
+                    </a:lnBlToTr>
                     <a:noFill/>
                   </a:tcPr>
                 </a:tc>
@@ -15781,34 +16144,7 @@
                     </a:p>
                   </a:txBody>
                   <a:tcPr marL="19834" marR="19834" marT="13223" marB="13223" anchor="ctr">
-                    <a:lnL w="7620" cap="flat" cmpd="sng" algn="ctr">
-                      <a:solidFill>
-                        <a:srgbClr val="CCCCCC"/>
-                      </a:solidFill>
-                      <a:prstDash val="solid"/>
-                      <a:round/>
-                      <a:headEnd type="none" w="med" len="med"/>
-                      <a:tailEnd type="none" w="med" len="med"/>
-                    </a:lnL>
-                    <a:lnR w="7620" cap="flat" cmpd="sng" algn="ctr">
-                      <a:solidFill>
-                        <a:srgbClr val="CCCCCC"/>
-                      </a:solidFill>
-                      <a:prstDash val="solid"/>
-                      <a:round/>
-                      <a:headEnd type="none" w="med" len="med"/>
-                      <a:tailEnd type="none" w="med" len="med"/>
-                    </a:lnR>
-                    <a:lnT w="7620" cap="flat" cmpd="sng" algn="ctr">
-                      <a:solidFill>
-                        <a:srgbClr val="CCCCCC"/>
-                      </a:solidFill>
-                      <a:prstDash val="solid"/>
-                      <a:round/>
-                      <a:headEnd type="none" w="med" len="med"/>
-                      <a:tailEnd type="none" w="med" len="med"/>
-                    </a:lnT>
-                    <a:lnB w="12700" cap="flat" cmpd="sng" algn="ctr">
+                    <a:lnL w="12700" cap="flat" cmpd="sng" algn="ctr">
                       <a:solidFill>
                         <a:schemeClr val="tx1"/>
                       </a:solidFill>
@@ -15816,7 +16152,38 @@
                       <a:round/>
                       <a:headEnd type="none" w="med" len="med"/>
                       <a:tailEnd type="none" w="med" len="med"/>
+                    </a:lnL>
+                    <a:lnR w="12700" cap="flat" cmpd="sng" algn="ctr">
+                      <a:solidFill>
+                        <a:schemeClr val="tx1"/>
+                      </a:solidFill>
+                      <a:prstDash val="solid"/>
+                      <a:round/>
+                      <a:headEnd type="none" w="med" len="med"/>
+                      <a:tailEnd type="none" w="med" len="med"/>
+                    </a:lnR>
+                    <a:lnT w="7620" cap="flat" cmpd="sng" algn="ctr">
+                      <a:noFill/>
+                      <a:prstDash val="solid"/>
+                      <a:round/>
+                      <a:headEnd type="none" w="med" len="med"/>
+                      <a:tailEnd type="none" w="med" len="med"/>
+                    </a:lnT>
+                    <a:lnB w="12700" cap="flat" cmpd="sng" algn="ctr">
+                      <a:noFill/>
+                      <a:prstDash val="solid"/>
+                      <a:round/>
+                      <a:headEnd type="none" w="med" len="med"/>
+                      <a:tailEnd type="none" w="med" len="med"/>
                     </a:lnB>
+                    <a:lnTlToBr w="12700" cmpd="sng">
+                      <a:noFill/>
+                      <a:prstDash val="solid"/>
+                    </a:lnTlToBr>
+                    <a:lnBlToTr w="12700" cmpd="sng">
+                      <a:noFill/>
+                      <a:prstDash val="solid"/>
+                    </a:lnBlToTr>
                     <a:noFill/>
                   </a:tcPr>
                 </a:tc>
@@ -15879,16 +16246,7 @@
                     </a:p>
                   </a:txBody>
                   <a:tcPr marL="19834" marR="19834" marT="13223" marB="13223" anchor="ctr">
-                    <a:lnL w="7620" cap="flat" cmpd="sng" algn="ctr">
-                      <a:solidFill>
-                        <a:srgbClr val="CCCCCC"/>
-                      </a:solidFill>
-                      <a:prstDash val="solid"/>
-                      <a:round/>
-                      <a:headEnd type="none" w="med" len="med"/>
-                      <a:tailEnd type="none" w="med" len="med"/>
-                    </a:lnL>
-                    <a:lnR w="12700" cap="flat" cmpd="sng" algn="ctr">
+                    <a:lnL w="12700" cap="flat" cmpd="sng" algn="ctr">
                       <a:solidFill>
                         <a:schemeClr val="tx1"/>
                       </a:solidFill>
@@ -15896,25 +16254,36 @@
                       <a:round/>
                       <a:headEnd type="none" w="med" len="med"/>
                       <a:tailEnd type="none" w="med" len="med"/>
+                    </a:lnL>
+                    <a:lnR w="12700" cap="flat" cmpd="sng" algn="ctr">
+                      <a:noFill/>
+                      <a:prstDash val="solid"/>
+                      <a:round/>
+                      <a:headEnd type="none" w="med" len="med"/>
+                      <a:tailEnd type="none" w="med" len="med"/>
                     </a:lnR>
                     <a:lnT w="7620" cap="flat" cmpd="sng" algn="ctr">
-                      <a:solidFill>
-                        <a:srgbClr val="CCCCCC"/>
-                      </a:solidFill>
+                      <a:noFill/>
                       <a:prstDash val="solid"/>
                       <a:round/>
                       <a:headEnd type="none" w="med" len="med"/>
                       <a:tailEnd type="none" w="med" len="med"/>
                     </a:lnT>
                     <a:lnB w="12700" cap="flat" cmpd="sng" algn="ctr">
-                      <a:solidFill>
-                        <a:schemeClr val="tx1"/>
-                      </a:solidFill>
+                      <a:noFill/>
                       <a:prstDash val="solid"/>
                       <a:round/>
                       <a:headEnd type="none" w="med" len="med"/>
                       <a:tailEnd type="none" w="med" len="med"/>
                     </a:lnB>
+                    <a:lnTlToBr w="12700" cmpd="sng">
+                      <a:noFill/>
+                      <a:prstDash val="solid"/>
+                    </a:lnTlToBr>
+                    <a:lnBlToTr w="12700" cmpd="sng">
+                      <a:noFill/>
+                      <a:prstDash val="solid"/>
+                    </a:lnBlToTr>
                     <a:noFill/>
                   </a:tcPr>
                 </a:tc>
@@ -16140,7 +16509,7 @@
         </p:nvSpPr>
         <p:spPr>
           <a:xfrm>
-            <a:off x="593422" y="1248422"/>
+            <a:off x="593422" y="1219847"/>
             <a:ext cx="10951483" cy="1121141"/>
           </a:xfrm>
           <a:prstGeom prst="rect">
@@ -17492,7 +17861,7 @@
         <p:spPr>
           <a:xfrm>
             <a:off x="3905337" y="1939915"/>
-            <a:ext cx="8025260" cy="3378489"/>
+            <a:ext cx="8025260" cy="3424655"/>
           </a:xfrm>
           <a:prstGeom prst="rect">
             <a:avLst/>
@@ -17512,28 +17881,28 @@
               <a:buNone/>
             </a:pPr>
             <a:r>
-              <a:rPr lang="en-US" altLang="ko-KR" sz="1600" b="1" dirty="0">
+              <a:rPr lang="en-US" altLang="ko-KR" b="1" dirty="0">
                 <a:latin typeface="D2Coding" panose="020B0609020101020101" pitchFamily="49" charset="-127"/>
                 <a:ea typeface="D2Coding" panose="020B0609020101020101" pitchFamily="49" charset="-127"/>
               </a:rPr>
               <a:t>State(</a:t>
             </a:r>
             <a:r>
-              <a:rPr lang="ko-KR" altLang="en-US" sz="1600" b="1" dirty="0">
+              <a:rPr lang="ko-KR" altLang="en-US" b="1" dirty="0">
                 <a:latin typeface="D2Coding" panose="020B0609020101020101" pitchFamily="49" charset="-127"/>
                 <a:ea typeface="D2Coding" panose="020B0609020101020101" pitchFamily="49" charset="-127"/>
               </a:rPr>
               <a:t>상태</a:t>
             </a:r>
             <a:r>
-              <a:rPr lang="en-US" altLang="ko-KR" sz="1600" b="1" dirty="0">
+              <a:rPr lang="en-US" altLang="ko-KR" b="1" dirty="0">
                 <a:latin typeface="D2Coding" panose="020B0609020101020101" pitchFamily="49" charset="-127"/>
                 <a:ea typeface="D2Coding" panose="020B0609020101020101" pitchFamily="49" charset="-127"/>
               </a:rPr>
               <a:t>)</a:t>
             </a:r>
             <a:r>
-              <a:rPr lang="ko-KR" altLang="en-US" sz="1600" b="1" dirty="0">
+              <a:rPr lang="ko-KR" altLang="en-US" b="1" dirty="0">
                 <a:latin typeface="D2Coding" panose="020B0609020101020101" pitchFamily="49" charset="-127"/>
                 <a:ea typeface="D2Coding" panose="020B0609020101020101" pitchFamily="49" charset="-127"/>
               </a:rPr>
